--- a/templet/base.pptx
+++ b/templet/base.pptx
@@ -4,20 +4,19 @@
   <p:sldMasterIdLst>
     <p:sldMasterId id="2147483648" r:id="rId1"/>
   </p:sldMasterIdLst>
-  <p:notesMasterIdLst>
-    <p:notesMasterId r:id="rId10"/>
-  </p:notesMasterIdLst>
   <p:sldIdLst>
-    <p:sldId id="256" r:id="rId2"/>
-    <p:sldId id="257" r:id="rId3"/>
-    <p:sldId id="258" r:id="rId4"/>
-    <p:sldId id="289" r:id="rId5"/>
-    <p:sldId id="262" r:id="rId6"/>
-    <p:sldId id="260" r:id="rId7"/>
-    <p:sldId id="267" r:id="rId8"/>
-    <p:sldId id="287" r:id="rId9"/>
+    <p:sldId id="256" r:id="rId7"/>
+    <p:sldId id="257" r:id="rId8"/>
+    <p:sldId id="258" r:id="rId9"/>
+    <p:sldId id="259" r:id="rId10"/>
+    <p:sldId id="260" r:id="rId11"/>
+    <p:sldId id="261" r:id="rId12"/>
+    <p:sldId id="262" r:id="rId13"/>
+    <p:sldId id="263" r:id="rId14"/>
+    <p:sldId id="264" r:id="rId15"/>
+    <p:sldId id="265" r:id="rId16"/>
   </p:sldIdLst>
-  <p:sldSz cx="12192000" cy="6858000"/>
+  <p:sldSz cx="12192000" cy="6858000" type="screen4x3"/>
   <p:notesSz cx="6858000" cy="9144000"/>
   <p:defaultTextStyle>
     <a:defPPr>
@@ -114,1044 +113,7 @@
       </a:defRPr>
     </a:lvl9pPr>
   </p:defaultTextStyle>
-  <p:extLst>
-    <p:ext uri="{EFAFB233-063F-42B5-8137-9DF3F51BA10A}">
-      <p15:sldGuideLst xmlns:p15="http://schemas.microsoft.com/office/powerpoint/2012/main">
-        <p15:guide id="1" orient="horz" pos="2160">
-          <p15:clr>
-            <a:srgbClr val="A4A3A4"/>
-          </p15:clr>
-        </p15:guide>
-        <p15:guide id="2" pos="2880">
-          <p15:clr>
-            <a:srgbClr val="A4A3A4"/>
-          </p15:clr>
-        </p15:guide>
-      </p15:sldGuideLst>
-    </p:ext>
-  </p:extLst>
 </p:presentation>
-</file>
-
-<file path=ppt/notesMasters/notesMaster1.xml><?xml version="1.0" encoding="utf-8"?>
-<p:notesMaster xmlns:a="http://schemas.openxmlformats.org/drawingml/2006/main" xmlns:r="http://schemas.openxmlformats.org/officeDocument/2006/relationships" xmlns:p="http://schemas.openxmlformats.org/presentationml/2006/main">
-  <p:cSld>
-    <p:bg>
-      <p:bgRef idx="1001">
-        <a:schemeClr val="bg1"/>
-      </p:bgRef>
-    </p:bg>
-    <p:spTree>
-      <p:nvGrpSpPr>
-        <p:cNvPr id="1" name=""/>
-        <p:cNvGrpSpPr/>
-        <p:nvPr/>
-      </p:nvGrpSpPr>
-      <p:grpSpPr>
-        <a:xfrm>
-          <a:off x="0" y="0"/>
-          <a:ext cx="0" cy="0"/>
-          <a:chOff x="0" y="0"/>
-          <a:chExt cx="0" cy="0"/>
-        </a:xfrm>
-      </p:grpSpPr>
-      <p:sp>
-        <p:nvSpPr>
-          <p:cNvPr id="2" name="머리글 개체 틀 1"/>
-          <p:cNvSpPr>
-            <a:spLocks noGrp="1"/>
-          </p:cNvSpPr>
-          <p:nvPr>
-            <p:ph type="hdr" sz="quarter"/>
-          </p:nvPr>
-        </p:nvSpPr>
-        <p:spPr>
-          <a:xfrm>
-            <a:off x="0" y="0"/>
-            <a:ext cx="2971800" cy="458788"/>
-          </a:xfrm>
-          <a:prstGeom prst="rect">
-            <a:avLst/>
-          </a:prstGeom>
-        </p:spPr>
-        <p:txBody>
-          <a:bodyPr vert="horz" lIns="91440" tIns="45720" rIns="91440" bIns="45720" rtlCol="0"/>
-          <a:lstStyle>
-            <a:lvl1pPr algn="l">
-              <a:defRPr sz="1200"/>
-            </a:lvl1pPr>
-          </a:lstStyle>
-          <a:p>
-            <a:endParaRPr lang="ko-KR" altLang="en-US"/>
-          </a:p>
-        </p:txBody>
-      </p:sp>
-      <p:sp>
-        <p:nvSpPr>
-          <p:cNvPr id="3" name="날짜 개체 틀 2"/>
-          <p:cNvSpPr>
-            <a:spLocks noGrp="1"/>
-          </p:cNvSpPr>
-          <p:nvPr>
-            <p:ph type="dt" idx="1"/>
-          </p:nvPr>
-        </p:nvSpPr>
-        <p:spPr>
-          <a:xfrm>
-            <a:off x="3884613" y="0"/>
-            <a:ext cx="2971800" cy="458788"/>
-          </a:xfrm>
-          <a:prstGeom prst="rect">
-            <a:avLst/>
-          </a:prstGeom>
-        </p:spPr>
-        <p:txBody>
-          <a:bodyPr vert="horz" lIns="91440" tIns="45720" rIns="91440" bIns="45720" rtlCol="0"/>
-          <a:lstStyle>
-            <a:lvl1pPr algn="r">
-              <a:defRPr sz="1200"/>
-            </a:lvl1pPr>
-          </a:lstStyle>
-          <a:p>
-            <a:fld id="{59EBB165-2344-4539-AB3C-05A1A1D2D529}" type="datetimeFigureOut">
-              <a:rPr lang="ko-KR" altLang="en-US" smtClean="0"/>
-              <a:t>2026-10-12</a:t>
-            </a:fld>
-            <a:endParaRPr lang="ko-KR" altLang="en-US"/>
-          </a:p>
-        </p:txBody>
-      </p:sp>
-      <p:sp>
-        <p:nvSpPr>
-          <p:cNvPr id="4" name="슬라이드 이미지 개체 틀 3"/>
-          <p:cNvSpPr>
-            <a:spLocks noGrp="1" noRot="1" noChangeAspect="1"/>
-          </p:cNvSpPr>
-          <p:nvPr>
-            <p:ph type="sldImg" idx="2"/>
-          </p:nvPr>
-        </p:nvSpPr>
-        <p:spPr>
-          <a:xfrm>
-            <a:off x="685800" y="1143000"/>
-            <a:ext cx="5486400" cy="3086100"/>
-          </a:xfrm>
-          <a:prstGeom prst="rect">
-            <a:avLst/>
-          </a:prstGeom>
-          <a:noFill/>
-          <a:ln w="12700">
-            <a:solidFill>
-              <a:prstClr val="black"/>
-            </a:solidFill>
-          </a:ln>
-        </p:spPr>
-        <p:txBody>
-          <a:bodyPr vert="horz" lIns="91440" tIns="45720" rIns="91440" bIns="45720" rtlCol="0" anchor="ctr"/>
-          <a:lstStyle/>
-          <a:p>
-            <a:endParaRPr lang="ko-KR" altLang="en-US"/>
-          </a:p>
-        </p:txBody>
-      </p:sp>
-      <p:sp>
-        <p:nvSpPr>
-          <p:cNvPr id="5" name="슬라이드 노트 개체 틀 4"/>
-          <p:cNvSpPr>
-            <a:spLocks noGrp="1"/>
-          </p:cNvSpPr>
-          <p:nvPr>
-            <p:ph type="body" sz="quarter" idx="3"/>
-          </p:nvPr>
-        </p:nvSpPr>
-        <p:spPr>
-          <a:xfrm>
-            <a:off x="685800" y="4400550"/>
-            <a:ext cx="5486400" cy="3600450"/>
-          </a:xfrm>
-          <a:prstGeom prst="rect">
-            <a:avLst/>
-          </a:prstGeom>
-        </p:spPr>
-        <p:txBody>
-          <a:bodyPr vert="horz" lIns="91440" tIns="45720" rIns="91440" bIns="45720" rtlCol="0"/>
-          <a:lstStyle/>
-          <a:p>
-            <a:pPr lvl="0"/>
-            <a:r>
-              <a:rPr lang="ko-KR" altLang="en-US"/>
-              <a:t>마스터 텍스트 스타일을 편집하려면 클릭</a:t>
-            </a:r>
-          </a:p>
-          <a:p>
-            <a:pPr lvl="1"/>
-            <a:r>
-              <a:rPr lang="ko-KR" altLang="en-US"/>
-              <a:t>두 번째 수준</a:t>
-            </a:r>
-          </a:p>
-          <a:p>
-            <a:pPr lvl="2"/>
-            <a:r>
-              <a:rPr lang="ko-KR" altLang="en-US"/>
-              <a:t>세 번째 수준</a:t>
-            </a:r>
-          </a:p>
-          <a:p>
-            <a:pPr lvl="3"/>
-            <a:r>
-              <a:rPr lang="ko-KR" altLang="en-US"/>
-              <a:t>네 번째 수준</a:t>
-            </a:r>
-          </a:p>
-          <a:p>
-            <a:pPr lvl="4"/>
-            <a:r>
-              <a:rPr lang="ko-KR" altLang="en-US"/>
-              <a:t>다섯 번째 수준</a:t>
-            </a:r>
-          </a:p>
-        </p:txBody>
-      </p:sp>
-      <p:sp>
-        <p:nvSpPr>
-          <p:cNvPr id="6" name="바닥글 개체 틀 5"/>
-          <p:cNvSpPr>
-            <a:spLocks noGrp="1"/>
-          </p:cNvSpPr>
-          <p:nvPr>
-            <p:ph type="ftr" sz="quarter" idx="4"/>
-          </p:nvPr>
-        </p:nvSpPr>
-        <p:spPr>
-          <a:xfrm>
-            <a:off x="0" y="8685213"/>
-            <a:ext cx="2971800" cy="458787"/>
-          </a:xfrm>
-          <a:prstGeom prst="rect">
-            <a:avLst/>
-          </a:prstGeom>
-        </p:spPr>
-        <p:txBody>
-          <a:bodyPr vert="horz" lIns="91440" tIns="45720" rIns="91440" bIns="45720" rtlCol="0" anchor="b"/>
-          <a:lstStyle>
-            <a:lvl1pPr algn="l">
-              <a:defRPr sz="1200"/>
-            </a:lvl1pPr>
-          </a:lstStyle>
-          <a:p>
-            <a:endParaRPr lang="ko-KR" altLang="en-US"/>
-          </a:p>
-        </p:txBody>
-      </p:sp>
-      <p:sp>
-        <p:nvSpPr>
-          <p:cNvPr id="7" name="슬라이드 번호 개체 틀 6"/>
-          <p:cNvSpPr>
-            <a:spLocks noGrp="1"/>
-          </p:cNvSpPr>
-          <p:nvPr>
-            <p:ph type="sldNum" sz="quarter" idx="5"/>
-          </p:nvPr>
-        </p:nvSpPr>
-        <p:spPr>
-          <a:xfrm>
-            <a:off x="3884613" y="8685213"/>
-            <a:ext cx="2971800" cy="458787"/>
-          </a:xfrm>
-          <a:prstGeom prst="rect">
-            <a:avLst/>
-          </a:prstGeom>
-        </p:spPr>
-        <p:txBody>
-          <a:bodyPr vert="horz" lIns="91440" tIns="45720" rIns="91440" bIns="45720" rtlCol="0" anchor="b"/>
-          <a:lstStyle>
-            <a:lvl1pPr algn="r">
-              <a:defRPr sz="1200"/>
-            </a:lvl1pPr>
-          </a:lstStyle>
-          <a:p>
-            <a:fld id="{C3AFE730-17D6-4FE5-8FAA-7862828E2FA1}" type="slidenum">
-              <a:rPr lang="ko-KR" altLang="en-US" smtClean="0"/>
-              <a:t>‹#›</a:t>
-            </a:fld>
-            <a:endParaRPr lang="ko-KR" altLang="en-US"/>
-          </a:p>
-        </p:txBody>
-      </p:sp>
-    </p:spTree>
-    <p:extLst>
-      <p:ext uri="{BB962C8B-B14F-4D97-AF65-F5344CB8AC3E}">
-        <p14:creationId xmlns:p14="http://schemas.microsoft.com/office/powerpoint/2010/main" val="4245290787"/>
-      </p:ext>
-    </p:extLst>
-  </p:cSld>
-  <p:clrMap bg1="lt1" tx1="dk1" bg2="lt2" tx2="dk2" accent1="accent1" accent2="accent2" accent3="accent3" accent4="accent4" accent5="accent5" accent6="accent6" hlink="hlink" folHlink="folHlink"/>
-  <p:notesStyle>
-    <a:lvl1pPr marL="0" algn="l" defTabSz="914400" rtl="0" eaLnBrk="1" latinLnBrk="1" hangingPunct="1">
-      <a:defRPr sz="1200" kern="1200">
-        <a:solidFill>
-          <a:schemeClr val="tx1"/>
-        </a:solidFill>
-        <a:latin typeface="+mn-lt"/>
-        <a:ea typeface="+mn-ea"/>
-        <a:cs typeface="+mn-cs"/>
-      </a:defRPr>
-    </a:lvl1pPr>
-    <a:lvl2pPr marL="457200" algn="l" defTabSz="914400" rtl="0" eaLnBrk="1" latinLnBrk="1" hangingPunct="1">
-      <a:defRPr sz="1200" kern="1200">
-        <a:solidFill>
-          <a:schemeClr val="tx1"/>
-        </a:solidFill>
-        <a:latin typeface="+mn-lt"/>
-        <a:ea typeface="+mn-ea"/>
-        <a:cs typeface="+mn-cs"/>
-      </a:defRPr>
-    </a:lvl2pPr>
-    <a:lvl3pPr marL="914400" algn="l" defTabSz="914400" rtl="0" eaLnBrk="1" latinLnBrk="1" hangingPunct="1">
-      <a:defRPr sz="1200" kern="1200">
-        <a:solidFill>
-          <a:schemeClr val="tx1"/>
-        </a:solidFill>
-        <a:latin typeface="+mn-lt"/>
-        <a:ea typeface="+mn-ea"/>
-        <a:cs typeface="+mn-cs"/>
-      </a:defRPr>
-    </a:lvl3pPr>
-    <a:lvl4pPr marL="1371600" algn="l" defTabSz="914400" rtl="0" eaLnBrk="1" latinLnBrk="1" hangingPunct="1">
-      <a:defRPr sz="1200" kern="1200">
-        <a:solidFill>
-          <a:schemeClr val="tx1"/>
-        </a:solidFill>
-        <a:latin typeface="+mn-lt"/>
-        <a:ea typeface="+mn-ea"/>
-        <a:cs typeface="+mn-cs"/>
-      </a:defRPr>
-    </a:lvl4pPr>
-    <a:lvl5pPr marL="1828800" algn="l" defTabSz="914400" rtl="0" eaLnBrk="1" latinLnBrk="1" hangingPunct="1">
-      <a:defRPr sz="1200" kern="1200">
-        <a:solidFill>
-          <a:schemeClr val="tx1"/>
-        </a:solidFill>
-        <a:latin typeface="+mn-lt"/>
-        <a:ea typeface="+mn-ea"/>
-        <a:cs typeface="+mn-cs"/>
-      </a:defRPr>
-    </a:lvl5pPr>
-    <a:lvl6pPr marL="2286000" algn="l" defTabSz="914400" rtl="0" eaLnBrk="1" latinLnBrk="1" hangingPunct="1">
-      <a:defRPr sz="1200" kern="1200">
-        <a:solidFill>
-          <a:schemeClr val="tx1"/>
-        </a:solidFill>
-        <a:latin typeface="+mn-lt"/>
-        <a:ea typeface="+mn-ea"/>
-        <a:cs typeface="+mn-cs"/>
-      </a:defRPr>
-    </a:lvl6pPr>
-    <a:lvl7pPr marL="2743200" algn="l" defTabSz="914400" rtl="0" eaLnBrk="1" latinLnBrk="1" hangingPunct="1">
-      <a:defRPr sz="1200" kern="1200">
-        <a:solidFill>
-          <a:schemeClr val="tx1"/>
-        </a:solidFill>
-        <a:latin typeface="+mn-lt"/>
-        <a:ea typeface="+mn-ea"/>
-        <a:cs typeface="+mn-cs"/>
-      </a:defRPr>
-    </a:lvl7pPr>
-    <a:lvl8pPr marL="3200400" algn="l" defTabSz="914400" rtl="0" eaLnBrk="1" latinLnBrk="1" hangingPunct="1">
-      <a:defRPr sz="1200" kern="1200">
-        <a:solidFill>
-          <a:schemeClr val="tx1"/>
-        </a:solidFill>
-        <a:latin typeface="+mn-lt"/>
-        <a:ea typeface="+mn-ea"/>
-        <a:cs typeface="+mn-cs"/>
-      </a:defRPr>
-    </a:lvl8pPr>
-    <a:lvl9pPr marL="3657600" algn="l" defTabSz="914400" rtl="0" eaLnBrk="1" latinLnBrk="1" hangingPunct="1">
-      <a:defRPr sz="1200" kern="1200">
-        <a:solidFill>
-          <a:schemeClr val="tx1"/>
-        </a:solidFill>
-        <a:latin typeface="+mn-lt"/>
-        <a:ea typeface="+mn-ea"/>
-        <a:cs typeface="+mn-cs"/>
-      </a:defRPr>
-    </a:lvl9pPr>
-  </p:notesStyle>
-</p:notesMaster>
-</file>
-
-<file path=ppt/notesSlides/notesSlide1.xml><?xml version="1.0" encoding="utf-8"?>
-<p:notes xmlns:a="http://schemas.openxmlformats.org/drawingml/2006/main" xmlns:r="http://schemas.openxmlformats.org/officeDocument/2006/relationships" xmlns:p="http://schemas.openxmlformats.org/presentationml/2006/main">
-  <p:cSld>
-    <p:spTree>
-      <p:nvGrpSpPr>
-        <p:cNvPr id="1" name=""/>
-        <p:cNvGrpSpPr/>
-        <p:nvPr/>
-      </p:nvGrpSpPr>
-      <p:grpSpPr>
-        <a:xfrm>
-          <a:off x="0" y="0"/>
-          <a:ext cx="0" cy="0"/>
-          <a:chOff x="0" y="0"/>
-          <a:chExt cx="0" cy="0"/>
-        </a:xfrm>
-      </p:grpSpPr>
-      <p:sp>
-        <p:nvSpPr>
-          <p:cNvPr id="2" name="슬라이드 이미지 개체 틀 1"/>
-          <p:cNvSpPr>
-            <a:spLocks noGrp="1" noRot="1" noChangeAspect="1"/>
-          </p:cNvSpPr>
-          <p:nvPr>
-            <p:ph type="sldImg"/>
-          </p:nvPr>
-        </p:nvSpPr>
-        <p:spPr/>
-      </p:sp>
-      <p:sp>
-        <p:nvSpPr>
-          <p:cNvPr id="3" name="슬라이드 노트 개체 틀 2"/>
-          <p:cNvSpPr>
-            <a:spLocks noGrp="1"/>
-          </p:cNvSpPr>
-          <p:nvPr>
-            <p:ph type="body" idx="1"/>
-          </p:nvPr>
-        </p:nvSpPr>
-        <p:spPr/>
-        <p:txBody>
-          <a:bodyPr/>
-          <a:lstStyle/>
-          <a:p>
-            <a:endParaRPr lang="ko-KR" altLang="en-US"/>
-          </a:p>
-        </p:txBody>
-      </p:sp>
-      <p:sp>
-        <p:nvSpPr>
-          <p:cNvPr id="4" name="슬라이드 번호 개체 틀 3"/>
-          <p:cNvSpPr>
-            <a:spLocks noGrp="1"/>
-          </p:cNvSpPr>
-          <p:nvPr>
-            <p:ph type="sldNum" sz="quarter" idx="5"/>
-          </p:nvPr>
-        </p:nvSpPr>
-        <p:spPr/>
-        <p:txBody>
-          <a:bodyPr/>
-          <a:lstStyle/>
-          <a:p>
-            <a:fld id="{C3AFE730-17D6-4FE5-8FAA-7862828E2FA1}" type="slidenum">
-              <a:rPr lang="ko-KR" altLang="en-US" smtClean="0"/>
-              <a:t>1</a:t>
-            </a:fld>
-            <a:endParaRPr lang="ko-KR" altLang="en-US"/>
-          </a:p>
-        </p:txBody>
-      </p:sp>
-    </p:spTree>
-    <p:extLst>
-      <p:ext uri="{BB962C8B-B14F-4D97-AF65-F5344CB8AC3E}">
-        <p14:creationId xmlns:p14="http://schemas.microsoft.com/office/powerpoint/2010/main" val="3384697140"/>
-      </p:ext>
-    </p:extLst>
-  </p:cSld>
-  <p:clrMapOvr>
-    <a:masterClrMapping/>
-  </p:clrMapOvr>
-</p:notes>
-</file>
-
-<file path=ppt/notesSlides/notesSlide2.xml><?xml version="1.0" encoding="utf-8"?>
-<p:notes xmlns:a="http://schemas.openxmlformats.org/drawingml/2006/main" xmlns:r="http://schemas.openxmlformats.org/officeDocument/2006/relationships" xmlns:p="http://schemas.openxmlformats.org/presentationml/2006/main">
-  <p:cSld>
-    <p:spTree>
-      <p:nvGrpSpPr>
-        <p:cNvPr id="1" name=""/>
-        <p:cNvGrpSpPr/>
-        <p:nvPr/>
-      </p:nvGrpSpPr>
-      <p:grpSpPr>
-        <a:xfrm>
-          <a:off x="0" y="0"/>
-          <a:ext cx="0" cy="0"/>
-          <a:chOff x="0" y="0"/>
-          <a:chExt cx="0" cy="0"/>
-        </a:xfrm>
-      </p:grpSpPr>
-      <p:sp>
-        <p:nvSpPr>
-          <p:cNvPr id="2" name="슬라이드 이미지 개체 틀 1"/>
-          <p:cNvSpPr>
-            <a:spLocks noGrp="1" noRot="1" noChangeAspect="1"/>
-          </p:cNvSpPr>
-          <p:nvPr>
-            <p:ph type="sldImg"/>
-          </p:nvPr>
-        </p:nvSpPr>
-        <p:spPr/>
-      </p:sp>
-      <p:sp>
-        <p:nvSpPr>
-          <p:cNvPr id="3" name="슬라이드 노트 개체 틀 2"/>
-          <p:cNvSpPr>
-            <a:spLocks noGrp="1"/>
-          </p:cNvSpPr>
-          <p:nvPr>
-            <p:ph type="body" idx="1"/>
-          </p:nvPr>
-        </p:nvSpPr>
-        <p:spPr/>
-        <p:txBody>
-          <a:bodyPr/>
-          <a:lstStyle/>
-          <a:p>
-            <a:endParaRPr lang="ko-KR" altLang="en-US"/>
-          </a:p>
-        </p:txBody>
-      </p:sp>
-      <p:sp>
-        <p:nvSpPr>
-          <p:cNvPr id="4" name="슬라이드 번호 개체 틀 3"/>
-          <p:cNvSpPr>
-            <a:spLocks noGrp="1"/>
-          </p:cNvSpPr>
-          <p:nvPr>
-            <p:ph type="sldNum" sz="quarter" idx="5"/>
-          </p:nvPr>
-        </p:nvSpPr>
-        <p:spPr/>
-        <p:txBody>
-          <a:bodyPr/>
-          <a:lstStyle/>
-          <a:p>
-            <a:fld id="{C3AFE730-17D6-4FE5-8FAA-7862828E2FA1}" type="slidenum">
-              <a:rPr lang="ko-KR" altLang="en-US" smtClean="0"/>
-              <a:t>2</a:t>
-            </a:fld>
-            <a:endParaRPr lang="ko-KR" altLang="en-US"/>
-          </a:p>
-        </p:txBody>
-      </p:sp>
-    </p:spTree>
-    <p:extLst>
-      <p:ext uri="{BB962C8B-B14F-4D97-AF65-F5344CB8AC3E}">
-        <p14:creationId xmlns:p14="http://schemas.microsoft.com/office/powerpoint/2010/main" val="760082839"/>
-      </p:ext>
-    </p:extLst>
-  </p:cSld>
-  <p:clrMapOvr>
-    <a:masterClrMapping/>
-  </p:clrMapOvr>
-</p:notes>
-</file>
-
-<file path=ppt/notesSlides/notesSlide3.xml><?xml version="1.0" encoding="utf-8"?>
-<p:notes xmlns:a="http://schemas.openxmlformats.org/drawingml/2006/main" xmlns:r="http://schemas.openxmlformats.org/officeDocument/2006/relationships" xmlns:p="http://schemas.openxmlformats.org/presentationml/2006/main">
-  <p:cSld>
-    <p:spTree>
-      <p:nvGrpSpPr>
-        <p:cNvPr id="1" name=""/>
-        <p:cNvGrpSpPr/>
-        <p:nvPr/>
-      </p:nvGrpSpPr>
-      <p:grpSpPr>
-        <a:xfrm>
-          <a:off x="0" y="0"/>
-          <a:ext cx="0" cy="0"/>
-          <a:chOff x="0" y="0"/>
-          <a:chExt cx="0" cy="0"/>
-        </a:xfrm>
-      </p:grpSpPr>
-      <p:sp>
-        <p:nvSpPr>
-          <p:cNvPr id="2" name="슬라이드 이미지 개체 틀 1"/>
-          <p:cNvSpPr>
-            <a:spLocks noGrp="1" noRot="1" noChangeAspect="1"/>
-          </p:cNvSpPr>
-          <p:nvPr>
-            <p:ph type="sldImg"/>
-          </p:nvPr>
-        </p:nvSpPr>
-        <p:spPr/>
-      </p:sp>
-      <p:sp>
-        <p:nvSpPr>
-          <p:cNvPr id="3" name="슬라이드 노트 개체 틀 2"/>
-          <p:cNvSpPr>
-            <a:spLocks noGrp="1"/>
-          </p:cNvSpPr>
-          <p:nvPr>
-            <p:ph type="body" idx="1"/>
-          </p:nvPr>
-        </p:nvSpPr>
-        <p:spPr/>
-        <p:txBody>
-          <a:bodyPr/>
-          <a:lstStyle/>
-          <a:p>
-            <a:endParaRPr lang="ko-KR" altLang="en-US"/>
-          </a:p>
-        </p:txBody>
-      </p:sp>
-      <p:sp>
-        <p:nvSpPr>
-          <p:cNvPr id="4" name="슬라이드 번호 개체 틀 3"/>
-          <p:cNvSpPr>
-            <a:spLocks noGrp="1"/>
-          </p:cNvSpPr>
-          <p:nvPr>
-            <p:ph type="sldNum" sz="quarter" idx="5"/>
-          </p:nvPr>
-        </p:nvSpPr>
-        <p:spPr/>
-        <p:txBody>
-          <a:bodyPr/>
-          <a:lstStyle/>
-          <a:p>
-            <a:fld id="{C3AFE730-17D6-4FE5-8FAA-7862828E2FA1}" type="slidenum">
-              <a:rPr lang="ko-KR" altLang="en-US" smtClean="0"/>
-              <a:t>3</a:t>
-            </a:fld>
-            <a:endParaRPr lang="ko-KR" altLang="en-US"/>
-          </a:p>
-        </p:txBody>
-      </p:sp>
-    </p:spTree>
-    <p:extLst>
-      <p:ext uri="{BB962C8B-B14F-4D97-AF65-F5344CB8AC3E}">
-        <p14:creationId xmlns:p14="http://schemas.microsoft.com/office/powerpoint/2010/main" val="1359390854"/>
-      </p:ext>
-    </p:extLst>
-  </p:cSld>
-  <p:clrMapOvr>
-    <a:masterClrMapping/>
-  </p:clrMapOvr>
-</p:notes>
-</file>
-
-<file path=ppt/notesSlides/notesSlide4.xml><?xml version="1.0" encoding="utf-8"?>
-<p:notes xmlns:a="http://schemas.openxmlformats.org/drawingml/2006/main" xmlns:r="http://schemas.openxmlformats.org/officeDocument/2006/relationships" xmlns:p="http://schemas.openxmlformats.org/presentationml/2006/main">
-  <p:cSld>
-    <p:spTree>
-      <p:nvGrpSpPr>
-        <p:cNvPr id="1" name=""/>
-        <p:cNvGrpSpPr/>
-        <p:nvPr/>
-      </p:nvGrpSpPr>
-      <p:grpSpPr>
-        <a:xfrm>
-          <a:off x="0" y="0"/>
-          <a:ext cx="0" cy="0"/>
-          <a:chOff x="0" y="0"/>
-          <a:chExt cx="0" cy="0"/>
-        </a:xfrm>
-      </p:grpSpPr>
-      <p:sp>
-        <p:nvSpPr>
-          <p:cNvPr id="2" name="슬라이드 이미지 개체 틀 1"/>
-          <p:cNvSpPr>
-            <a:spLocks noGrp="1" noRot="1" noChangeAspect="1"/>
-          </p:cNvSpPr>
-          <p:nvPr>
-            <p:ph type="sldImg"/>
-          </p:nvPr>
-        </p:nvSpPr>
-        <p:spPr/>
-      </p:sp>
-      <p:sp>
-        <p:nvSpPr>
-          <p:cNvPr id="3" name="슬라이드 노트 개체 틀 2"/>
-          <p:cNvSpPr>
-            <a:spLocks noGrp="1"/>
-          </p:cNvSpPr>
-          <p:nvPr>
-            <p:ph type="body" idx="1"/>
-          </p:nvPr>
-        </p:nvSpPr>
-        <p:spPr/>
-        <p:txBody>
-          <a:bodyPr/>
-          <a:lstStyle/>
-          <a:p>
-            <a:endParaRPr lang="ko-KR" altLang="en-US"/>
-          </a:p>
-        </p:txBody>
-      </p:sp>
-      <p:sp>
-        <p:nvSpPr>
-          <p:cNvPr id="4" name="슬라이드 번호 개체 틀 3"/>
-          <p:cNvSpPr>
-            <a:spLocks noGrp="1"/>
-          </p:cNvSpPr>
-          <p:nvPr>
-            <p:ph type="sldNum" sz="quarter" idx="5"/>
-          </p:nvPr>
-        </p:nvSpPr>
-        <p:spPr/>
-        <p:txBody>
-          <a:bodyPr/>
-          <a:lstStyle/>
-          <a:p>
-            <a:fld id="{C3AFE730-17D6-4FE5-8FAA-7862828E2FA1}" type="slidenum">
-              <a:rPr lang="ko-KR" altLang="en-US" smtClean="0"/>
-              <a:t>4</a:t>
-            </a:fld>
-            <a:endParaRPr lang="ko-KR" altLang="en-US"/>
-          </a:p>
-        </p:txBody>
-      </p:sp>
-    </p:spTree>
-    <p:extLst>
-      <p:ext uri="{BB962C8B-B14F-4D97-AF65-F5344CB8AC3E}">
-        <p14:creationId xmlns:p14="http://schemas.microsoft.com/office/powerpoint/2010/main" val="2816935591"/>
-      </p:ext>
-    </p:extLst>
-  </p:cSld>
-  <p:clrMapOvr>
-    <a:masterClrMapping/>
-  </p:clrMapOvr>
-</p:notes>
-</file>
-
-<file path=ppt/notesSlides/notesSlide5.xml><?xml version="1.0" encoding="utf-8"?>
-<p:notes xmlns:a="http://schemas.openxmlformats.org/drawingml/2006/main" xmlns:r="http://schemas.openxmlformats.org/officeDocument/2006/relationships" xmlns:p="http://schemas.openxmlformats.org/presentationml/2006/main">
-  <p:cSld>
-    <p:spTree>
-      <p:nvGrpSpPr>
-        <p:cNvPr id="1" name=""/>
-        <p:cNvGrpSpPr/>
-        <p:nvPr/>
-      </p:nvGrpSpPr>
-      <p:grpSpPr>
-        <a:xfrm>
-          <a:off x="0" y="0"/>
-          <a:ext cx="0" cy="0"/>
-          <a:chOff x="0" y="0"/>
-          <a:chExt cx="0" cy="0"/>
-        </a:xfrm>
-      </p:grpSpPr>
-      <p:sp>
-        <p:nvSpPr>
-          <p:cNvPr id="2" name="슬라이드 이미지 개체 틀 1"/>
-          <p:cNvSpPr>
-            <a:spLocks noGrp="1" noRot="1" noChangeAspect="1"/>
-          </p:cNvSpPr>
-          <p:nvPr>
-            <p:ph type="sldImg"/>
-          </p:nvPr>
-        </p:nvSpPr>
-        <p:spPr/>
-      </p:sp>
-      <p:sp>
-        <p:nvSpPr>
-          <p:cNvPr id="3" name="슬라이드 노트 개체 틀 2"/>
-          <p:cNvSpPr>
-            <a:spLocks noGrp="1"/>
-          </p:cNvSpPr>
-          <p:nvPr>
-            <p:ph type="body" idx="1"/>
-          </p:nvPr>
-        </p:nvSpPr>
-        <p:spPr/>
-        <p:txBody>
-          <a:bodyPr/>
-          <a:lstStyle/>
-          <a:p>
-            <a:endParaRPr lang="ko-KR" altLang="en-US"/>
-          </a:p>
-        </p:txBody>
-      </p:sp>
-      <p:sp>
-        <p:nvSpPr>
-          <p:cNvPr id="4" name="슬라이드 번호 개체 틀 3"/>
-          <p:cNvSpPr>
-            <a:spLocks noGrp="1"/>
-          </p:cNvSpPr>
-          <p:nvPr>
-            <p:ph type="sldNum" sz="quarter" idx="5"/>
-          </p:nvPr>
-        </p:nvSpPr>
-        <p:spPr/>
-        <p:txBody>
-          <a:bodyPr/>
-          <a:lstStyle/>
-          <a:p>
-            <a:fld id="{C3AFE730-17D6-4FE5-8FAA-7862828E2FA1}" type="slidenum">
-              <a:rPr lang="ko-KR" altLang="en-US" smtClean="0"/>
-              <a:t>5</a:t>
-            </a:fld>
-            <a:endParaRPr lang="ko-KR" altLang="en-US"/>
-          </a:p>
-        </p:txBody>
-      </p:sp>
-    </p:spTree>
-    <p:extLst>
-      <p:ext uri="{BB962C8B-B14F-4D97-AF65-F5344CB8AC3E}">
-        <p14:creationId xmlns:p14="http://schemas.microsoft.com/office/powerpoint/2010/main" val="3799122972"/>
-      </p:ext>
-    </p:extLst>
-  </p:cSld>
-  <p:clrMapOvr>
-    <a:masterClrMapping/>
-  </p:clrMapOvr>
-</p:notes>
-</file>
-
-<file path=ppt/notesSlides/notesSlide6.xml><?xml version="1.0" encoding="utf-8"?>
-<p:notes xmlns:a="http://schemas.openxmlformats.org/drawingml/2006/main" xmlns:r="http://schemas.openxmlformats.org/officeDocument/2006/relationships" xmlns:p="http://schemas.openxmlformats.org/presentationml/2006/main">
-  <p:cSld>
-    <p:spTree>
-      <p:nvGrpSpPr>
-        <p:cNvPr id="1" name=""/>
-        <p:cNvGrpSpPr/>
-        <p:nvPr/>
-      </p:nvGrpSpPr>
-      <p:grpSpPr>
-        <a:xfrm>
-          <a:off x="0" y="0"/>
-          <a:ext cx="0" cy="0"/>
-          <a:chOff x="0" y="0"/>
-          <a:chExt cx="0" cy="0"/>
-        </a:xfrm>
-      </p:grpSpPr>
-      <p:sp>
-        <p:nvSpPr>
-          <p:cNvPr id="2" name="슬라이드 이미지 개체 틀 1"/>
-          <p:cNvSpPr>
-            <a:spLocks noGrp="1" noRot="1" noChangeAspect="1"/>
-          </p:cNvSpPr>
-          <p:nvPr>
-            <p:ph type="sldImg"/>
-          </p:nvPr>
-        </p:nvSpPr>
-        <p:spPr/>
-      </p:sp>
-      <p:sp>
-        <p:nvSpPr>
-          <p:cNvPr id="3" name="슬라이드 노트 개체 틀 2"/>
-          <p:cNvSpPr>
-            <a:spLocks noGrp="1"/>
-          </p:cNvSpPr>
-          <p:nvPr>
-            <p:ph type="body" idx="1"/>
-          </p:nvPr>
-        </p:nvSpPr>
-        <p:spPr/>
-        <p:txBody>
-          <a:bodyPr/>
-          <a:lstStyle/>
-          <a:p>
-            <a:endParaRPr lang="ko-KR" altLang="en-US"/>
-          </a:p>
-        </p:txBody>
-      </p:sp>
-      <p:sp>
-        <p:nvSpPr>
-          <p:cNvPr id="4" name="슬라이드 번호 개체 틀 3"/>
-          <p:cNvSpPr>
-            <a:spLocks noGrp="1"/>
-          </p:cNvSpPr>
-          <p:nvPr>
-            <p:ph type="sldNum" sz="quarter" idx="5"/>
-          </p:nvPr>
-        </p:nvSpPr>
-        <p:spPr/>
-        <p:txBody>
-          <a:bodyPr/>
-          <a:lstStyle/>
-          <a:p>
-            <a:fld id="{C3AFE730-17D6-4FE5-8FAA-7862828E2FA1}" type="slidenum">
-              <a:rPr lang="ko-KR" altLang="en-US" smtClean="0"/>
-              <a:t>6</a:t>
-            </a:fld>
-            <a:endParaRPr lang="ko-KR" altLang="en-US"/>
-          </a:p>
-        </p:txBody>
-      </p:sp>
-    </p:spTree>
-    <p:extLst>
-      <p:ext uri="{BB962C8B-B14F-4D97-AF65-F5344CB8AC3E}">
-        <p14:creationId xmlns:p14="http://schemas.microsoft.com/office/powerpoint/2010/main" val="2390427738"/>
-      </p:ext>
-    </p:extLst>
-  </p:cSld>
-  <p:clrMapOvr>
-    <a:masterClrMapping/>
-  </p:clrMapOvr>
-</p:notes>
-</file>
-
-<file path=ppt/notesSlides/notesSlide7.xml><?xml version="1.0" encoding="utf-8"?>
-<p:notes xmlns:a="http://schemas.openxmlformats.org/drawingml/2006/main" xmlns:r="http://schemas.openxmlformats.org/officeDocument/2006/relationships" xmlns:p="http://schemas.openxmlformats.org/presentationml/2006/main">
-  <p:cSld>
-    <p:spTree>
-      <p:nvGrpSpPr>
-        <p:cNvPr id="1" name=""/>
-        <p:cNvGrpSpPr/>
-        <p:nvPr/>
-      </p:nvGrpSpPr>
-      <p:grpSpPr>
-        <a:xfrm>
-          <a:off x="0" y="0"/>
-          <a:ext cx="0" cy="0"/>
-          <a:chOff x="0" y="0"/>
-          <a:chExt cx="0" cy="0"/>
-        </a:xfrm>
-      </p:grpSpPr>
-      <p:sp>
-        <p:nvSpPr>
-          <p:cNvPr id="2" name="슬라이드 이미지 개체 틀 1"/>
-          <p:cNvSpPr>
-            <a:spLocks noGrp="1" noRot="1" noChangeAspect="1"/>
-          </p:cNvSpPr>
-          <p:nvPr>
-            <p:ph type="sldImg"/>
-          </p:nvPr>
-        </p:nvSpPr>
-        <p:spPr/>
-      </p:sp>
-      <p:sp>
-        <p:nvSpPr>
-          <p:cNvPr id="3" name="슬라이드 노트 개체 틀 2"/>
-          <p:cNvSpPr>
-            <a:spLocks noGrp="1"/>
-          </p:cNvSpPr>
-          <p:nvPr>
-            <p:ph type="body" idx="1"/>
-          </p:nvPr>
-        </p:nvSpPr>
-        <p:spPr/>
-        <p:txBody>
-          <a:bodyPr/>
-          <a:lstStyle/>
-          <a:p>
-            <a:endParaRPr lang="ko-KR" altLang="en-US"/>
-          </a:p>
-        </p:txBody>
-      </p:sp>
-      <p:sp>
-        <p:nvSpPr>
-          <p:cNvPr id="4" name="슬라이드 번호 개체 틀 3"/>
-          <p:cNvSpPr>
-            <a:spLocks noGrp="1"/>
-          </p:cNvSpPr>
-          <p:nvPr>
-            <p:ph type="sldNum" sz="quarter" idx="5"/>
-          </p:nvPr>
-        </p:nvSpPr>
-        <p:spPr/>
-        <p:txBody>
-          <a:bodyPr/>
-          <a:lstStyle/>
-          <a:p>
-            <a:fld id="{C3AFE730-17D6-4FE5-8FAA-7862828E2FA1}" type="slidenum">
-              <a:rPr lang="ko-KR" altLang="en-US" smtClean="0"/>
-              <a:t>7</a:t>
-            </a:fld>
-            <a:endParaRPr lang="ko-KR" altLang="en-US"/>
-          </a:p>
-        </p:txBody>
-      </p:sp>
-    </p:spTree>
-    <p:extLst>
-      <p:ext uri="{BB962C8B-B14F-4D97-AF65-F5344CB8AC3E}">
-        <p14:creationId xmlns:p14="http://schemas.microsoft.com/office/powerpoint/2010/main" val="1898386831"/>
-      </p:ext>
-    </p:extLst>
-  </p:cSld>
-  <p:clrMapOvr>
-    <a:masterClrMapping/>
-  </p:clrMapOvr>
-</p:notes>
-</file>
-
-<file path=ppt/notesSlides/notesSlide8.xml><?xml version="1.0" encoding="utf-8"?>
-<p:notes xmlns:a="http://schemas.openxmlformats.org/drawingml/2006/main" xmlns:r="http://schemas.openxmlformats.org/officeDocument/2006/relationships" xmlns:p="http://schemas.openxmlformats.org/presentationml/2006/main">
-  <p:cSld>
-    <p:spTree>
-      <p:nvGrpSpPr>
-        <p:cNvPr id="1" name=""/>
-        <p:cNvGrpSpPr/>
-        <p:nvPr/>
-      </p:nvGrpSpPr>
-      <p:grpSpPr>
-        <a:xfrm>
-          <a:off x="0" y="0"/>
-          <a:ext cx="0" cy="0"/>
-          <a:chOff x="0" y="0"/>
-          <a:chExt cx="0" cy="0"/>
-        </a:xfrm>
-      </p:grpSpPr>
-      <p:sp>
-        <p:nvSpPr>
-          <p:cNvPr id="2" name="슬라이드 이미지 개체 틀 1"/>
-          <p:cNvSpPr>
-            <a:spLocks noGrp="1" noRot="1" noChangeAspect="1"/>
-          </p:cNvSpPr>
-          <p:nvPr>
-            <p:ph type="sldImg"/>
-          </p:nvPr>
-        </p:nvSpPr>
-        <p:spPr/>
-      </p:sp>
-      <p:sp>
-        <p:nvSpPr>
-          <p:cNvPr id="3" name="슬라이드 노트 개체 틀 2"/>
-          <p:cNvSpPr>
-            <a:spLocks noGrp="1"/>
-          </p:cNvSpPr>
-          <p:nvPr>
-            <p:ph type="body" idx="1"/>
-          </p:nvPr>
-        </p:nvSpPr>
-        <p:spPr/>
-        <p:txBody>
-          <a:bodyPr/>
-          <a:lstStyle/>
-          <a:p>
-            <a:endParaRPr lang="ko-KR" altLang="en-US"/>
-          </a:p>
-        </p:txBody>
-      </p:sp>
-      <p:sp>
-        <p:nvSpPr>
-          <p:cNvPr id="4" name="슬라이드 번호 개체 틀 3"/>
-          <p:cNvSpPr>
-            <a:spLocks noGrp="1"/>
-          </p:cNvSpPr>
-          <p:nvPr>
-            <p:ph type="sldNum" sz="quarter" idx="5"/>
-          </p:nvPr>
-        </p:nvSpPr>
-        <p:spPr/>
-        <p:txBody>
-          <a:bodyPr/>
-          <a:lstStyle/>
-          <a:p>
-            <a:fld id="{C3AFE730-17D6-4FE5-8FAA-7862828E2FA1}" type="slidenum">
-              <a:rPr lang="ko-KR" altLang="en-US" smtClean="0"/>
-              <a:t>8</a:t>
-            </a:fld>
-            <a:endParaRPr lang="ko-KR" altLang="en-US"/>
-          </a:p>
-        </p:txBody>
-      </p:sp>
-    </p:spTree>
-    <p:extLst>
-      <p:ext uri="{BB962C8B-B14F-4D97-AF65-F5344CB8AC3E}">
-        <p14:creationId xmlns:p14="http://schemas.microsoft.com/office/powerpoint/2010/main" val="2613557926"/>
-      </p:ext>
-    </p:extLst>
-  </p:cSld>
-  <p:clrMapOvr>
-    <a:masterClrMapping/>
-  </p:clrMapOvr>
-</p:notes>
 </file>
 
 <file path=ppt/slideLayouts/slideLayout1.xml><?xml version="1.0" encoding="utf-8"?>
@@ -1192,9 +154,10 @@
           <a:lstStyle/>
           <a:p>
             <a:r>
-              <a:rPr lang="en-US"/>
+              <a:rPr lang="en-US" smtClean="0"/>
               <a:t>Click to edit Master title style</a:t>
             </a:r>
+            <a:endParaRPr lang="en-US"/>
           </a:p>
         </p:txBody>
       </p:sp>
@@ -1310,9 +273,10 @@
           </a:lstStyle>
           <a:p>
             <a:r>
-              <a:rPr lang="en-US"/>
+              <a:rPr lang="en-US" smtClean="0"/>
               <a:t>Click to edit Master subtitle style</a:t>
             </a:r>
+            <a:endParaRPr lang="en-US"/>
           </a:p>
         </p:txBody>
       </p:sp>
@@ -1333,7 +297,7 @@
           <a:p>
             <a:fld id="{5BCAD085-E8A6-8845-BD4E-CB4CCA059FC4}" type="datetimeFigureOut">
               <a:rPr lang="en-US" smtClean="0"/>
-              <a:t>10/12/2026</a:t>
+              <a:t>1/27/13</a:t>
             </a:fld>
             <a:endParaRPr lang="en-US"/>
           </a:p>
@@ -1427,9 +391,10 @@
           <a:lstStyle/>
           <a:p>
             <a:r>
-              <a:rPr lang="en-US"/>
+              <a:rPr lang="en-US" smtClean="0"/>
               <a:t>Click to edit Master title style</a:t>
             </a:r>
+            <a:endParaRPr lang="en-US"/>
           </a:p>
         </p:txBody>
       </p:sp>
@@ -1450,37 +415,38 @@
           <a:p>
             <a:pPr lvl="0"/>
             <a:r>
-              <a:rPr lang="en-US"/>
+              <a:rPr lang="en-US" smtClean="0"/>
               <a:t>Click to edit Master text styles</a:t>
             </a:r>
           </a:p>
           <a:p>
             <a:pPr lvl="1"/>
             <a:r>
-              <a:rPr lang="en-US"/>
+              <a:rPr lang="en-US" smtClean="0"/>
               <a:t>Second level</a:t>
             </a:r>
           </a:p>
           <a:p>
             <a:pPr lvl="2"/>
             <a:r>
-              <a:rPr lang="en-US"/>
+              <a:rPr lang="en-US" smtClean="0"/>
               <a:t>Third level</a:t>
             </a:r>
           </a:p>
           <a:p>
             <a:pPr lvl="3"/>
             <a:r>
-              <a:rPr lang="en-US"/>
+              <a:rPr lang="en-US" smtClean="0"/>
               <a:t>Fourth level</a:t>
             </a:r>
           </a:p>
           <a:p>
             <a:pPr lvl="4"/>
             <a:r>
-              <a:rPr lang="en-US"/>
+              <a:rPr lang="en-US" smtClean="0"/>
               <a:t>Fifth level</a:t>
             </a:r>
+            <a:endParaRPr lang="en-US"/>
           </a:p>
         </p:txBody>
       </p:sp>
@@ -1501,7 +467,7 @@
           <a:p>
             <a:fld id="{5BCAD085-E8A6-8845-BD4E-CB4CCA059FC4}" type="datetimeFigureOut">
               <a:rPr lang="en-US" smtClean="0"/>
-              <a:t>10/12/2026</a:t>
+              <a:t>1/27/13</a:t>
             </a:fld>
             <a:endParaRPr lang="en-US"/>
           </a:p>
@@ -1600,9 +566,10 @@
           <a:lstStyle/>
           <a:p>
             <a:r>
-              <a:rPr lang="en-US"/>
+              <a:rPr lang="en-US" smtClean="0"/>
               <a:t>Click to edit Master title style</a:t>
             </a:r>
+            <a:endParaRPr lang="en-US"/>
           </a:p>
         </p:txBody>
       </p:sp>
@@ -1628,37 +595,38 @@
           <a:p>
             <a:pPr lvl="0"/>
             <a:r>
-              <a:rPr lang="en-US"/>
+              <a:rPr lang="en-US" smtClean="0"/>
               <a:t>Click to edit Master text styles</a:t>
             </a:r>
           </a:p>
           <a:p>
             <a:pPr lvl="1"/>
             <a:r>
-              <a:rPr lang="en-US"/>
+              <a:rPr lang="en-US" smtClean="0"/>
               <a:t>Second level</a:t>
             </a:r>
           </a:p>
           <a:p>
             <a:pPr lvl="2"/>
             <a:r>
-              <a:rPr lang="en-US"/>
+              <a:rPr lang="en-US" smtClean="0"/>
               <a:t>Third level</a:t>
             </a:r>
           </a:p>
           <a:p>
             <a:pPr lvl="3"/>
             <a:r>
-              <a:rPr lang="en-US"/>
+              <a:rPr lang="en-US" smtClean="0"/>
               <a:t>Fourth level</a:t>
             </a:r>
           </a:p>
           <a:p>
             <a:pPr lvl="4"/>
             <a:r>
-              <a:rPr lang="en-US"/>
+              <a:rPr lang="en-US" smtClean="0"/>
               <a:t>Fifth level</a:t>
             </a:r>
+            <a:endParaRPr lang="en-US"/>
           </a:p>
         </p:txBody>
       </p:sp>
@@ -1679,7 +647,7 @@
           <a:p>
             <a:fld id="{5BCAD085-E8A6-8845-BD4E-CB4CCA059FC4}" type="datetimeFigureOut">
               <a:rPr lang="en-US" smtClean="0"/>
-              <a:t>10/12/2026</a:t>
+              <a:t>1/27/13</a:t>
             </a:fld>
             <a:endParaRPr lang="en-US"/>
           </a:p>
@@ -1773,9 +741,10 @@
           <a:lstStyle/>
           <a:p>
             <a:r>
-              <a:rPr lang="en-US"/>
+              <a:rPr lang="en-US" smtClean="0"/>
               <a:t>Click to edit Master title style</a:t>
             </a:r>
+            <a:endParaRPr lang="en-US"/>
           </a:p>
         </p:txBody>
       </p:sp>
@@ -1796,37 +765,38 @@
           <a:p>
             <a:pPr lvl="0"/>
             <a:r>
-              <a:rPr lang="en-US"/>
+              <a:rPr lang="en-US" smtClean="0"/>
               <a:t>Click to edit Master text styles</a:t>
             </a:r>
           </a:p>
           <a:p>
             <a:pPr lvl="1"/>
             <a:r>
-              <a:rPr lang="en-US"/>
+              <a:rPr lang="en-US" smtClean="0"/>
               <a:t>Second level</a:t>
             </a:r>
           </a:p>
           <a:p>
             <a:pPr lvl="2"/>
             <a:r>
-              <a:rPr lang="en-US"/>
+              <a:rPr lang="en-US" smtClean="0"/>
               <a:t>Third level</a:t>
             </a:r>
           </a:p>
           <a:p>
             <a:pPr lvl="3"/>
             <a:r>
-              <a:rPr lang="en-US"/>
+              <a:rPr lang="en-US" smtClean="0"/>
               <a:t>Fourth level</a:t>
             </a:r>
           </a:p>
           <a:p>
             <a:pPr lvl="4"/>
             <a:r>
-              <a:rPr lang="en-US"/>
+              <a:rPr lang="en-US" smtClean="0"/>
               <a:t>Fifth level</a:t>
             </a:r>
+            <a:endParaRPr lang="en-US"/>
           </a:p>
         </p:txBody>
       </p:sp>
@@ -1847,7 +817,7 @@
           <a:p>
             <a:fld id="{5BCAD085-E8A6-8845-BD4E-CB4CCA059FC4}" type="datetimeFigureOut">
               <a:rPr lang="en-US" smtClean="0"/>
-              <a:t>10/12/2026</a:t>
+              <a:t>1/27/13</a:t>
             </a:fld>
             <a:endParaRPr lang="en-US"/>
           </a:p>
@@ -1950,9 +920,10 @@
           </a:lstStyle>
           <a:p>
             <a:r>
-              <a:rPr lang="en-US"/>
+              <a:rPr lang="en-US" smtClean="0"/>
               <a:t>Click to edit Master title style</a:t>
             </a:r>
+            <a:endParaRPr lang="en-US"/>
           </a:p>
         </p:txBody>
       </p:sp>
@@ -2069,7 +1040,7 @@
           <a:p>
             <a:pPr lvl="0"/>
             <a:r>
-              <a:rPr lang="en-US"/>
+              <a:rPr lang="en-US" smtClean="0"/>
               <a:t>Click to edit Master text styles</a:t>
             </a:r>
           </a:p>
@@ -2092,7 +1063,7 @@
           <a:p>
             <a:fld id="{5BCAD085-E8A6-8845-BD4E-CB4CCA059FC4}" type="datetimeFigureOut">
               <a:rPr lang="en-US" smtClean="0"/>
-              <a:t>10/12/2026</a:t>
+              <a:t>1/27/13</a:t>
             </a:fld>
             <a:endParaRPr lang="en-US"/>
           </a:p>
@@ -2186,9 +1157,10 @@
           <a:lstStyle/>
           <a:p>
             <a:r>
-              <a:rPr lang="en-US"/>
+              <a:rPr lang="en-US" smtClean="0"/>
               <a:t>Click to edit Master title style</a:t>
             </a:r>
+            <a:endParaRPr lang="en-US"/>
           </a:p>
         </p:txBody>
       </p:sp>
@@ -2242,37 +1214,38 @@
           <a:p>
             <a:pPr lvl="0"/>
             <a:r>
-              <a:rPr lang="en-US"/>
+              <a:rPr lang="en-US" smtClean="0"/>
               <a:t>Click to edit Master text styles</a:t>
             </a:r>
           </a:p>
           <a:p>
             <a:pPr lvl="1"/>
             <a:r>
-              <a:rPr lang="en-US"/>
+              <a:rPr lang="en-US" smtClean="0"/>
               <a:t>Second level</a:t>
             </a:r>
           </a:p>
           <a:p>
             <a:pPr lvl="2"/>
             <a:r>
-              <a:rPr lang="en-US"/>
+              <a:rPr lang="en-US" smtClean="0"/>
               <a:t>Third level</a:t>
             </a:r>
           </a:p>
           <a:p>
             <a:pPr lvl="3"/>
             <a:r>
-              <a:rPr lang="en-US"/>
+              <a:rPr lang="en-US" smtClean="0"/>
               <a:t>Fourth level</a:t>
             </a:r>
           </a:p>
           <a:p>
             <a:pPr lvl="4"/>
             <a:r>
-              <a:rPr lang="en-US"/>
+              <a:rPr lang="en-US" smtClean="0"/>
               <a:t>Fifth level</a:t>
             </a:r>
+            <a:endParaRPr lang="en-US"/>
           </a:p>
         </p:txBody>
       </p:sp>
@@ -2326,37 +1299,38 @@
           <a:p>
             <a:pPr lvl="0"/>
             <a:r>
-              <a:rPr lang="en-US"/>
+              <a:rPr lang="en-US" smtClean="0"/>
               <a:t>Click to edit Master text styles</a:t>
             </a:r>
           </a:p>
           <a:p>
             <a:pPr lvl="1"/>
             <a:r>
-              <a:rPr lang="en-US"/>
+              <a:rPr lang="en-US" smtClean="0"/>
               <a:t>Second level</a:t>
             </a:r>
           </a:p>
           <a:p>
             <a:pPr lvl="2"/>
             <a:r>
-              <a:rPr lang="en-US"/>
+              <a:rPr lang="en-US" smtClean="0"/>
               <a:t>Third level</a:t>
             </a:r>
           </a:p>
           <a:p>
             <a:pPr lvl="3"/>
             <a:r>
-              <a:rPr lang="en-US"/>
+              <a:rPr lang="en-US" smtClean="0"/>
               <a:t>Fourth level</a:t>
             </a:r>
           </a:p>
           <a:p>
             <a:pPr lvl="4"/>
             <a:r>
-              <a:rPr lang="en-US"/>
+              <a:rPr lang="en-US" smtClean="0"/>
               <a:t>Fifth level</a:t>
             </a:r>
+            <a:endParaRPr lang="en-US"/>
           </a:p>
         </p:txBody>
       </p:sp>
@@ -2377,7 +1351,7 @@
           <a:p>
             <a:fld id="{5BCAD085-E8A6-8845-BD4E-CB4CCA059FC4}" type="datetimeFigureOut">
               <a:rPr lang="en-US" smtClean="0"/>
-              <a:t>10/12/2026</a:t>
+              <a:t>1/27/13</a:t>
             </a:fld>
             <a:endParaRPr lang="en-US"/>
           </a:p>
@@ -2475,9 +1449,10 @@
           </a:lstStyle>
           <a:p>
             <a:r>
-              <a:rPr lang="en-US"/>
+              <a:rPr lang="en-US" smtClean="0"/>
               <a:t>Click to edit Master title style</a:t>
             </a:r>
+            <a:endParaRPr lang="en-US"/>
           </a:p>
         </p:txBody>
       </p:sp>
@@ -2540,7 +1515,7 @@
           <a:p>
             <a:pPr lvl="0"/>
             <a:r>
-              <a:rPr lang="en-US"/>
+              <a:rPr lang="en-US" smtClean="0"/>
               <a:t>Click to edit Master text styles</a:t>
             </a:r>
           </a:p>
@@ -2596,37 +1571,38 @@
           <a:p>
             <a:pPr lvl="0"/>
             <a:r>
-              <a:rPr lang="en-US"/>
+              <a:rPr lang="en-US" smtClean="0"/>
               <a:t>Click to edit Master text styles</a:t>
             </a:r>
           </a:p>
           <a:p>
             <a:pPr lvl="1"/>
             <a:r>
-              <a:rPr lang="en-US"/>
+              <a:rPr lang="en-US" smtClean="0"/>
               <a:t>Second level</a:t>
             </a:r>
           </a:p>
           <a:p>
             <a:pPr lvl="2"/>
             <a:r>
-              <a:rPr lang="en-US"/>
+              <a:rPr lang="en-US" smtClean="0"/>
               <a:t>Third level</a:t>
             </a:r>
           </a:p>
           <a:p>
             <a:pPr lvl="3"/>
             <a:r>
-              <a:rPr lang="en-US"/>
+              <a:rPr lang="en-US" smtClean="0"/>
               <a:t>Fourth level</a:t>
             </a:r>
           </a:p>
           <a:p>
             <a:pPr lvl="4"/>
             <a:r>
-              <a:rPr lang="en-US"/>
+              <a:rPr lang="en-US" smtClean="0"/>
               <a:t>Fifth level</a:t>
             </a:r>
+            <a:endParaRPr lang="en-US"/>
           </a:p>
         </p:txBody>
       </p:sp>
@@ -2689,7 +1665,7 @@
           <a:p>
             <a:pPr lvl="0"/>
             <a:r>
-              <a:rPr lang="en-US"/>
+              <a:rPr lang="en-US" smtClean="0"/>
               <a:t>Click to edit Master text styles</a:t>
             </a:r>
           </a:p>
@@ -2745,37 +1721,38 @@
           <a:p>
             <a:pPr lvl="0"/>
             <a:r>
-              <a:rPr lang="en-US"/>
+              <a:rPr lang="en-US" smtClean="0"/>
               <a:t>Click to edit Master text styles</a:t>
             </a:r>
           </a:p>
           <a:p>
             <a:pPr lvl="1"/>
             <a:r>
-              <a:rPr lang="en-US"/>
+              <a:rPr lang="en-US" smtClean="0"/>
               <a:t>Second level</a:t>
             </a:r>
           </a:p>
           <a:p>
             <a:pPr lvl="2"/>
             <a:r>
-              <a:rPr lang="en-US"/>
+              <a:rPr lang="en-US" smtClean="0"/>
               <a:t>Third level</a:t>
             </a:r>
           </a:p>
           <a:p>
             <a:pPr lvl="3"/>
             <a:r>
-              <a:rPr lang="en-US"/>
+              <a:rPr lang="en-US" smtClean="0"/>
               <a:t>Fourth level</a:t>
             </a:r>
           </a:p>
           <a:p>
             <a:pPr lvl="4"/>
             <a:r>
-              <a:rPr lang="en-US"/>
+              <a:rPr lang="en-US" smtClean="0"/>
               <a:t>Fifth level</a:t>
             </a:r>
+            <a:endParaRPr lang="en-US"/>
           </a:p>
         </p:txBody>
       </p:sp>
@@ -2796,7 +1773,7 @@
           <a:p>
             <a:fld id="{5BCAD085-E8A6-8845-BD4E-CB4CCA059FC4}" type="datetimeFigureOut">
               <a:rPr lang="en-US" smtClean="0"/>
-              <a:t>10/12/2026</a:t>
+              <a:t>1/27/13</a:t>
             </a:fld>
             <a:endParaRPr lang="en-US"/>
           </a:p>
@@ -2890,9 +1867,10 @@
           <a:lstStyle/>
           <a:p>
             <a:r>
-              <a:rPr lang="en-US"/>
+              <a:rPr lang="en-US" smtClean="0"/>
               <a:t>Click to edit Master title style</a:t>
             </a:r>
+            <a:endParaRPr lang="en-US"/>
           </a:p>
         </p:txBody>
       </p:sp>
@@ -2913,7 +1891,7 @@
           <a:p>
             <a:fld id="{5BCAD085-E8A6-8845-BD4E-CB4CCA059FC4}" type="datetimeFigureOut">
               <a:rPr lang="en-US" smtClean="0"/>
-              <a:t>10/12/2026</a:t>
+              <a:t>1/27/13</a:t>
             </a:fld>
             <a:endParaRPr lang="en-US"/>
           </a:p>
@@ -3008,7 +1986,7 @@
           <a:p>
             <a:fld id="{5BCAD085-E8A6-8845-BD4E-CB4CCA059FC4}" type="datetimeFigureOut">
               <a:rPr lang="en-US" smtClean="0"/>
-              <a:t>10/12/2026</a:t>
+              <a:t>1/27/13</a:t>
             </a:fld>
             <a:endParaRPr lang="en-US"/>
           </a:p>
@@ -3111,9 +2089,10 @@
           </a:lstStyle>
           <a:p>
             <a:r>
-              <a:rPr lang="en-US"/>
+              <a:rPr lang="en-US" smtClean="0"/>
               <a:t>Click to edit Master title style</a:t>
             </a:r>
+            <a:endParaRPr lang="en-US"/>
           </a:p>
         </p:txBody>
       </p:sp>
@@ -3167,37 +2146,38 @@
           <a:p>
             <a:pPr lvl="0"/>
             <a:r>
-              <a:rPr lang="en-US"/>
+              <a:rPr lang="en-US" smtClean="0"/>
               <a:t>Click to edit Master text styles</a:t>
             </a:r>
           </a:p>
           <a:p>
             <a:pPr lvl="1"/>
             <a:r>
-              <a:rPr lang="en-US"/>
+              <a:rPr lang="en-US" smtClean="0"/>
               <a:t>Second level</a:t>
             </a:r>
           </a:p>
           <a:p>
             <a:pPr lvl="2"/>
             <a:r>
-              <a:rPr lang="en-US"/>
+              <a:rPr lang="en-US" smtClean="0"/>
               <a:t>Third level</a:t>
             </a:r>
           </a:p>
           <a:p>
             <a:pPr lvl="3"/>
             <a:r>
-              <a:rPr lang="en-US"/>
+              <a:rPr lang="en-US" smtClean="0"/>
               <a:t>Fourth level</a:t>
             </a:r>
           </a:p>
           <a:p>
             <a:pPr lvl="4"/>
             <a:r>
-              <a:rPr lang="en-US"/>
+              <a:rPr lang="en-US" smtClean="0"/>
               <a:t>Fifth level</a:t>
             </a:r>
+            <a:endParaRPr lang="en-US"/>
           </a:p>
         </p:txBody>
       </p:sp>
@@ -3260,7 +2240,7 @@
           <a:p>
             <a:pPr lvl="0"/>
             <a:r>
-              <a:rPr lang="en-US"/>
+              <a:rPr lang="en-US" smtClean="0"/>
               <a:t>Click to edit Master text styles</a:t>
             </a:r>
           </a:p>
@@ -3283,7 +2263,7 @@
           <a:p>
             <a:fld id="{5BCAD085-E8A6-8845-BD4E-CB4CCA059FC4}" type="datetimeFigureOut">
               <a:rPr lang="en-US" smtClean="0"/>
-              <a:t>10/12/2026</a:t>
+              <a:t>1/27/13</a:t>
             </a:fld>
             <a:endParaRPr lang="en-US"/>
           </a:p>
@@ -3386,9 +2366,10 @@
           </a:lstStyle>
           <a:p>
             <a:r>
-              <a:rPr lang="en-US"/>
+              <a:rPr lang="en-US" smtClean="0"/>
               <a:t>Click to edit Master title style</a:t>
             </a:r>
+            <a:endParaRPr lang="en-US"/>
           </a:p>
         </p:txBody>
       </p:sp>
@@ -3512,7 +2493,7 @@
           <a:p>
             <a:pPr lvl="0"/>
             <a:r>
-              <a:rPr lang="en-US"/>
+              <a:rPr lang="en-US" smtClean="0"/>
               <a:t>Click to edit Master text styles</a:t>
             </a:r>
           </a:p>
@@ -3535,7 +2516,7 @@
           <a:p>
             <a:fld id="{5BCAD085-E8A6-8845-BD4E-CB4CCA059FC4}" type="datetimeFigureOut">
               <a:rPr lang="en-US" smtClean="0"/>
-              <a:t>10/12/2026</a:t>
+              <a:t>1/27/13</a:t>
             </a:fld>
             <a:endParaRPr lang="en-US"/>
           </a:p>
@@ -3644,9 +2625,10 @@
           <a:lstStyle/>
           <a:p>
             <a:r>
-              <a:rPr lang="en-US"/>
+              <a:rPr lang="en-US" smtClean="0"/>
               <a:t>Click to edit Master title style</a:t>
             </a:r>
+            <a:endParaRPr lang="en-US"/>
           </a:p>
         </p:txBody>
       </p:sp>
@@ -3677,37 +2659,38 @@
           <a:p>
             <a:pPr lvl="0"/>
             <a:r>
-              <a:rPr lang="en-US"/>
+              <a:rPr lang="en-US" smtClean="0"/>
               <a:t>Click to edit Master text styles</a:t>
             </a:r>
           </a:p>
           <a:p>
             <a:pPr lvl="1"/>
             <a:r>
-              <a:rPr lang="en-US"/>
+              <a:rPr lang="en-US" smtClean="0"/>
               <a:t>Second level</a:t>
             </a:r>
           </a:p>
           <a:p>
             <a:pPr lvl="2"/>
             <a:r>
-              <a:rPr lang="en-US"/>
+              <a:rPr lang="en-US" smtClean="0"/>
               <a:t>Third level</a:t>
             </a:r>
           </a:p>
           <a:p>
             <a:pPr lvl="3"/>
             <a:r>
-              <a:rPr lang="en-US"/>
+              <a:rPr lang="en-US" smtClean="0"/>
               <a:t>Fourth level</a:t>
             </a:r>
           </a:p>
           <a:p>
             <a:pPr lvl="4"/>
             <a:r>
-              <a:rPr lang="en-US"/>
+              <a:rPr lang="en-US" smtClean="0"/>
               <a:t>Fifth level</a:t>
             </a:r>
+            <a:endParaRPr lang="en-US"/>
           </a:p>
         </p:txBody>
       </p:sp>
@@ -3746,7 +2729,7 @@
           <a:p>
             <a:fld id="{5BCAD085-E8A6-8845-BD4E-CB4CCA059FC4}" type="datetimeFigureOut">
               <a:rPr lang="en-US" smtClean="0"/>
-              <a:t>10/12/2026</a:t>
+              <a:t>1/27/13</a:t>
             </a:fld>
             <a:endParaRPr lang="en-US"/>
           </a:p>
@@ -4105,7 +3088,7 @@
 </file>
 
 <file path=ppt/slides/slide1.xml><?xml version="1.0" encoding="utf-8"?>
-<p:sld xmlns:a="http://schemas.openxmlformats.org/drawingml/2006/main" xmlns:r="http://schemas.openxmlformats.org/officeDocument/2006/relationships" xmlns:p="http://schemas.openxmlformats.org/presentationml/2006/main">
+<p:sld xmlns:a="http://schemas.openxmlformats.org/drawingml/2006/main" xmlns:p="http://schemas.openxmlformats.org/presentationml/2006/main" xmlns:r="http://schemas.openxmlformats.org/officeDocument/2006/relationships">
   <p:cSld>
     <p:spTree>
       <p:nvGrpSpPr>
@@ -4113,17 +3096,10 @@
         <p:cNvGrpSpPr/>
         <p:nvPr/>
       </p:nvGrpSpPr>
-      <p:grpSpPr>
-        <a:xfrm>
-          <a:off x="0" y="0"/>
-          <a:ext cx="0" cy="0"/>
-          <a:chOff x="0" y="0"/>
-          <a:chExt cx="0" cy="0"/>
-        </a:xfrm>
-      </p:grpSpPr>
-      <p:sp>
-        <p:nvSpPr>
-          <p:cNvPr id="2" name="Rectangle 1"/>
+      <p:grpSpPr/>
+      <p:sp>
+        <p:nvSpPr>
+          <p:cNvPr id="2" name="CoverBackground"/>
           <p:cNvSpPr/>
           <p:nvPr/>
         </p:nvSpPr>
@@ -4141,6 +3117,13 @@
           <a:ln>
             <a:noFill/>
           </a:ln>
+          <a:effectLst>
+            <a:outerShdw blurRad="38100" dist="19050" dir="5400000" algn="ctr" rotWithShape="0">
+              <a:srgbClr val="000000">
+                <a:alpha val="33000"/>
+              </a:srgbClr>
+            </a:outerShdw>
+          </a:effectLst>
         </p:spPr>
         <p:style>
           <a:lnRef idx="1">
@@ -4149,7 +3132,7 @@
           <a:fillRef idx="3">
             <a:schemeClr val="accent1"/>
           </a:fillRef>
-          <a:effectRef idx="2">
+          <a:effectRef idx="0">
             <a:schemeClr val="accent1"/>
           </a:effectRef>
           <a:fontRef idx="minor">
@@ -4161,19 +3144,18 @@
           <a:lstStyle/>
           <a:p>
             <a:pPr algn="ctr"/>
-            <a:endParaRPr/>
-          </a:p>
-        </p:txBody>
-      </p:sp>
-      <p:sp>
-        <p:nvSpPr>
-          <p:cNvPr id="3" name="Rectangle 2"/>
+          </a:p>
+        </p:txBody>
+      </p:sp>
+      <p:sp>
+        <p:nvSpPr>
+          <p:cNvPr id="3" name="CoverSeparator"/>
           <p:cNvSpPr/>
           <p:nvPr/>
         </p:nvSpPr>
         <p:spPr>
           <a:xfrm>
-            <a:off x="0" y="1524000"/>
+            <a:off x="0" y="771525"/>
             <a:ext cx="12192000" cy="19050"/>
           </a:xfrm>
           <a:prstGeom prst="rect">
@@ -4185,6 +3167,7 @@
           <a:ln>
             <a:noFill/>
           </a:ln>
+          <a:effectLst/>
         </p:spPr>
         <p:style>
           <a:lnRef idx="1">
@@ -4193,7 +3176,7 @@
           <a:fillRef idx="3">
             <a:schemeClr val="accent1"/>
           </a:fillRef>
-          <a:effectRef idx="2">
+          <a:effectRef idx="0">
             <a:schemeClr val="accent1"/>
           </a:effectRef>
           <a:fontRef idx="minor">
@@ -4205,20 +3188,19 @@
           <a:lstStyle/>
           <a:p>
             <a:pPr algn="ctr"/>
-            <a:endParaRPr/>
-          </a:p>
-        </p:txBody>
-      </p:sp>
-      <p:sp>
-        <p:nvSpPr>
-          <p:cNvPr id="4" name="TextBox 3"/>
+          </a:p>
+        </p:txBody>
+      </p:sp>
+      <p:sp>
+        <p:nvSpPr>
+          <p:cNvPr id="4" name="Logo"/>
           <p:cNvSpPr txBox="1"/>
           <p:nvPr/>
         </p:nvSpPr>
         <p:spPr>
           <a:xfrm>
-            <a:off x="432054" y="432053"/>
-            <a:ext cx="2857500" cy="749300"/>
+            <a:off x="190500" y="0"/>
+            <a:ext cx="2857500" cy="863600"/>
           </a:xfrm>
           <a:prstGeom prst="rect">
             <a:avLst/>
@@ -4226,47 +3208,8 @@
           <a:noFill/>
         </p:spPr>
         <p:txBody>
-          <a:bodyPr wrap="square" lIns="19050" tIns="0" rIns="19050" bIns="0">
-            <a:noAutofit/>
-          </a:bodyPr>
-          <a:lstStyle/>
-          <a:p>
-            <a:pPr algn="l">
-              <a:lnSpc>
-                <a:spcPct val="130000"/>
-              </a:lnSpc>
-              <a:defRPr sz="4050" b="1">
-                <a:solidFill>
-                  <a:srgbClr val="BE1551"/>
-                </a:solidFill>
-                <a:latin typeface="Arial"/>
-              </a:defRPr>
-            </a:pPr>
-            <a:r>
-              <a:t>CBNU</a:t>
-            </a:r>
-          </a:p>
-        </p:txBody>
-      </p:sp>
-      <p:sp>
-        <p:nvSpPr>
-          <p:cNvPr id="5" name="TextBox 4"/>
-          <p:cNvSpPr txBox="1"/>
-          <p:nvPr/>
-        </p:nvSpPr>
-        <p:spPr>
-          <a:xfrm>
-            <a:off x="432054" y="1892299"/>
-            <a:ext cx="11327892" cy="2260600"/>
-          </a:xfrm>
-          <a:prstGeom prst="rect">
-            <a:avLst/>
-          </a:prstGeom>
-          <a:noFill/>
-        </p:spPr>
-        <p:txBody>
-          <a:bodyPr wrap="square" lIns="19050" tIns="0" rIns="19050" bIns="0">
-            <a:noAutofit/>
+          <a:bodyPr wrap="square" lIns="19050" rIns="19050" tIns="0" bIns="0">
+            <a:spAutoFit/>
           </a:bodyPr>
           <a:lstStyle/>
           <a:p>
@@ -4277,48 +3220,30 @@
               <a:spcAft>
                 <a:spcPts val="800"/>
               </a:spcAft>
-              <a:defRPr sz="5400" b="1">
-                <a:solidFill>
-                  <a:srgbClr val="FFFFFF"/>
-                </a:solidFill>
-                <a:latin typeface="맑은 고딕"/>
-              </a:defRPr>
             </a:pPr>
             <a:r>
-              <a:rPr lang="en-US" altLang="ko-KR"/>
-              <a:t>[</a:t>
-            </a:r>
-            <a:r>
-              <a:rPr lang="ko-KR" altLang="en-US"/>
-              <a:t>발표 제목</a:t>
-            </a:r>
-            <a:r>
-              <a:rPr lang="en-US" altLang="ko-KR"/>
-              <a:t>]
-[</a:t>
-            </a:r>
-            <a:r>
-              <a:rPr lang="ko-KR" altLang="en-US"/>
-              <a:t>부제목</a:t>
-            </a:r>
-            <a:r>
-              <a:rPr lang="en-US" altLang="ko-KR"/>
-              <a:t>]</a:t>
-            </a:r>
-            <a:endParaRPr/>
-          </a:p>
-        </p:txBody>
-      </p:sp>
-      <p:sp>
-        <p:nvSpPr>
-          <p:cNvPr id="6" name="TextBox 5"/>
+              <a:rPr sz="4056" b="1">
+                <a:solidFill>
+                  <a:srgbClr val="BE1551"/>
+                </a:solidFill>
+                <a:latin typeface="Pretendard"/>
+                <a:ea typeface="Pretendard"/>
+              </a:rPr>
+              <a:t>CBNU</a:t>
+            </a:r>
+          </a:p>
+        </p:txBody>
+      </p:sp>
+      <p:sp>
+        <p:nvSpPr>
+          <p:cNvPr id="5" name="CoverTitle"/>
           <p:cNvSpPr txBox="1"/>
           <p:nvPr/>
         </p:nvSpPr>
         <p:spPr>
           <a:xfrm>
-            <a:off x="432054" y="4343400"/>
-            <a:ext cx="11327892" cy="635000"/>
+            <a:off x="476250" y="1295400"/>
+            <a:ext cx="11239500" cy="2413000"/>
           </a:xfrm>
           <a:prstGeom prst="rect">
             <a:avLst/>
@@ -4326,8 +3251,8 @@
           <a:noFill/>
         </p:spPr>
         <p:txBody>
-          <a:bodyPr wrap="square" lIns="19050" tIns="0" rIns="19050" bIns="0">
-            <a:noAutofit/>
+          <a:bodyPr wrap="square" lIns="19050" rIns="19050" tIns="0" bIns="0">
+            <a:spAutoFit/>
           </a:bodyPr>
           <a:lstStyle/>
           <a:p>
@@ -4338,31 +3263,41 @@
               <a:spcAft>
                 <a:spcPts val="800"/>
               </a:spcAft>
-              <a:defRPr sz="2175" b="0">
+            </a:pPr>
+            <a:r>
+              <a:rPr sz="5400" b="1">
                 <a:solidFill>
                   <a:srgbClr val="FFFFFF"/>
                 </a:solidFill>
-                <a:latin typeface="맑은 고딕"/>
-              </a:defRPr>
-            </a:pPr>
-            <a:r>
-              <a:rPr lang="ko-KR" altLang="en-US"/>
-              <a:t>발표 주제 또는 한 줄 소개</a:t>
-            </a:r>
-            <a:endParaRPr/>
-          </a:p>
-        </p:txBody>
-      </p:sp>
-      <p:sp>
-        <p:nvSpPr>
-          <p:cNvPr id="7" name="TextBox 6"/>
+                <a:latin typeface="Pretendard"/>
+                <a:ea typeface="Pretendard"/>
+              </a:rPr>
+              <a:t>[발표 제목]</a:t>
+            </a:r>
+            <a:br/>
+            <a:r>
+              <a:rPr sz="5400" b="1">
+                <a:solidFill>
+                  <a:srgbClr val="FFFFFF"/>
+                </a:solidFill>
+                <a:latin typeface="Pretendard"/>
+                <a:ea typeface="Pretendard"/>
+              </a:rPr>
+              <a:t>[부제목]</a:t>
+            </a:r>
+          </a:p>
+        </p:txBody>
+      </p:sp>
+      <p:sp>
+        <p:nvSpPr>
+          <p:cNvPr id="6" name="Author"/>
           <p:cNvSpPr txBox="1"/>
           <p:nvPr/>
         </p:nvSpPr>
         <p:spPr>
           <a:xfrm>
-            <a:off x="432054" y="5930900"/>
-            <a:ext cx="11327892" cy="495300"/>
+            <a:off x="285750" y="6019800"/>
+            <a:ext cx="11620500" cy="495300"/>
           </a:xfrm>
           <a:prstGeom prst="rect">
             <a:avLst/>
@@ -4370,8 +3305,8 @@
           <a:noFill/>
         </p:spPr>
         <p:txBody>
-          <a:bodyPr wrap="square" lIns="19050" tIns="0" rIns="19050" bIns="0">
-            <a:noAutofit/>
+          <a:bodyPr wrap="square" lIns="19050" rIns="19050" tIns="0" bIns="0">
+            <a:spAutoFit/>
           </a:bodyPr>
           <a:lstStyle/>
           <a:p>
@@ -4382,34 +3317,751 @@
               <a:spcAft>
                 <a:spcPts val="800"/>
               </a:spcAft>
-              <a:defRPr sz="1875" b="1">
+            </a:pPr>
+            <a:r>
+              <a:rPr sz="1875" b="1">
                 <a:solidFill>
                   <a:srgbClr val="080808"/>
                 </a:solidFill>
-                <a:latin typeface="맑은 고딕"/>
-              </a:defRPr>
+                <a:latin typeface="Pretendard"/>
+                <a:ea typeface="Pretendard"/>
+              </a:rPr>
+              <a:t>[작성자 · 소속]</a:t>
+            </a:r>
+          </a:p>
+        </p:txBody>
+      </p:sp>
+    </p:spTree>
+  </p:cSld>
+  <p:clrMapOvr>
+    <a:masterClrMapping/>
+  </p:clrMapOvr>
+</p:sld>
+</file>
+
+<file path=ppt/slides/slide10.xml><?xml version="1.0" encoding="utf-8"?>
+<p:sld xmlns:a="http://schemas.openxmlformats.org/drawingml/2006/main" xmlns:p="http://schemas.openxmlformats.org/presentationml/2006/main" xmlns:r="http://schemas.openxmlformats.org/officeDocument/2006/relationships">
+  <p:cSld>
+    <p:spTree>
+      <p:nvGrpSpPr>
+        <p:cNvPr id="1" name=""/>
+        <p:cNvGrpSpPr/>
+        <p:nvPr/>
+      </p:nvGrpSpPr>
+      <p:grpSpPr/>
+      <p:sp>
+        <p:nvSpPr>
+          <p:cNvPr id="2" name="Header"/>
+          <p:cNvSpPr/>
+          <p:nvPr/>
+        </p:nvSpPr>
+        <p:spPr>
+          <a:xfrm>
+            <a:off x="0" y="0"/>
+            <a:ext cx="12192000" cy="781050"/>
+          </a:xfrm>
+          <a:prstGeom prst="rect">
+            <a:avLst/>
+          </a:prstGeom>
+          <a:solidFill>
+            <a:srgbClr val="1C50B3"/>
+          </a:solidFill>
+          <a:ln>
+            <a:noFill/>
+          </a:ln>
+          <a:effectLst>
+            <a:outerShdw blurRad="38100" dist="19050" dir="5400000" algn="ctr" rotWithShape="0">
+              <a:srgbClr val="000000">
+                <a:alpha val="33000"/>
+              </a:srgbClr>
+            </a:outerShdw>
+          </a:effectLst>
+        </p:spPr>
+        <p:style>
+          <a:lnRef idx="1">
+            <a:schemeClr val="accent1"/>
+          </a:lnRef>
+          <a:fillRef idx="3">
+            <a:schemeClr val="accent1"/>
+          </a:fillRef>
+          <a:effectRef idx="0">
+            <a:schemeClr val="accent1"/>
+          </a:effectRef>
+          <a:fontRef idx="minor">
+            <a:schemeClr val="lt1"/>
+          </a:fontRef>
+        </p:style>
+        <p:txBody>
+          <a:bodyPr rtlCol="0" anchor="ctr"/>
+          <a:lstStyle/>
+          <a:p>
+            <a:pPr algn="ctr"/>
+          </a:p>
+        </p:txBody>
+      </p:sp>
+      <p:sp>
+        <p:nvSpPr>
+          <p:cNvPr id="3" name="Title"/>
+          <p:cNvSpPr txBox="1"/>
+          <p:nvPr/>
+        </p:nvSpPr>
+        <p:spPr>
+          <a:xfrm>
+            <a:off x="257175" y="38100"/>
+            <a:ext cx="11677650" cy="666750"/>
+          </a:xfrm>
+          <a:prstGeom prst="rect">
+            <a:avLst/>
+          </a:prstGeom>
+          <a:noFill/>
+        </p:spPr>
+        <p:txBody>
+          <a:bodyPr wrap="square" lIns="19050" rIns="19050" tIns="0" bIns="0">
+            <a:spAutoFit/>
+          </a:bodyPr>
+          <a:lstStyle/>
+          <a:p>
+            <a:pPr algn="l">
+              <a:lnSpc>
+                <a:spcPct val="130000"/>
+              </a:lnSpc>
+              <a:spcAft>
+                <a:spcPts val="800"/>
+              </a:spcAft>
             </a:pPr>
             <a:r>
-              <a:rPr lang="en-US" altLang="ko-KR"/>
-              <a:t>[</a:t>
-            </a:r>
-            <a:r>
-              <a:rPr lang="ko-KR" altLang="en-US"/>
-              <a:t>작성자 </a:t>
-            </a:r>
-            <a:r>
-              <a:rPr lang="en-US" altLang="ko-KR"/>
-              <a:t>· </a:t>
-            </a:r>
-            <a:r>
-              <a:rPr lang="ko-KR" altLang="en-US"/>
-              <a:t>소속</a:t>
-            </a:r>
-            <a:r>
-              <a:rPr lang="en-US" altLang="ko-KR"/>
-              <a:t>]</a:t>
-            </a:r>
-            <a:endParaRPr/>
+              <a:rPr sz="3000" b="1">
+                <a:solidFill>
+                  <a:srgbClr val="FFFFFF"/>
+                </a:solidFill>
+                <a:latin typeface="Pretendard"/>
+                <a:ea typeface="Pretendard"/>
+              </a:rPr>
+              <a:t>[이미지 네 개와 비교 결과]</a:t>
+            </a:r>
+          </a:p>
+        </p:txBody>
+      </p:sp>
+      <p:sp>
+        <p:nvSpPr>
+          <p:cNvPr id="4" name="Page"/>
+          <p:cNvSpPr txBox="1"/>
+          <p:nvPr/>
+        </p:nvSpPr>
+        <p:spPr>
+          <a:xfrm>
+            <a:off x="247650" y="6553200"/>
+            <a:ext cx="1016000" cy="279400"/>
+          </a:xfrm>
+          <a:prstGeom prst="rect">
+            <a:avLst/>
+          </a:prstGeom>
+          <a:noFill/>
+        </p:spPr>
+        <p:txBody>
+          <a:bodyPr wrap="square" lIns="19050" rIns="19050" tIns="0" bIns="0">
+            <a:spAutoFit/>
+          </a:bodyPr>
+          <a:lstStyle/>
+          <a:p>
+            <a:pPr algn="l">
+              <a:lnSpc>
+                <a:spcPct val="130000"/>
+              </a:lnSpc>
+              <a:spcAft>
+                <a:spcPts val="800"/>
+              </a:spcAft>
+            </a:pPr>
+            <a:r>
+              <a:rPr sz="1128" b="1">
+                <a:solidFill>
+                  <a:srgbClr val="777777"/>
+                </a:solidFill>
+                <a:latin typeface="Pretendard"/>
+                <a:ea typeface="Pretendard"/>
+              </a:rPr>
+              <a:t>10</a:t>
+            </a:r>
+          </a:p>
+        </p:txBody>
+      </p:sp>
+      <p:sp>
+        <p:nvSpPr>
+          <p:cNvPr id="5" name="Logo"/>
+          <p:cNvSpPr txBox="1"/>
+          <p:nvPr/>
+        </p:nvSpPr>
+        <p:spPr>
+          <a:xfrm>
+            <a:off x="11163300" y="6413500"/>
+            <a:ext cx="1028700" cy="444500"/>
+          </a:xfrm>
+          <a:prstGeom prst="rect">
+            <a:avLst/>
+          </a:prstGeom>
+          <a:noFill/>
+        </p:spPr>
+        <p:txBody>
+          <a:bodyPr wrap="square" lIns="19050" rIns="19050" tIns="0" bIns="0">
+            <a:spAutoFit/>
+          </a:bodyPr>
+          <a:lstStyle/>
+          <a:p>
+            <a:pPr algn="r">
+              <a:lnSpc>
+                <a:spcPct val="130000"/>
+              </a:lnSpc>
+              <a:spcAft>
+                <a:spcPts val="800"/>
+              </a:spcAft>
+            </a:pPr>
+            <a:r>
+              <a:rPr sz="2258" b="1">
+                <a:solidFill>
+                  <a:srgbClr val="BE1551"/>
+                </a:solidFill>
+                <a:latin typeface="Pretendard"/>
+                <a:ea typeface="Pretendard"/>
+              </a:rPr>
+              <a:t>CBNU</a:t>
+            </a:r>
+          </a:p>
+        </p:txBody>
+      </p:sp>
+      <p:sp>
+        <p:nvSpPr>
+          <p:cNvPr id="6" name="ImageTitle1"/>
+          <p:cNvSpPr txBox="1"/>
+          <p:nvPr/>
+        </p:nvSpPr>
+        <p:spPr>
+          <a:xfrm>
+            <a:off x="342900" y="1054100"/>
+            <a:ext cx="2667000" cy="355600"/>
+          </a:xfrm>
+          <a:prstGeom prst="rect">
+            <a:avLst/>
+          </a:prstGeom>
+          <a:noFill/>
+        </p:spPr>
+        <p:txBody>
+          <a:bodyPr wrap="square" lIns="19050" rIns="19050" tIns="0" bIns="0">
+            <a:spAutoFit/>
+          </a:bodyPr>
+          <a:lstStyle/>
+          <a:p>
+            <a:pPr algn="ctr">
+              <a:lnSpc>
+                <a:spcPct val="130000"/>
+              </a:lnSpc>
+              <a:spcAft>
+                <a:spcPts val="800"/>
+              </a:spcAft>
+            </a:pPr>
+            <a:r>
+              <a:rPr sz="1875" b="1">
+                <a:solidFill>
+                  <a:srgbClr val="080808"/>
+                </a:solidFill>
+                <a:latin typeface="Pretendard"/>
+                <a:ea typeface="Pretendard"/>
+              </a:rPr>
+              <a:t>[조건 1]</a:t>
+            </a:r>
+          </a:p>
+        </p:txBody>
+      </p:sp>
+      <p:sp>
+        <p:nvSpPr>
+          <p:cNvPr id="7" name="ImageSlot1"/>
+          <p:cNvSpPr txBox="1"/>
+          <p:nvPr/>
+        </p:nvSpPr>
+        <p:spPr>
+          <a:xfrm>
+            <a:off x="342900" y="1473200"/>
+            <a:ext cx="2667000" cy="2717800"/>
+          </a:xfrm>
+          <a:prstGeom prst="rect">
+            <a:avLst/>
+          </a:prstGeom>
+          <a:noFill/>
+        </p:spPr>
+        <p:txBody>
+          <a:bodyPr wrap="square" lIns="19050" rIns="19050" tIns="0" bIns="0">
+            <a:spAutoFit/>
+          </a:bodyPr>
+          <a:lstStyle/>
+          <a:p>
+            <a:pPr algn="ctr">
+              <a:lnSpc>
+                <a:spcPct val="130000"/>
+              </a:lnSpc>
+              <a:spcAft>
+                <a:spcPts val="800"/>
+              </a:spcAft>
+            </a:pPr>
+            <a:r>
+              <a:rPr sz="1600" b="1">
+                <a:solidFill>
+                  <a:srgbClr val="080808"/>
+                </a:solidFill>
+                <a:latin typeface="Pretendard"/>
+                <a:ea typeface="Pretendard"/>
+              </a:rPr>
+              <a:t>이미지 영역</a:t>
+            </a:r>
+          </a:p>
+        </p:txBody>
+      </p:sp>
+      <p:sp>
+        <p:nvSpPr>
+          <p:cNvPr id="8" name="ImageTitle2"/>
+          <p:cNvSpPr txBox="1"/>
+          <p:nvPr/>
+        </p:nvSpPr>
+        <p:spPr>
+          <a:xfrm>
+            <a:off x="3214687" y="1054100"/>
+            <a:ext cx="2667000" cy="355600"/>
+          </a:xfrm>
+          <a:prstGeom prst="rect">
+            <a:avLst/>
+          </a:prstGeom>
+          <a:noFill/>
+        </p:spPr>
+        <p:txBody>
+          <a:bodyPr wrap="square" lIns="19050" rIns="19050" tIns="0" bIns="0">
+            <a:spAutoFit/>
+          </a:bodyPr>
+          <a:lstStyle/>
+          <a:p>
+            <a:pPr algn="ctr">
+              <a:lnSpc>
+                <a:spcPct val="130000"/>
+              </a:lnSpc>
+              <a:spcAft>
+                <a:spcPts val="800"/>
+              </a:spcAft>
+            </a:pPr>
+            <a:r>
+              <a:rPr sz="1875" b="1">
+                <a:solidFill>
+                  <a:srgbClr val="080808"/>
+                </a:solidFill>
+                <a:latin typeface="Pretendard"/>
+                <a:ea typeface="Pretendard"/>
+              </a:rPr>
+              <a:t>[조건 2]</a:t>
+            </a:r>
+          </a:p>
+        </p:txBody>
+      </p:sp>
+      <p:sp>
+        <p:nvSpPr>
+          <p:cNvPr id="9" name="ImageSlot2"/>
+          <p:cNvSpPr txBox="1"/>
+          <p:nvPr/>
+        </p:nvSpPr>
+        <p:spPr>
+          <a:xfrm>
+            <a:off x="3214687" y="1473200"/>
+            <a:ext cx="2667000" cy="2717800"/>
+          </a:xfrm>
+          <a:prstGeom prst="rect">
+            <a:avLst/>
+          </a:prstGeom>
+          <a:noFill/>
+        </p:spPr>
+        <p:txBody>
+          <a:bodyPr wrap="square" lIns="19050" rIns="19050" tIns="0" bIns="0">
+            <a:spAutoFit/>
+          </a:bodyPr>
+          <a:lstStyle/>
+          <a:p>
+            <a:pPr algn="ctr">
+              <a:lnSpc>
+                <a:spcPct val="130000"/>
+              </a:lnSpc>
+              <a:spcAft>
+                <a:spcPts val="800"/>
+              </a:spcAft>
+            </a:pPr>
+            <a:r>
+              <a:rPr sz="1600" b="1">
+                <a:solidFill>
+                  <a:srgbClr val="080808"/>
+                </a:solidFill>
+                <a:latin typeface="Pretendard"/>
+                <a:ea typeface="Pretendard"/>
+              </a:rPr>
+              <a:t>이미지 영역</a:t>
+            </a:r>
+          </a:p>
+        </p:txBody>
+      </p:sp>
+      <p:sp>
+        <p:nvSpPr>
+          <p:cNvPr id="10" name="ImageTitle3"/>
+          <p:cNvSpPr txBox="1"/>
+          <p:nvPr/>
+        </p:nvSpPr>
+        <p:spPr>
+          <a:xfrm>
+            <a:off x="6086475" y="1054100"/>
+            <a:ext cx="2667000" cy="355600"/>
+          </a:xfrm>
+          <a:prstGeom prst="rect">
+            <a:avLst/>
+          </a:prstGeom>
+          <a:noFill/>
+        </p:spPr>
+        <p:txBody>
+          <a:bodyPr wrap="square" lIns="19050" rIns="19050" tIns="0" bIns="0">
+            <a:spAutoFit/>
+          </a:bodyPr>
+          <a:lstStyle/>
+          <a:p>
+            <a:pPr algn="ctr">
+              <a:lnSpc>
+                <a:spcPct val="130000"/>
+              </a:lnSpc>
+              <a:spcAft>
+                <a:spcPts val="800"/>
+              </a:spcAft>
+            </a:pPr>
+            <a:r>
+              <a:rPr sz="1875" b="1">
+                <a:solidFill>
+                  <a:srgbClr val="080808"/>
+                </a:solidFill>
+                <a:latin typeface="Pretendard"/>
+                <a:ea typeface="Pretendard"/>
+              </a:rPr>
+              <a:t>[조건 3]</a:t>
+            </a:r>
+          </a:p>
+        </p:txBody>
+      </p:sp>
+      <p:sp>
+        <p:nvSpPr>
+          <p:cNvPr id="11" name="ImageSlot3"/>
+          <p:cNvSpPr txBox="1"/>
+          <p:nvPr/>
+        </p:nvSpPr>
+        <p:spPr>
+          <a:xfrm>
+            <a:off x="6086475" y="1473200"/>
+            <a:ext cx="2667000" cy="2717800"/>
+          </a:xfrm>
+          <a:prstGeom prst="rect">
+            <a:avLst/>
+          </a:prstGeom>
+          <a:noFill/>
+        </p:spPr>
+        <p:txBody>
+          <a:bodyPr wrap="square" lIns="19050" rIns="19050" tIns="0" bIns="0">
+            <a:spAutoFit/>
+          </a:bodyPr>
+          <a:lstStyle/>
+          <a:p>
+            <a:pPr algn="ctr">
+              <a:lnSpc>
+                <a:spcPct val="130000"/>
+              </a:lnSpc>
+              <a:spcAft>
+                <a:spcPts val="800"/>
+              </a:spcAft>
+            </a:pPr>
+            <a:r>
+              <a:rPr sz="1600" b="1">
+                <a:solidFill>
+                  <a:srgbClr val="080808"/>
+                </a:solidFill>
+                <a:latin typeface="Pretendard"/>
+                <a:ea typeface="Pretendard"/>
+              </a:rPr>
+              <a:t>이미지 영역</a:t>
+            </a:r>
+          </a:p>
+        </p:txBody>
+      </p:sp>
+      <p:sp>
+        <p:nvSpPr>
+          <p:cNvPr id="12" name="ImageTitle4"/>
+          <p:cNvSpPr txBox="1"/>
+          <p:nvPr/>
+        </p:nvSpPr>
+        <p:spPr>
+          <a:xfrm>
+            <a:off x="8958262" y="1054100"/>
+            <a:ext cx="2667000" cy="355600"/>
+          </a:xfrm>
+          <a:prstGeom prst="rect">
+            <a:avLst/>
+          </a:prstGeom>
+          <a:noFill/>
+        </p:spPr>
+        <p:txBody>
+          <a:bodyPr wrap="square" lIns="19050" rIns="19050" tIns="0" bIns="0">
+            <a:spAutoFit/>
+          </a:bodyPr>
+          <a:lstStyle/>
+          <a:p>
+            <a:pPr algn="ctr">
+              <a:lnSpc>
+                <a:spcPct val="130000"/>
+              </a:lnSpc>
+              <a:spcAft>
+                <a:spcPts val="800"/>
+              </a:spcAft>
+            </a:pPr>
+            <a:r>
+              <a:rPr sz="1875" b="1">
+                <a:solidFill>
+                  <a:srgbClr val="080808"/>
+                </a:solidFill>
+                <a:latin typeface="Pretendard"/>
+                <a:ea typeface="Pretendard"/>
+              </a:rPr>
+              <a:t>[조건 4]</a:t>
+            </a:r>
+          </a:p>
+        </p:txBody>
+      </p:sp>
+      <p:sp>
+        <p:nvSpPr>
+          <p:cNvPr id="13" name="ImageSlot4"/>
+          <p:cNvSpPr txBox="1"/>
+          <p:nvPr/>
+        </p:nvSpPr>
+        <p:spPr>
+          <a:xfrm>
+            <a:off x="8958262" y="1473200"/>
+            <a:ext cx="2667000" cy="2717800"/>
+          </a:xfrm>
+          <a:prstGeom prst="rect">
+            <a:avLst/>
+          </a:prstGeom>
+          <a:noFill/>
+        </p:spPr>
+        <p:txBody>
+          <a:bodyPr wrap="square" lIns="19050" rIns="19050" tIns="0" bIns="0">
+            <a:spAutoFit/>
+          </a:bodyPr>
+          <a:lstStyle/>
+          <a:p>
+            <a:pPr algn="ctr">
+              <a:lnSpc>
+                <a:spcPct val="130000"/>
+              </a:lnSpc>
+              <a:spcAft>
+                <a:spcPts val="800"/>
+              </a:spcAft>
+            </a:pPr>
+            <a:r>
+              <a:rPr sz="1600" b="1">
+                <a:solidFill>
+                  <a:srgbClr val="080808"/>
+                </a:solidFill>
+                <a:latin typeface="Pretendard"/>
+                <a:ea typeface="Pretendard"/>
+              </a:rPr>
+              <a:t>이미지 영역</a:t>
+            </a:r>
+          </a:p>
+        </p:txBody>
+      </p:sp>
+      <p:sp>
+        <p:nvSpPr>
+          <p:cNvPr id="14" name="Panel"/>
+          <p:cNvSpPr/>
+          <p:nvPr/>
+        </p:nvSpPr>
+        <p:spPr>
+          <a:xfrm>
+            <a:off x="476250" y="4457700"/>
+            <a:ext cx="11239500" cy="1981200"/>
+          </a:xfrm>
+          <a:prstGeom prst="roundRect">
+            <a:avLst>
+              <a:gd name="adj" fmla="val 6000"/>
+            </a:avLst>
+          </a:prstGeom>
+          <a:solidFill>
+            <a:srgbClr val="1C50B3"/>
+          </a:solidFill>
+          <a:ln>
+            <a:noFill/>
+          </a:ln>
+          <a:effectLst>
+            <a:outerShdw blurRad="38100" dist="19050" dir="5400000" algn="ctr" rotWithShape="0">
+              <a:srgbClr val="000000">
+                <a:alpha val="33000"/>
+              </a:srgbClr>
+            </a:outerShdw>
+          </a:effectLst>
+        </p:spPr>
+        <p:style>
+          <a:lnRef idx="1">
+            <a:schemeClr val="accent1"/>
+          </a:lnRef>
+          <a:fillRef idx="3">
+            <a:schemeClr val="accent1"/>
+          </a:fillRef>
+          <a:effectRef idx="0">
+            <a:schemeClr val="accent1"/>
+          </a:effectRef>
+          <a:fontRef idx="minor">
+            <a:schemeClr val="lt1"/>
+          </a:fontRef>
+        </p:style>
+        <p:txBody>
+          <a:bodyPr rtlCol="0" anchor="ctr"/>
+          <a:lstStyle/>
+          <a:p>
+            <a:pPr algn="ctr"/>
+          </a:p>
+        </p:txBody>
+      </p:sp>
+      <p:sp>
+        <p:nvSpPr>
+          <p:cNvPr id="15" name="PanelInterior"/>
+          <p:cNvSpPr/>
+          <p:nvPr/>
+        </p:nvSpPr>
+        <p:spPr>
+          <a:xfrm>
+            <a:off x="628650" y="4972050"/>
+            <a:ext cx="10934700" cy="1314450"/>
+          </a:xfrm>
+          <a:prstGeom prst="rect">
+            <a:avLst/>
+          </a:prstGeom>
+          <a:solidFill>
+            <a:srgbClr val="FFFFFF"/>
+          </a:solidFill>
+          <a:ln>
+            <a:noFill/>
+          </a:ln>
+          <a:effectLst/>
+        </p:spPr>
+        <p:style>
+          <a:lnRef idx="1">
+            <a:schemeClr val="accent1"/>
+          </a:lnRef>
+          <a:fillRef idx="3">
+            <a:schemeClr val="accent1"/>
+          </a:fillRef>
+          <a:effectRef idx="0">
+            <a:schemeClr val="accent1"/>
+          </a:effectRef>
+          <a:fontRef idx="minor">
+            <a:schemeClr val="lt1"/>
+          </a:fontRef>
+        </p:style>
+        <p:txBody>
+          <a:bodyPr rtlCol="0" anchor="ctr"/>
+          <a:lstStyle/>
+          <a:p>
+            <a:pPr algn="ctr"/>
+          </a:p>
+        </p:txBody>
+      </p:sp>
+      <p:sp>
+        <p:nvSpPr>
+          <p:cNvPr id="16" name="PanelTitle"/>
+          <p:cNvSpPr txBox="1"/>
+          <p:nvPr/>
+        </p:nvSpPr>
+        <p:spPr>
+          <a:xfrm>
+            <a:off x="685800" y="4495800"/>
+            <a:ext cx="10820400" cy="381000"/>
+          </a:xfrm>
+          <a:prstGeom prst="rect">
+            <a:avLst/>
+          </a:prstGeom>
+          <a:noFill/>
+        </p:spPr>
+        <p:txBody>
+          <a:bodyPr wrap="square" lIns="19050" rIns="19050" tIns="0" bIns="0">
+            <a:spAutoFit/>
+          </a:bodyPr>
+          <a:lstStyle/>
+          <a:p>
+            <a:pPr algn="l">
+              <a:lnSpc>
+                <a:spcPct val="130000"/>
+              </a:lnSpc>
+              <a:spcAft>
+                <a:spcPts val="800"/>
+              </a:spcAft>
+            </a:pPr>
+            <a:r>
+              <a:rPr sz="1730" b="1">
+                <a:solidFill>
+                  <a:srgbClr val="FFFFFF"/>
+                </a:solidFill>
+                <a:latin typeface="Pretendard"/>
+                <a:ea typeface="Pretendard"/>
+              </a:rPr>
+              <a:t>• [같은 대상의 조건별 비교]</a:t>
+            </a:r>
+          </a:p>
+        </p:txBody>
+      </p:sp>
+      <p:sp>
+        <p:nvSpPr>
+          <p:cNvPr id="17" name="PanelBody"/>
+          <p:cNvSpPr txBox="1"/>
+          <p:nvPr/>
+        </p:nvSpPr>
+        <p:spPr>
+          <a:xfrm>
+            <a:off x="781050" y="5124450"/>
+            <a:ext cx="10629900" cy="1009650"/>
+          </a:xfrm>
+          <a:prstGeom prst="rect">
+            <a:avLst/>
+          </a:prstGeom>
+          <a:noFill/>
+        </p:spPr>
+        <p:txBody>
+          <a:bodyPr wrap="square" lIns="19050" rIns="19050" tIns="0" bIns="0">
+            <a:spAutoFit/>
+          </a:bodyPr>
+          <a:lstStyle/>
+          <a:p>
+            <a:pPr algn="l">
+              <a:lnSpc>
+                <a:spcPct val="130000"/>
+              </a:lnSpc>
+              <a:spcAft>
+                <a:spcPts val="800"/>
+              </a:spcAft>
+            </a:pPr>
+            <a:r>
+              <a:rPr sz="1655" b="1">
+                <a:solidFill>
+                  <a:srgbClr val="080808"/>
+                </a:solidFill>
+                <a:latin typeface="Pretendard"/>
+                <a:ea typeface="Pretendard"/>
+              </a:rPr>
+              <a:t>• 조건별 핵심 수치</a:t>
+            </a:r>
+            <a:br/>
+            <a:r>
+              <a:rPr sz="1655" b="1">
+                <a:solidFill>
+                  <a:srgbClr val="080808"/>
+                </a:solidFill>
+                <a:latin typeface="Pretendard"/>
+                <a:ea typeface="Pretendard"/>
+              </a:rPr>
+              <a:t>• 비교 결과와 해석</a:t>
+            </a:r>
           </a:p>
         </p:txBody>
       </p:sp>
@@ -4422,7 +4074,7 @@
 </file>
 
 <file path=ppt/slides/slide2.xml><?xml version="1.0" encoding="utf-8"?>
-<p:sld xmlns:a="http://schemas.openxmlformats.org/drawingml/2006/main" xmlns:r="http://schemas.openxmlformats.org/officeDocument/2006/relationships" xmlns:p="http://schemas.openxmlformats.org/presentationml/2006/main">
+<p:sld xmlns:a="http://schemas.openxmlformats.org/drawingml/2006/main" xmlns:p="http://schemas.openxmlformats.org/presentationml/2006/main" xmlns:r="http://schemas.openxmlformats.org/officeDocument/2006/relationships">
   <p:cSld>
     <p:spTree>
       <p:nvGrpSpPr>
@@ -4430,24 +4082,17 @@
         <p:cNvGrpSpPr/>
         <p:nvPr/>
       </p:nvGrpSpPr>
-      <p:grpSpPr>
-        <a:xfrm>
-          <a:off x="0" y="0"/>
-          <a:ext cx="0" cy="0"/>
-          <a:chOff x="0" y="0"/>
-          <a:chExt cx="0" cy="0"/>
-        </a:xfrm>
-      </p:grpSpPr>
-      <p:sp>
-        <p:nvSpPr>
-          <p:cNvPr id="2" name="Rectangle 1"/>
+      <p:grpSpPr/>
+      <p:sp>
+        <p:nvSpPr>
+          <p:cNvPr id="2" name="Header"/>
           <p:cNvSpPr/>
           <p:nvPr/>
         </p:nvSpPr>
         <p:spPr>
           <a:xfrm>
             <a:off x="0" y="0"/>
-            <a:ext cx="12192000" cy="1193800"/>
+            <a:ext cx="12192000" cy="781050"/>
           </a:xfrm>
           <a:prstGeom prst="rect">
             <a:avLst/>
@@ -4458,6 +4103,13 @@
           <a:ln>
             <a:noFill/>
           </a:ln>
+          <a:effectLst>
+            <a:outerShdw blurRad="38100" dist="19050" dir="5400000" algn="ctr" rotWithShape="0">
+              <a:srgbClr val="000000">
+                <a:alpha val="33000"/>
+              </a:srgbClr>
+            </a:outerShdw>
+          </a:effectLst>
         </p:spPr>
         <p:style>
           <a:lnRef idx="1">
@@ -4466,7 +4118,7 @@
           <a:fillRef idx="3">
             <a:schemeClr val="accent1"/>
           </a:fillRef>
-          <a:effectRef idx="2">
+          <a:effectRef idx="0">
             <a:schemeClr val="accent1"/>
           </a:effectRef>
           <a:fontRef idx="minor">
@@ -4478,20 +4130,19 @@
           <a:lstStyle/>
           <a:p>
             <a:pPr algn="ctr"/>
-            <a:endParaRPr/>
-          </a:p>
-        </p:txBody>
-      </p:sp>
-      <p:sp>
-        <p:nvSpPr>
-          <p:cNvPr id="3" name="TextBox 2"/>
+          </a:p>
+        </p:txBody>
+      </p:sp>
+      <p:sp>
+        <p:nvSpPr>
+          <p:cNvPr id="3" name="Title"/>
           <p:cNvSpPr txBox="1"/>
           <p:nvPr/>
         </p:nvSpPr>
         <p:spPr>
           <a:xfrm>
-            <a:off x="432054" y="432054"/>
-            <a:ext cx="11327892" cy="558800"/>
+            <a:off x="257175" y="38100"/>
+            <a:ext cx="11677650" cy="666750"/>
           </a:xfrm>
           <a:prstGeom prst="rect">
             <a:avLst/>
@@ -4499,8 +4150,8 @@
           <a:noFill/>
         </p:spPr>
         <p:txBody>
-          <a:bodyPr wrap="square" lIns="19050" tIns="0" rIns="19050" bIns="0">
-            <a:noAutofit/>
+          <a:bodyPr wrap="square" lIns="19050" rIns="19050" tIns="0" bIns="0">
+            <a:spAutoFit/>
           </a:bodyPr>
           <a:lstStyle/>
           <a:p>
@@ -4511,31 +4162,30 @@
               <a:spcAft>
                 <a:spcPts val="800"/>
               </a:spcAft>
-              <a:defRPr sz="3000" b="1">
+            </a:pPr>
+            <a:r>
+              <a:rPr sz="3000" b="1">
                 <a:solidFill>
                   <a:srgbClr val="FFFFFF"/>
                 </a:solidFill>
-                <a:latin typeface="맑은 고딕"/>
-              </a:defRPr>
-            </a:pPr>
-            <a:r>
-              <a:rPr lang="en-US"/>
+                <a:latin typeface="Pretendard"/>
+                <a:ea typeface="Pretendard"/>
+              </a:rPr>
               <a:t>Contents</a:t>
             </a:r>
-            <a:endParaRPr/>
-          </a:p>
-        </p:txBody>
-      </p:sp>
-      <p:sp>
-        <p:nvSpPr>
-          <p:cNvPr id="4" name="TextBox 3"/>
+          </a:p>
+        </p:txBody>
+      </p:sp>
+      <p:sp>
+        <p:nvSpPr>
+          <p:cNvPr id="4" name="Page"/>
           <p:cNvSpPr txBox="1"/>
           <p:nvPr/>
         </p:nvSpPr>
         <p:spPr>
           <a:xfrm>
-            <a:off x="432054" y="6197346"/>
-            <a:ext cx="1016000" cy="228600"/>
+            <a:off x="247650" y="6553200"/>
+            <a:ext cx="1016000" cy="279400"/>
           </a:xfrm>
           <a:prstGeom prst="rect">
             <a:avLst/>
@@ -4543,8 +4193,8 @@
           <a:noFill/>
         </p:spPr>
         <p:txBody>
-          <a:bodyPr wrap="square" lIns="19050" tIns="0" rIns="19050" bIns="0">
-            <a:noAutofit/>
+          <a:bodyPr wrap="square" lIns="19050" rIns="19050" tIns="0" bIns="0">
+            <a:spAutoFit/>
           </a:bodyPr>
           <a:lstStyle/>
           <a:p>
@@ -4555,31 +4205,30 @@
               <a:spcAft>
                 <a:spcPts val="800"/>
               </a:spcAft>
-              <a:defRPr sz="1125" b="0">
+            </a:pPr>
+            <a:r>
+              <a:rPr sz="1128" b="1">
                 <a:solidFill>
                   <a:srgbClr val="777777"/>
                 </a:solidFill>
-                <a:latin typeface="맑은 고딕"/>
-              </a:defRPr>
-            </a:pPr>
-            <a:r>
-              <a:rPr lang="en-US" altLang="ko-KR"/>
+                <a:latin typeface="Pretendard"/>
+                <a:ea typeface="Pretendard"/>
+              </a:rPr>
               <a:t>02</a:t>
             </a:r>
-            <a:endParaRPr/>
-          </a:p>
-        </p:txBody>
-      </p:sp>
-      <p:sp>
-        <p:nvSpPr>
-          <p:cNvPr id="5" name="TextBox 4"/>
+          </a:p>
+        </p:txBody>
+      </p:sp>
+      <p:sp>
+        <p:nvSpPr>
+          <p:cNvPr id="5" name="Logo"/>
           <p:cNvSpPr txBox="1"/>
           <p:nvPr/>
         </p:nvSpPr>
         <p:spPr>
           <a:xfrm>
-            <a:off x="10540746" y="6006845"/>
-            <a:ext cx="1219200" cy="419100"/>
+            <a:off x="11163300" y="6413500"/>
+            <a:ext cx="1028700" cy="444500"/>
           </a:xfrm>
           <a:prstGeom prst="rect">
             <a:avLst/>
@@ -4587,8 +4236,8 @@
           <a:noFill/>
         </p:spPr>
         <p:txBody>
-          <a:bodyPr wrap="square" lIns="19050" tIns="0" rIns="19050" bIns="0">
-            <a:noAutofit/>
+          <a:bodyPr wrap="square" lIns="19050" rIns="19050" tIns="0" bIns="0">
+            <a:spAutoFit/>
           </a:bodyPr>
           <a:lstStyle/>
           <a:p>
@@ -4596,14 +4245,18 @@
               <a:lnSpc>
                 <a:spcPct val="130000"/>
               </a:lnSpc>
-              <a:defRPr sz="2250" b="1">
+              <a:spcAft>
+                <a:spcPts val="800"/>
+              </a:spcAft>
+            </a:pPr>
+            <a:r>
+              <a:rPr sz="2258" b="1">
                 <a:solidFill>
                   <a:srgbClr val="BE1551"/>
                 </a:solidFill>
-                <a:latin typeface="Arial"/>
-              </a:defRPr>
-            </a:pPr>
-            <a:r>
+                <a:latin typeface="Pretendard"/>
+                <a:ea typeface="Pretendard"/>
+              </a:rPr>
               <a:t>CBNU</a:t>
             </a:r>
           </a:p>
@@ -4611,14 +4264,14 @@
       </p:sp>
       <p:sp>
         <p:nvSpPr>
-          <p:cNvPr id="6" name="TextBox 5"/>
+          <p:cNvPr id="6" name="ContentsTitle1"/>
           <p:cNvSpPr txBox="1"/>
           <p:nvPr/>
         </p:nvSpPr>
         <p:spPr>
           <a:xfrm>
-            <a:off x="3556000" y="1625600"/>
-            <a:ext cx="8204200" cy="508000"/>
+            <a:off x="4543425" y="1244600"/>
+            <a:ext cx="7286625" cy="508000"/>
           </a:xfrm>
           <a:prstGeom prst="rect">
             <a:avLst/>
@@ -4626,8 +4279,8 @@
           <a:noFill/>
         </p:spPr>
         <p:txBody>
-          <a:bodyPr wrap="square" lIns="19050" tIns="0" rIns="19050" bIns="0">
-            <a:noAutofit/>
+          <a:bodyPr wrap="square" lIns="19050" rIns="19050" tIns="0" bIns="0">
+            <a:spAutoFit/>
           </a:bodyPr>
           <a:lstStyle/>
           <a:p>
@@ -4638,39 +4291,30 @@
               <a:spcAft>
                 <a:spcPts val="800"/>
               </a:spcAft>
-              <a:defRPr sz="2250" b="1">
+            </a:pPr>
+            <a:r>
+              <a:rPr sz="2256" b="1">
                 <a:solidFill>
                   <a:srgbClr val="080808"/>
                 </a:solidFill>
-                <a:latin typeface="맑은 고딕"/>
-              </a:defRPr>
-            </a:pPr>
-            <a:r>
-              <a:rPr lang="en-US" altLang="ko-KR"/>
-              <a:t>1. [</a:t>
-            </a:r>
-            <a:r>
-              <a:rPr lang="ko-KR" altLang="en-US"/>
-              <a:t>첫 번째 주제</a:t>
-            </a:r>
-            <a:r>
-              <a:rPr lang="en-US" altLang="ko-KR"/>
-              <a:t>]</a:t>
-            </a:r>
-            <a:endParaRPr/>
-          </a:p>
-        </p:txBody>
-      </p:sp>
-      <p:sp>
-        <p:nvSpPr>
-          <p:cNvPr id="7" name="TextBox 6"/>
+                <a:latin typeface="Pretendard"/>
+                <a:ea typeface="Pretendard"/>
+              </a:rPr>
+              <a:t>1. [주제]</a:t>
+            </a:r>
+          </a:p>
+        </p:txBody>
+      </p:sp>
+      <p:sp>
+        <p:nvSpPr>
+          <p:cNvPr id="7" name="ContentsBody1"/>
           <p:cNvSpPr txBox="1"/>
           <p:nvPr/>
         </p:nvSpPr>
         <p:spPr>
           <a:xfrm>
-            <a:off x="3784600" y="2286000"/>
-            <a:ext cx="7975600" cy="812800"/>
+            <a:off x="4781550" y="1841500"/>
+            <a:ext cx="7048500" cy="952500"/>
           </a:xfrm>
           <a:prstGeom prst="rect">
             <a:avLst/>
@@ -4678,8 +4322,8 @@
           <a:noFill/>
         </p:spPr>
         <p:txBody>
-          <a:bodyPr wrap="square" lIns="19050" tIns="0" rIns="19050" bIns="0">
-            <a:noAutofit/>
+          <a:bodyPr wrap="square" lIns="19050" rIns="19050" tIns="0" bIns="0">
+            <a:spAutoFit/>
           </a:bodyPr>
           <a:lstStyle/>
           <a:p>
@@ -4690,44 +4334,41 @@
               <a:spcAft>
                 <a:spcPts val="800"/>
               </a:spcAft>
-              <a:defRPr sz="1800" b="0">
+            </a:pPr>
+            <a:r>
+              <a:rPr sz="1800" b="1">
                 <a:solidFill>
                   <a:srgbClr val="080808"/>
                 </a:solidFill>
-                <a:latin typeface="맑은 고딕"/>
-              </a:defRPr>
-            </a:pPr>
-            <a:r>
-              <a:rPr lang="en-US" altLang="ko-KR"/>
-              <a:t>• </a:t>
-            </a:r>
-            <a:r>
-              <a:rPr lang="ko-KR" altLang="en-US"/>
-              <a:t>핵심 내용
-</a:t>
-            </a:r>
-            <a:r>
-              <a:rPr lang="en-US" altLang="ko-KR"/>
-              <a:t>• </a:t>
-            </a:r>
-            <a:r>
-              <a:rPr lang="ko-KR" altLang="en-US"/>
-              <a:t>세부 내용</a:t>
-            </a:r>
-            <a:endParaRPr/>
-          </a:p>
-        </p:txBody>
-      </p:sp>
-      <p:sp>
-        <p:nvSpPr>
-          <p:cNvPr id="8" name="TextBox 7"/>
+                <a:latin typeface="Pretendard"/>
+                <a:ea typeface="Pretendard"/>
+              </a:rPr>
+              <a:t>• 핵심 내용</a:t>
+            </a:r>
+            <a:br/>
+            <a:r>
+              <a:rPr sz="1800" b="1">
+                <a:solidFill>
+                  <a:srgbClr val="080808"/>
+                </a:solidFill>
+                <a:latin typeface="Pretendard"/>
+                <a:ea typeface="Pretendard"/>
+              </a:rPr>
+              <a:t>• 세부 내용</a:t>
+            </a:r>
+          </a:p>
+        </p:txBody>
+      </p:sp>
+      <p:sp>
+        <p:nvSpPr>
+          <p:cNvPr id="8" name="ContentsTitle2"/>
           <p:cNvSpPr txBox="1"/>
           <p:nvPr/>
         </p:nvSpPr>
         <p:spPr>
           <a:xfrm>
-            <a:off x="3556000" y="3390900"/>
-            <a:ext cx="8204200" cy="508000"/>
+            <a:off x="4543425" y="2997200"/>
+            <a:ext cx="7286625" cy="508000"/>
           </a:xfrm>
           <a:prstGeom prst="rect">
             <a:avLst/>
@@ -4735,8 +4376,8 @@
           <a:noFill/>
         </p:spPr>
         <p:txBody>
-          <a:bodyPr wrap="square" lIns="19050" tIns="0" rIns="19050" bIns="0">
-            <a:noAutofit/>
+          <a:bodyPr wrap="square" lIns="19050" rIns="19050" tIns="0" bIns="0">
+            <a:spAutoFit/>
           </a:bodyPr>
           <a:lstStyle/>
           <a:p>
@@ -4747,39 +4388,30 @@
               <a:spcAft>
                 <a:spcPts val="800"/>
               </a:spcAft>
-              <a:defRPr sz="2250" b="1">
+            </a:pPr>
+            <a:r>
+              <a:rPr sz="2256" b="1">
                 <a:solidFill>
                   <a:srgbClr val="080808"/>
                 </a:solidFill>
-                <a:latin typeface="맑은 고딕"/>
-              </a:defRPr>
-            </a:pPr>
-            <a:r>
-              <a:rPr lang="en-US" altLang="ko-KR"/>
-              <a:t>2. [</a:t>
-            </a:r>
-            <a:r>
-              <a:rPr lang="ko-KR" altLang="en-US"/>
-              <a:t>두 번째 주제</a:t>
-            </a:r>
-            <a:r>
-              <a:rPr lang="en-US" altLang="ko-KR"/>
-              <a:t>]</a:t>
-            </a:r>
-            <a:endParaRPr/>
-          </a:p>
-        </p:txBody>
-      </p:sp>
-      <p:sp>
-        <p:nvSpPr>
-          <p:cNvPr id="9" name="TextBox 8"/>
+                <a:latin typeface="Pretendard"/>
+                <a:ea typeface="Pretendard"/>
+              </a:rPr>
+              <a:t>2. [주제]</a:t>
+            </a:r>
+          </a:p>
+        </p:txBody>
+      </p:sp>
+      <p:sp>
+        <p:nvSpPr>
+          <p:cNvPr id="9" name="ContentsBody2"/>
           <p:cNvSpPr txBox="1"/>
           <p:nvPr/>
         </p:nvSpPr>
         <p:spPr>
           <a:xfrm>
-            <a:off x="3784600" y="3962400"/>
-            <a:ext cx="7975600" cy="812800"/>
+            <a:off x="4781550" y="3568700"/>
+            <a:ext cx="7048500" cy="952500"/>
           </a:xfrm>
           <a:prstGeom prst="rect">
             <a:avLst/>
@@ -4787,8 +4419,8 @@
           <a:noFill/>
         </p:spPr>
         <p:txBody>
-          <a:bodyPr wrap="square" lIns="19050" tIns="0" rIns="19050" bIns="0">
-            <a:noAutofit/>
+          <a:bodyPr wrap="square" lIns="19050" rIns="19050" tIns="0" bIns="0">
+            <a:spAutoFit/>
           </a:bodyPr>
           <a:lstStyle/>
           <a:p>
@@ -4799,44 +4431,41 @@
               <a:spcAft>
                 <a:spcPts val="800"/>
               </a:spcAft>
-              <a:defRPr sz="1800" b="0">
+            </a:pPr>
+            <a:r>
+              <a:rPr sz="1800" b="1">
                 <a:solidFill>
                   <a:srgbClr val="080808"/>
                 </a:solidFill>
-                <a:latin typeface="맑은 고딕"/>
-              </a:defRPr>
-            </a:pPr>
-            <a:r>
-              <a:rPr lang="en-US" altLang="ko-KR"/>
-              <a:t>• </a:t>
-            </a:r>
-            <a:r>
-              <a:rPr lang="ko-KR" altLang="en-US"/>
-              <a:t>핵심 내용
-</a:t>
-            </a:r>
-            <a:r>
-              <a:rPr lang="en-US" altLang="ko-KR"/>
-              <a:t>• </a:t>
-            </a:r>
-            <a:r>
-              <a:rPr lang="ko-KR" altLang="en-US"/>
-              <a:t>세부 내용</a:t>
-            </a:r>
-            <a:endParaRPr/>
-          </a:p>
-        </p:txBody>
-      </p:sp>
-      <p:sp>
-        <p:nvSpPr>
-          <p:cNvPr id="10" name="TextBox 9"/>
+                <a:latin typeface="Pretendard"/>
+                <a:ea typeface="Pretendard"/>
+              </a:rPr>
+              <a:t>• 핵심 내용</a:t>
+            </a:r>
+            <a:br/>
+            <a:r>
+              <a:rPr sz="1800" b="1">
+                <a:solidFill>
+                  <a:srgbClr val="080808"/>
+                </a:solidFill>
+                <a:latin typeface="Pretendard"/>
+                <a:ea typeface="Pretendard"/>
+              </a:rPr>
+              <a:t>• 세부 내용</a:t>
+            </a:r>
+          </a:p>
+        </p:txBody>
+      </p:sp>
+      <p:sp>
+        <p:nvSpPr>
+          <p:cNvPr id="10" name="ContentsTitle3"/>
           <p:cNvSpPr txBox="1"/>
           <p:nvPr/>
         </p:nvSpPr>
         <p:spPr>
           <a:xfrm>
-            <a:off x="3556000" y="5118100"/>
-            <a:ext cx="8204200" cy="508000"/>
+            <a:off x="4543425" y="4749800"/>
+            <a:ext cx="7286625" cy="508000"/>
           </a:xfrm>
           <a:prstGeom prst="rect">
             <a:avLst/>
@@ -4844,8 +4473,8 @@
           <a:noFill/>
         </p:spPr>
         <p:txBody>
-          <a:bodyPr wrap="square" lIns="19050" tIns="0" rIns="19050" bIns="0">
-            <a:noAutofit/>
+          <a:bodyPr wrap="square" lIns="19050" rIns="19050" tIns="0" bIns="0">
+            <a:spAutoFit/>
           </a:bodyPr>
           <a:lstStyle/>
           <a:p>
@@ -4856,26 +4485,71 @@
               <a:spcAft>
                 <a:spcPts val="800"/>
               </a:spcAft>
-              <a:defRPr sz="2250" b="1">
+            </a:pPr>
+            <a:r>
+              <a:rPr sz="2256" b="1">
                 <a:solidFill>
                   <a:srgbClr val="080808"/>
                 </a:solidFill>
-                <a:latin typeface="맑은 고딕"/>
-              </a:defRPr>
+                <a:latin typeface="Pretendard"/>
+                <a:ea typeface="Pretendard"/>
+              </a:rPr>
+              <a:t>3. [주제]</a:t>
+            </a:r>
+          </a:p>
+        </p:txBody>
+      </p:sp>
+      <p:sp>
+        <p:nvSpPr>
+          <p:cNvPr id="11" name="ContentsBody3"/>
+          <p:cNvSpPr txBox="1"/>
+          <p:nvPr/>
+        </p:nvSpPr>
+        <p:spPr>
+          <a:xfrm>
+            <a:off x="4781550" y="5321300"/>
+            <a:ext cx="7048500" cy="952500"/>
+          </a:xfrm>
+          <a:prstGeom prst="rect">
+            <a:avLst/>
+          </a:prstGeom>
+          <a:noFill/>
+        </p:spPr>
+        <p:txBody>
+          <a:bodyPr wrap="square" lIns="19050" rIns="19050" tIns="0" bIns="0">
+            <a:spAutoFit/>
+          </a:bodyPr>
+          <a:lstStyle/>
+          <a:p>
+            <a:pPr algn="l">
+              <a:lnSpc>
+                <a:spcPct val="130000"/>
+              </a:lnSpc>
+              <a:spcAft>
+                <a:spcPts val="800"/>
+              </a:spcAft>
             </a:pPr>
             <a:r>
-              <a:rPr lang="en-US" altLang="ko-KR"/>
-              <a:t>3. [</a:t>
-            </a:r>
-            <a:r>
-              <a:rPr lang="ko-KR" altLang="en-US"/>
-              <a:t>마지막 주제</a:t>
-            </a:r>
-            <a:r>
-              <a:rPr lang="en-US" altLang="ko-KR"/>
-              <a:t>]</a:t>
-            </a:r>
-            <a:endParaRPr/>
+              <a:rPr sz="1800" b="1">
+                <a:solidFill>
+                  <a:srgbClr val="080808"/>
+                </a:solidFill>
+                <a:latin typeface="Pretendard"/>
+                <a:ea typeface="Pretendard"/>
+              </a:rPr>
+              <a:t>• 핵심 내용</a:t>
+            </a:r>
+            <a:br/>
+            <a:r>
+              <a:rPr sz="1800" b="1">
+                <a:solidFill>
+                  <a:srgbClr val="080808"/>
+                </a:solidFill>
+                <a:latin typeface="Pretendard"/>
+                <a:ea typeface="Pretendard"/>
+              </a:rPr>
+              <a:t>• 세부 내용</a:t>
+            </a:r>
           </a:p>
         </p:txBody>
       </p:sp>
@@ -4888,7 +4562,7 @@
 </file>
 
 <file path=ppt/slides/slide3.xml><?xml version="1.0" encoding="utf-8"?>
-<p:sld xmlns:a="http://schemas.openxmlformats.org/drawingml/2006/main" xmlns:r="http://schemas.openxmlformats.org/officeDocument/2006/relationships" xmlns:p="http://schemas.openxmlformats.org/presentationml/2006/main">
+<p:sld xmlns:a="http://schemas.openxmlformats.org/drawingml/2006/main" xmlns:p="http://schemas.openxmlformats.org/presentationml/2006/main" xmlns:r="http://schemas.openxmlformats.org/officeDocument/2006/relationships">
   <p:cSld>
     <p:spTree>
       <p:nvGrpSpPr>
@@ -4896,24 +4570,17 @@
         <p:cNvGrpSpPr/>
         <p:nvPr/>
       </p:nvGrpSpPr>
-      <p:grpSpPr>
-        <a:xfrm>
-          <a:off x="0" y="0"/>
-          <a:ext cx="0" cy="0"/>
-          <a:chOff x="0" y="0"/>
-          <a:chExt cx="0" cy="0"/>
-        </a:xfrm>
-      </p:grpSpPr>
-      <p:sp>
-        <p:nvSpPr>
-          <p:cNvPr id="2" name="Rectangle 1"/>
+      <p:grpSpPr/>
+      <p:sp>
+        <p:nvSpPr>
+          <p:cNvPr id="2" name="Header"/>
           <p:cNvSpPr/>
           <p:nvPr/>
         </p:nvSpPr>
         <p:spPr>
           <a:xfrm>
             <a:off x="0" y="0"/>
-            <a:ext cx="12192000" cy="1193800"/>
+            <a:ext cx="12192000" cy="781050"/>
           </a:xfrm>
           <a:prstGeom prst="rect">
             <a:avLst/>
@@ -4924,6 +4591,13 @@
           <a:ln>
             <a:noFill/>
           </a:ln>
+          <a:effectLst>
+            <a:outerShdw blurRad="38100" dist="19050" dir="5400000" algn="ctr" rotWithShape="0">
+              <a:srgbClr val="000000">
+                <a:alpha val="33000"/>
+              </a:srgbClr>
+            </a:outerShdw>
+          </a:effectLst>
         </p:spPr>
         <p:style>
           <a:lnRef idx="1">
@@ -4932,7 +4606,7 @@
           <a:fillRef idx="3">
             <a:schemeClr val="accent1"/>
           </a:fillRef>
-          <a:effectRef idx="2">
+          <a:effectRef idx="0">
             <a:schemeClr val="accent1"/>
           </a:effectRef>
           <a:fontRef idx="minor">
@@ -4944,20 +4618,19 @@
           <a:lstStyle/>
           <a:p>
             <a:pPr algn="ctr"/>
-            <a:endParaRPr/>
-          </a:p>
-        </p:txBody>
-      </p:sp>
-      <p:sp>
-        <p:nvSpPr>
-          <p:cNvPr id="3" name="TextBox 2"/>
+          </a:p>
+        </p:txBody>
+      </p:sp>
+      <p:sp>
+        <p:nvSpPr>
+          <p:cNvPr id="3" name="Page"/>
           <p:cNvSpPr txBox="1"/>
           <p:nvPr/>
         </p:nvSpPr>
         <p:spPr>
           <a:xfrm>
-            <a:off x="432054" y="432054"/>
-            <a:ext cx="11327892" cy="558800"/>
+            <a:off x="247650" y="6553200"/>
+            <a:ext cx="1016000" cy="279400"/>
           </a:xfrm>
           <a:prstGeom prst="rect">
             <a:avLst/>
@@ -4965,8 +4638,8 @@
           <a:noFill/>
         </p:spPr>
         <p:txBody>
-          <a:bodyPr wrap="square" lIns="19050" tIns="0" rIns="19050" bIns="0">
-            <a:noAutofit/>
+          <a:bodyPr wrap="square" lIns="19050" rIns="19050" tIns="0" bIns="0">
+            <a:spAutoFit/>
           </a:bodyPr>
           <a:lstStyle/>
           <a:p>
@@ -4977,31 +4650,30 @@
               <a:spcAft>
                 <a:spcPts val="800"/>
               </a:spcAft>
-              <a:defRPr sz="3000" b="1">
-                <a:solidFill>
-                  <a:srgbClr val="FFFFFF"/>
-                </a:solidFill>
-                <a:latin typeface="맑은 고딕"/>
-              </a:defRPr>
             </a:pPr>
             <a:r>
-              <a:rPr lang="ko-KR" altLang="en-US"/>
-              <a:t>섹션 구분</a:t>
-            </a:r>
-            <a:endParaRPr/>
-          </a:p>
-        </p:txBody>
-      </p:sp>
-      <p:sp>
-        <p:nvSpPr>
-          <p:cNvPr id="4" name="TextBox 3"/>
+              <a:rPr sz="1128" b="1">
+                <a:solidFill>
+                  <a:srgbClr val="777777"/>
+                </a:solidFill>
+                <a:latin typeface="Pretendard"/>
+                <a:ea typeface="Pretendard"/>
+              </a:rPr>
+              <a:t>03</a:t>
+            </a:r>
+          </a:p>
+        </p:txBody>
+      </p:sp>
+      <p:sp>
+        <p:nvSpPr>
+          <p:cNvPr id="4" name="Logo"/>
           <p:cNvSpPr txBox="1"/>
           <p:nvPr/>
         </p:nvSpPr>
         <p:spPr>
           <a:xfrm>
-            <a:off x="432054" y="6197346"/>
-            <a:ext cx="1016000" cy="228600"/>
+            <a:off x="11163300" y="6413500"/>
+            <a:ext cx="1028700" cy="444500"/>
           </a:xfrm>
           <a:prstGeom prst="rect">
             <a:avLst/>
@@ -5009,43 +4681,42 @@
           <a:noFill/>
         </p:spPr>
         <p:txBody>
-          <a:bodyPr wrap="square" lIns="19050" tIns="0" rIns="19050" bIns="0">
-            <a:noAutofit/>
+          <a:bodyPr wrap="square" lIns="19050" rIns="19050" tIns="0" bIns="0">
+            <a:spAutoFit/>
           </a:bodyPr>
           <a:lstStyle/>
           <a:p>
-            <a:pPr algn="l">
+            <a:pPr algn="r">
               <a:lnSpc>
                 <a:spcPct val="130000"/>
               </a:lnSpc>
               <a:spcAft>
                 <a:spcPts val="800"/>
               </a:spcAft>
-              <a:defRPr sz="1125" b="0">
-                <a:solidFill>
-                  <a:srgbClr val="777777"/>
-                </a:solidFill>
-                <a:latin typeface="맑은 고딕"/>
-              </a:defRPr>
             </a:pPr>
             <a:r>
-              <a:rPr lang="en-US" altLang="ko-KR"/>
-              <a:t>03</a:t>
-            </a:r>
-            <a:endParaRPr/>
-          </a:p>
-        </p:txBody>
-      </p:sp>
-      <p:sp>
-        <p:nvSpPr>
-          <p:cNvPr id="5" name="TextBox 4"/>
+              <a:rPr sz="2258" b="1">
+                <a:solidFill>
+                  <a:srgbClr val="BE1551"/>
+                </a:solidFill>
+                <a:latin typeface="Pretendard"/>
+                <a:ea typeface="Pretendard"/>
+              </a:rPr>
+              <a:t>CBNU</a:t>
+            </a:r>
+          </a:p>
+        </p:txBody>
+      </p:sp>
+      <p:sp>
+        <p:nvSpPr>
+          <p:cNvPr id="5" name="SectionTitle"/>
           <p:cNvSpPr txBox="1"/>
           <p:nvPr/>
         </p:nvSpPr>
         <p:spPr>
           <a:xfrm>
-            <a:off x="10540746" y="6006845"/>
-            <a:ext cx="1219200" cy="419100"/>
+            <a:off x="2540000" y="2667000"/>
+            <a:ext cx="7112000" cy="1079500"/>
           </a:xfrm>
           <a:prstGeom prst="rect">
             <a:avLst/>
@@ -5053,47 +4724,8 @@
           <a:noFill/>
         </p:spPr>
         <p:txBody>
-          <a:bodyPr wrap="square" lIns="19050" tIns="0" rIns="19050" bIns="0">
-            <a:noAutofit/>
-          </a:bodyPr>
-          <a:lstStyle/>
-          <a:p>
-            <a:pPr algn="r">
-              <a:lnSpc>
-                <a:spcPct val="130000"/>
-              </a:lnSpc>
-              <a:defRPr sz="2250" b="1">
-                <a:solidFill>
-                  <a:srgbClr val="BE1551"/>
-                </a:solidFill>
-                <a:latin typeface="Arial"/>
-              </a:defRPr>
-            </a:pPr>
-            <a:r>
-              <a:t>CBNU</a:t>
-            </a:r>
-          </a:p>
-        </p:txBody>
-      </p:sp>
-      <p:sp>
-        <p:nvSpPr>
-          <p:cNvPr id="6" name="TextBox 5"/>
-          <p:cNvSpPr txBox="1"/>
-          <p:nvPr/>
-        </p:nvSpPr>
-        <p:spPr>
-          <a:xfrm>
-            <a:off x="432054" y="2717799"/>
-            <a:ext cx="11327892" cy="1016000"/>
-          </a:xfrm>
-          <a:prstGeom prst="rect">
-            <a:avLst/>
-          </a:prstGeom>
-          <a:noFill/>
-        </p:spPr>
-        <p:txBody>
-          <a:bodyPr wrap="square" lIns="19050" tIns="0" rIns="19050" bIns="0">
-            <a:noAutofit/>
+          <a:bodyPr wrap="square" lIns="19050" rIns="19050" tIns="0" bIns="0">
+            <a:spAutoFit/>
           </a:bodyPr>
           <a:lstStyle/>
           <a:p>
@@ -5104,39 +4736,30 @@
               <a:spcAft>
                 <a:spcPts val="800"/>
               </a:spcAft>
-              <a:defRPr sz="4875" b="1">
+            </a:pPr>
+            <a:r>
+              <a:rPr sz="4874" b="1">
                 <a:solidFill>
                   <a:srgbClr val="080808"/>
                 </a:solidFill>
-                <a:latin typeface="맑은 고딕"/>
-              </a:defRPr>
-            </a:pPr>
-            <a:r>
-              <a:rPr lang="en-US" altLang="ko-KR"/>
-              <a:t>[</a:t>
-            </a:r>
-            <a:r>
-              <a:rPr lang="ko-KR" altLang="en-US"/>
-              <a:t>섹션 제목</a:t>
-            </a:r>
-            <a:r>
-              <a:rPr lang="en-US" altLang="ko-KR"/>
-              <a:t>]</a:t>
-            </a:r>
-            <a:endParaRPr/>
-          </a:p>
-        </p:txBody>
-      </p:sp>
-      <p:sp>
-        <p:nvSpPr>
-          <p:cNvPr id="7" name="TextBox 6"/>
+                <a:latin typeface="Pretendard"/>
+                <a:ea typeface="Pretendard"/>
+              </a:rPr>
+              <a:t>[섹션 제목]</a:t>
+            </a:r>
+          </a:p>
+        </p:txBody>
+      </p:sp>
+      <p:sp>
+        <p:nvSpPr>
+          <p:cNvPr id="6" name="SectionSubtitle"/>
           <p:cNvSpPr txBox="1"/>
           <p:nvPr/>
         </p:nvSpPr>
         <p:spPr>
           <a:xfrm>
-            <a:off x="432054" y="3962400"/>
-            <a:ext cx="11327892" cy="762000"/>
+            <a:off x="2540000" y="3810000"/>
+            <a:ext cx="7112000" cy="711200"/>
           </a:xfrm>
           <a:prstGeom prst="rect">
             <a:avLst/>
@@ -5144,8 +4767,8 @@
           <a:noFill/>
         </p:spPr>
         <p:txBody>
-          <a:bodyPr wrap="square" lIns="19050" tIns="0" rIns="19050" bIns="0">
-            <a:noAutofit/>
+          <a:bodyPr wrap="square" lIns="19050" rIns="19050" tIns="0" bIns="0">
+            <a:spAutoFit/>
           </a:bodyPr>
           <a:lstStyle/>
           <a:p>
@@ -5156,18 +4779,17 @@
               <a:spcAft>
                 <a:spcPts val="800"/>
               </a:spcAft>
-              <a:defRPr sz="2775" b="0">
+            </a:pPr>
+            <a:r>
+              <a:rPr sz="2772" b="1">
                 <a:solidFill>
                   <a:srgbClr val="080808"/>
                 </a:solidFill>
-                <a:latin typeface="맑은 고딕"/>
-              </a:defRPr>
-            </a:pPr>
-            <a:r>
-              <a:rPr lang="ko-KR" altLang="en-US"/>
-              <a:t>핵심 주제 또는 소개 문구</a:t>
-            </a:r>
-            <a:endParaRPr/>
+                <a:latin typeface="Pretendard"/>
+                <a:ea typeface="Pretendard"/>
+              </a:rPr>
+              <a:t>[섹션 설명]</a:t>
+            </a:r>
           </a:p>
         </p:txBody>
       </p:sp>
@@ -5180,7 +4802,7 @@
 </file>
 
 <file path=ppt/slides/slide4.xml><?xml version="1.0" encoding="utf-8"?>
-<p:sld xmlns:a="http://schemas.openxmlformats.org/drawingml/2006/main" xmlns:r="http://schemas.openxmlformats.org/officeDocument/2006/relationships" xmlns:p="http://schemas.openxmlformats.org/presentationml/2006/main">
+<p:sld xmlns:a="http://schemas.openxmlformats.org/drawingml/2006/main" xmlns:p="http://schemas.openxmlformats.org/presentationml/2006/main" xmlns:r="http://schemas.openxmlformats.org/officeDocument/2006/relationships">
   <p:cSld>
     <p:spTree>
       <p:nvGrpSpPr>
@@ -5188,24 +4810,17 @@
         <p:cNvGrpSpPr/>
         <p:nvPr/>
       </p:nvGrpSpPr>
-      <p:grpSpPr>
-        <a:xfrm>
-          <a:off x="0" y="0"/>
-          <a:ext cx="0" cy="0"/>
-          <a:chOff x="0" y="0"/>
-          <a:chExt cx="0" cy="0"/>
-        </a:xfrm>
-      </p:grpSpPr>
-      <p:sp>
-        <p:nvSpPr>
-          <p:cNvPr id="2" name="Rectangle 1"/>
+      <p:grpSpPr/>
+      <p:sp>
+        <p:nvSpPr>
+          <p:cNvPr id="2" name="Header"/>
           <p:cNvSpPr/>
           <p:nvPr/>
         </p:nvSpPr>
         <p:spPr>
           <a:xfrm>
             <a:off x="0" y="0"/>
-            <a:ext cx="12192000" cy="1193800"/>
+            <a:ext cx="12192000" cy="781050"/>
           </a:xfrm>
           <a:prstGeom prst="rect">
             <a:avLst/>
@@ -5216,6 +4831,13 @@
           <a:ln>
             <a:noFill/>
           </a:ln>
+          <a:effectLst>
+            <a:outerShdw blurRad="38100" dist="19050" dir="5400000" algn="ctr" rotWithShape="0">
+              <a:srgbClr val="000000">
+                <a:alpha val="33000"/>
+              </a:srgbClr>
+            </a:outerShdw>
+          </a:effectLst>
         </p:spPr>
         <p:style>
           <a:lnRef idx="1">
@@ -5224,7 +4846,7 @@
           <a:fillRef idx="3">
             <a:schemeClr val="accent1"/>
           </a:fillRef>
-          <a:effectRef idx="2">
+          <a:effectRef idx="0">
             <a:schemeClr val="accent1"/>
           </a:effectRef>
           <a:fontRef idx="minor">
@@ -5236,20 +4858,19 @@
           <a:lstStyle/>
           <a:p>
             <a:pPr algn="ctr"/>
-            <a:endParaRPr/>
-          </a:p>
-        </p:txBody>
-      </p:sp>
-      <p:sp>
-        <p:nvSpPr>
-          <p:cNvPr id="3" name="TextBox 2"/>
+          </a:p>
+        </p:txBody>
+      </p:sp>
+      <p:sp>
+        <p:nvSpPr>
+          <p:cNvPr id="3" name="Title"/>
           <p:cNvSpPr txBox="1"/>
           <p:nvPr/>
         </p:nvSpPr>
         <p:spPr>
           <a:xfrm>
-            <a:off x="432054" y="432054"/>
-            <a:ext cx="11327892" cy="558800"/>
+            <a:off x="257175" y="38100"/>
+            <a:ext cx="11677650" cy="666750"/>
           </a:xfrm>
           <a:prstGeom prst="rect">
             <a:avLst/>
@@ -5257,8 +4878,8 @@
           <a:noFill/>
         </p:spPr>
         <p:txBody>
-          <a:bodyPr wrap="square" lIns="19050" tIns="0" rIns="19050" bIns="0">
-            <a:noAutofit/>
+          <a:bodyPr wrap="square" lIns="19050" rIns="19050" tIns="0" bIns="0">
+            <a:spAutoFit/>
           </a:bodyPr>
           <a:lstStyle/>
           <a:p>
@@ -5269,39 +4890,30 @@
               <a:spcAft>
                 <a:spcPts val="800"/>
               </a:spcAft>
-              <a:defRPr sz="3000" b="1">
+            </a:pPr>
+            <a:r>
+              <a:rPr sz="3000" b="1">
                 <a:solidFill>
                   <a:srgbClr val="FFFFFF"/>
                 </a:solidFill>
-                <a:latin typeface="맑은 고딕"/>
-              </a:defRPr>
-            </a:pPr>
-            <a:r>
-              <a:rPr lang="en-US" altLang="ko-KR"/>
-              <a:t>[</a:t>
-            </a:r>
-            <a:r>
-              <a:rPr lang="ko-KR" altLang="en-US"/>
-              <a:t>본문 제목</a:t>
-            </a:r>
-            <a:r>
-              <a:rPr lang="en-US" altLang="ko-KR"/>
-              <a:t>]</a:t>
-            </a:r>
-            <a:endParaRPr/>
-          </a:p>
-        </p:txBody>
-      </p:sp>
-      <p:sp>
-        <p:nvSpPr>
-          <p:cNvPr id="4" name="TextBox 3"/>
+                <a:latin typeface="Pretendard"/>
+                <a:ea typeface="Pretendard"/>
+              </a:rPr>
+              <a:t>[본문 제목]</a:t>
+            </a:r>
+          </a:p>
+        </p:txBody>
+      </p:sp>
+      <p:sp>
+        <p:nvSpPr>
+          <p:cNvPr id="4" name="Page"/>
           <p:cNvSpPr txBox="1"/>
           <p:nvPr/>
         </p:nvSpPr>
         <p:spPr>
           <a:xfrm>
-            <a:off x="432054" y="6197346"/>
-            <a:ext cx="1016000" cy="228600"/>
+            <a:off x="247650" y="6553200"/>
+            <a:ext cx="1016000" cy="279400"/>
           </a:xfrm>
           <a:prstGeom prst="rect">
             <a:avLst/>
@@ -5309,8 +4921,8 @@
           <a:noFill/>
         </p:spPr>
         <p:txBody>
-          <a:bodyPr wrap="square" lIns="19050" tIns="0" rIns="19050" bIns="0">
-            <a:noAutofit/>
+          <a:bodyPr wrap="square" lIns="19050" rIns="19050" tIns="0" bIns="0">
+            <a:spAutoFit/>
           </a:bodyPr>
           <a:lstStyle/>
           <a:p>
@@ -5321,31 +4933,30 @@
               <a:spcAft>
                 <a:spcPts val="800"/>
               </a:spcAft>
-              <a:defRPr sz="1125" b="0">
+            </a:pPr>
+            <a:r>
+              <a:rPr sz="1128" b="1">
                 <a:solidFill>
                   <a:srgbClr val="777777"/>
                 </a:solidFill>
-                <a:latin typeface="맑은 고딕"/>
-              </a:defRPr>
-            </a:pPr>
-            <a:r>
-              <a:rPr lang="en-US" altLang="ko-KR"/>
+                <a:latin typeface="Pretendard"/>
+                <a:ea typeface="Pretendard"/>
+              </a:rPr>
               <a:t>04</a:t>
             </a:r>
-            <a:endParaRPr/>
-          </a:p>
-        </p:txBody>
-      </p:sp>
-      <p:sp>
-        <p:nvSpPr>
-          <p:cNvPr id="5" name="TextBox 4"/>
+          </a:p>
+        </p:txBody>
+      </p:sp>
+      <p:sp>
+        <p:nvSpPr>
+          <p:cNvPr id="5" name="Logo"/>
           <p:cNvSpPr txBox="1"/>
           <p:nvPr/>
         </p:nvSpPr>
         <p:spPr>
           <a:xfrm>
-            <a:off x="10540746" y="6006845"/>
-            <a:ext cx="1219200" cy="419100"/>
+            <a:off x="11163300" y="6413500"/>
+            <a:ext cx="1028700" cy="444500"/>
           </a:xfrm>
           <a:prstGeom prst="rect">
             <a:avLst/>
@@ -5353,100 +4964,201 @@
           <a:noFill/>
         </p:spPr>
         <p:txBody>
-          <a:bodyPr wrap="square" lIns="19050" tIns="0" rIns="19050" bIns="0">
-            <a:noAutofit/>
+          <a:bodyPr wrap="square" lIns="19050" rIns="19050" tIns="0" bIns="0">
+            <a:spAutoFit/>
           </a:bodyPr>
           <a:lstStyle/>
           <a:p>
             <a:pPr algn="r">
-              <a:lnSpc>
-                <a:spcPct val="130000"/>
-              </a:lnSpc>
-              <a:defRPr sz="2250" b="1">
-                <a:solidFill>
-                  <a:srgbClr val="BE1551"/>
-                </a:solidFill>
-                <a:latin typeface="Arial"/>
-              </a:defRPr>
-            </a:pPr>
-            <a:r>
-              <a:t>CBNU</a:t>
-            </a:r>
-          </a:p>
-        </p:txBody>
-      </p:sp>
-      <p:sp>
-        <p:nvSpPr>
-          <p:cNvPr id="10" name="TextBox 9"/>
-          <p:cNvSpPr txBox="1"/>
-          <p:nvPr/>
-        </p:nvSpPr>
-        <p:spPr>
-          <a:xfrm>
-            <a:off x="432054" y="1803400"/>
-            <a:ext cx="11327892" cy="3810000"/>
-          </a:xfrm>
-          <a:prstGeom prst="rect">
-            <a:avLst/>
-          </a:prstGeom>
-          <a:noFill/>
-        </p:spPr>
-        <p:txBody>
-          <a:bodyPr wrap="square" lIns="19050" tIns="0" rIns="19050" bIns="0">
-            <a:noAutofit/>
-          </a:bodyPr>
-          <a:lstStyle/>
-          <a:p>
-            <a:pPr>
               <a:lnSpc>
                 <a:spcPct val="130000"/>
               </a:lnSpc>
               <a:spcAft>
                 <a:spcPts val="800"/>
               </a:spcAft>
-              <a:defRPr sz="1575" b="1">
+            </a:pPr>
+            <a:r>
+              <a:rPr sz="2258" b="1">
+                <a:solidFill>
+                  <a:srgbClr val="BE1551"/>
+                </a:solidFill>
+                <a:latin typeface="Pretendard"/>
+                <a:ea typeface="Pretendard"/>
+              </a:rPr>
+              <a:t>CBNU</a:t>
+            </a:r>
+          </a:p>
+        </p:txBody>
+      </p:sp>
+      <p:sp>
+        <p:nvSpPr>
+          <p:cNvPr id="6" name="ExplanationBox"/>
+          <p:cNvSpPr/>
+          <p:nvPr/>
+        </p:nvSpPr>
+        <p:spPr>
+          <a:xfrm>
+            <a:off x="257175" y="1085850"/>
+            <a:ext cx="11677650" cy="5257800"/>
+          </a:xfrm>
+          <a:prstGeom prst="roundRect">
+            <a:avLst>
+              <a:gd name="adj" fmla="val 6000"/>
+            </a:avLst>
+          </a:prstGeom>
+          <a:solidFill>
+            <a:srgbClr val="1C50B3"/>
+          </a:solidFill>
+          <a:ln>
+            <a:noFill/>
+          </a:ln>
+          <a:effectLst>
+            <a:outerShdw blurRad="38100" dist="19050" dir="5400000" algn="ctr" rotWithShape="0">
+              <a:srgbClr val="000000">
+                <a:alpha val="33000"/>
+              </a:srgbClr>
+            </a:outerShdw>
+          </a:effectLst>
+        </p:spPr>
+        <p:style>
+          <a:lnRef idx="1">
+            <a:schemeClr val="accent1"/>
+          </a:lnRef>
+          <a:fillRef idx="3">
+            <a:schemeClr val="accent1"/>
+          </a:fillRef>
+          <a:effectRef idx="0">
+            <a:schemeClr val="accent1"/>
+          </a:effectRef>
+          <a:fontRef idx="minor">
+            <a:schemeClr val="lt1"/>
+          </a:fontRef>
+        </p:style>
+        <p:txBody>
+          <a:bodyPr rtlCol="0" anchor="ctr"/>
+          <a:lstStyle/>
+          <a:p>
+            <a:pPr algn="ctr"/>
+          </a:p>
+        </p:txBody>
+      </p:sp>
+      <p:sp>
+        <p:nvSpPr>
+          <p:cNvPr id="7" name="ExplanationBoxInterior"/>
+          <p:cNvSpPr/>
+          <p:nvPr/>
+        </p:nvSpPr>
+        <p:spPr>
+          <a:xfrm>
+            <a:off x="409575" y="1238250"/>
+            <a:ext cx="11372850" cy="4953000"/>
+          </a:xfrm>
+          <a:prstGeom prst="rect">
+            <a:avLst/>
+          </a:prstGeom>
+          <a:solidFill>
+            <a:srgbClr val="FFFFFF"/>
+          </a:solidFill>
+          <a:ln>
+            <a:noFill/>
+          </a:ln>
+          <a:effectLst/>
+        </p:spPr>
+        <p:style>
+          <a:lnRef idx="1">
+            <a:schemeClr val="accent1"/>
+          </a:lnRef>
+          <a:fillRef idx="3">
+            <a:schemeClr val="accent1"/>
+          </a:fillRef>
+          <a:effectRef idx="0">
+            <a:schemeClr val="accent1"/>
+          </a:effectRef>
+          <a:fontRef idx="minor">
+            <a:schemeClr val="lt1"/>
+          </a:fontRef>
+        </p:style>
+        <p:txBody>
+          <a:bodyPr rtlCol="0" anchor="ctr"/>
+          <a:lstStyle/>
+          <a:p>
+            <a:pPr algn="ctr"/>
+          </a:p>
+        </p:txBody>
+      </p:sp>
+      <p:sp>
+        <p:nvSpPr>
+          <p:cNvPr id="8" name="Body"/>
+          <p:cNvSpPr txBox="1"/>
+          <p:nvPr/>
+        </p:nvSpPr>
+        <p:spPr>
+          <a:xfrm>
+            <a:off x="561975" y="1390650"/>
+            <a:ext cx="11068050" cy="4648200"/>
+          </a:xfrm>
+          <a:prstGeom prst="rect">
+            <a:avLst/>
+          </a:prstGeom>
+          <a:noFill/>
+        </p:spPr>
+        <p:txBody>
+          <a:bodyPr wrap="square" lIns="19050" rIns="19050" tIns="0" bIns="0">
+            <a:spAutoFit/>
+          </a:bodyPr>
+          <a:lstStyle/>
+          <a:p>
+            <a:pPr algn="l">
+              <a:lnSpc>
+                <a:spcPct val="130000"/>
+              </a:lnSpc>
+              <a:spcAft>
+                <a:spcPts val="800"/>
+              </a:spcAft>
+            </a:pPr>
+            <a:r>
+              <a:rPr sz="2200" b="1">
                 <a:solidFill>
                   <a:srgbClr val="080808"/>
                 </a:solidFill>
-                <a:latin typeface="맑은 고딕"/>
-              </a:defRPr>
-            </a:pPr>
-            <a:r>
-              <a:rPr lang="en-US" altLang="ko-KR" sz="2200"/>
-              <a:t>• </a:t>
-            </a:r>
-            <a:r>
-              <a:rPr lang="ko-KR" altLang="en-US" sz="2200"/>
-              <a:t>핵심 메시지
-</a:t>
-            </a:r>
-            <a:r>
-              <a:rPr lang="en-US" altLang="ko-KR" sz="2200"/>
-              <a:t>• </a:t>
-            </a:r>
-            <a:r>
-              <a:rPr lang="ko-KR" altLang="en-US" sz="2200"/>
-              <a:t>근거와 필요한 설명
-</a:t>
-            </a:r>
-            <a:r>
-              <a:rPr lang="en-US" altLang="ko-KR" sz="2200"/>
-              <a:t>• </a:t>
-            </a:r>
-            <a:r>
-              <a:rPr lang="ko-KR" altLang="en-US" sz="2200"/>
-              <a:t>의미가 분명한 짧은 항목
-</a:t>
-            </a:r>
-            <a:r>
-              <a:rPr lang="en-US" altLang="ko-KR" sz="2200"/>
-              <a:t>• </a:t>
-            </a:r>
-            <a:r>
-              <a:rPr lang="ko-KR" altLang="en-US" sz="2200"/>
-              <a:t>보충 내용 또는 다음 단계</a:t>
-            </a:r>
-            <a:endParaRPr sz="2200"/>
+                <a:latin typeface="Pretendard"/>
+                <a:ea typeface="Pretendard"/>
+              </a:rPr>
+              <a:t>• 핵심 메시지</a:t>
+            </a:r>
+            <a:br/>
+            <a:r>
+              <a:rPr sz="2200" b="1">
+                <a:solidFill>
+                  <a:srgbClr val="080808"/>
+                </a:solidFill>
+                <a:latin typeface="Pretendard"/>
+                <a:ea typeface="Pretendard"/>
+              </a:rPr>
+              <a:t>• 근거와 설명</a:t>
+            </a:r>
+            <a:br/>
+            <a:r>
+              <a:rPr sz="2200" b="1">
+                <a:solidFill>
+                  <a:srgbClr val="080808"/>
+                </a:solidFill>
+                <a:latin typeface="Pretendard"/>
+                <a:ea typeface="Pretendard"/>
+              </a:rPr>
+              <a:t>• 비교 결과</a:t>
+            </a:r>
+            <a:br/>
+            <a:r>
+              <a:rPr sz="2200" b="1">
+                <a:solidFill>
+                  <a:srgbClr val="080808"/>
+                </a:solidFill>
+                <a:latin typeface="Pretendard"/>
+                <a:ea typeface="Pretendard"/>
+              </a:rPr>
+              <a:t>• 결론</a:t>
+            </a:r>
           </a:p>
         </p:txBody>
       </p:sp>
@@ -5459,7 +5171,7 @@
 </file>
 
 <file path=ppt/slides/slide5.xml><?xml version="1.0" encoding="utf-8"?>
-<p:sld xmlns:a="http://schemas.openxmlformats.org/drawingml/2006/main" xmlns:r="http://schemas.openxmlformats.org/officeDocument/2006/relationships" xmlns:p="http://schemas.openxmlformats.org/presentationml/2006/main">
+<p:sld xmlns:a="http://schemas.openxmlformats.org/drawingml/2006/main" xmlns:p="http://schemas.openxmlformats.org/presentationml/2006/main" xmlns:r="http://schemas.openxmlformats.org/officeDocument/2006/relationships">
   <p:cSld>
     <p:spTree>
       <p:nvGrpSpPr>
@@ -5467,24 +5179,17 @@
         <p:cNvGrpSpPr/>
         <p:nvPr/>
       </p:nvGrpSpPr>
-      <p:grpSpPr>
-        <a:xfrm>
-          <a:off x="0" y="0"/>
-          <a:ext cx="0" cy="0"/>
-          <a:chOff x="0" y="0"/>
-          <a:chExt cx="0" cy="0"/>
-        </a:xfrm>
-      </p:grpSpPr>
-      <p:sp>
-        <p:nvSpPr>
-          <p:cNvPr id="2" name="Rectangle 1"/>
+      <p:grpSpPr/>
+      <p:sp>
+        <p:nvSpPr>
+          <p:cNvPr id="2" name="Header"/>
           <p:cNvSpPr/>
           <p:nvPr/>
         </p:nvSpPr>
         <p:spPr>
           <a:xfrm>
             <a:off x="0" y="0"/>
-            <a:ext cx="12192000" cy="1193800"/>
+            <a:ext cx="12192000" cy="781050"/>
           </a:xfrm>
           <a:prstGeom prst="rect">
             <a:avLst/>
@@ -5495,6 +5200,13 @@
           <a:ln>
             <a:noFill/>
           </a:ln>
+          <a:effectLst>
+            <a:outerShdw blurRad="38100" dist="19050" dir="5400000" algn="ctr" rotWithShape="0">
+              <a:srgbClr val="000000">
+                <a:alpha val="33000"/>
+              </a:srgbClr>
+            </a:outerShdw>
+          </a:effectLst>
         </p:spPr>
         <p:style>
           <a:lnRef idx="1">
@@ -5503,7 +5215,7 @@
           <a:fillRef idx="3">
             <a:schemeClr val="accent1"/>
           </a:fillRef>
-          <a:effectRef idx="2">
+          <a:effectRef idx="0">
             <a:schemeClr val="accent1"/>
           </a:effectRef>
           <a:fontRef idx="minor">
@@ -5515,20 +5227,19 @@
           <a:lstStyle/>
           <a:p>
             <a:pPr algn="ctr"/>
-            <a:endParaRPr/>
-          </a:p>
-        </p:txBody>
-      </p:sp>
-      <p:sp>
-        <p:nvSpPr>
-          <p:cNvPr id="3" name="TextBox 2"/>
+          </a:p>
+        </p:txBody>
+      </p:sp>
+      <p:sp>
+        <p:nvSpPr>
+          <p:cNvPr id="3" name="Title"/>
           <p:cNvSpPr txBox="1"/>
           <p:nvPr/>
         </p:nvSpPr>
         <p:spPr>
           <a:xfrm>
-            <a:off x="432054" y="432054"/>
-            <a:ext cx="11327892" cy="558800"/>
+            <a:off x="257175" y="38100"/>
+            <a:ext cx="11677650" cy="666750"/>
           </a:xfrm>
           <a:prstGeom prst="rect">
             <a:avLst/>
@@ -5536,8 +5247,8 @@
           <a:noFill/>
         </p:spPr>
         <p:txBody>
-          <a:bodyPr wrap="square" lIns="19050" tIns="0" rIns="19050" bIns="0">
-            <a:noAutofit/>
+          <a:bodyPr wrap="square" lIns="19050" rIns="19050" tIns="0" bIns="0">
+            <a:spAutoFit/>
           </a:bodyPr>
           <a:lstStyle/>
           <a:p>
@@ -5548,39 +5259,30 @@
               <a:spcAft>
                 <a:spcPts val="800"/>
               </a:spcAft>
-              <a:defRPr sz="3000" b="1">
+            </a:pPr>
+            <a:r>
+              <a:rPr sz="3000" b="1">
                 <a:solidFill>
                   <a:srgbClr val="FFFFFF"/>
                 </a:solidFill>
-                <a:latin typeface="맑은 고딕"/>
-              </a:defRPr>
-            </a:pPr>
-            <a:r>
-              <a:rPr lang="en-US" altLang="ko-KR"/>
-              <a:t>[</a:t>
-            </a:r>
-            <a:r>
-              <a:rPr lang="ko-KR" altLang="en-US"/>
-              <a:t>이미지와 설명</a:t>
-            </a:r>
-            <a:r>
-              <a:rPr lang="en-US" altLang="ko-KR"/>
-              <a:t>]</a:t>
-            </a:r>
-            <a:endParaRPr/>
-          </a:p>
-        </p:txBody>
-      </p:sp>
-      <p:sp>
-        <p:nvSpPr>
-          <p:cNvPr id="4" name="TextBox 3"/>
+                <a:latin typeface="Pretendard"/>
+                <a:ea typeface="Pretendard"/>
+              </a:rPr>
+              <a:t>[이미지와 설명]</a:t>
+            </a:r>
+          </a:p>
+        </p:txBody>
+      </p:sp>
+      <p:sp>
+        <p:nvSpPr>
+          <p:cNvPr id="4" name="Page"/>
           <p:cNvSpPr txBox="1"/>
           <p:nvPr/>
         </p:nvSpPr>
         <p:spPr>
           <a:xfrm>
-            <a:off x="432054" y="6197346"/>
-            <a:ext cx="1016000" cy="228600"/>
+            <a:off x="247650" y="6553200"/>
+            <a:ext cx="1016000" cy="279400"/>
           </a:xfrm>
           <a:prstGeom prst="rect">
             <a:avLst/>
@@ -5588,8 +5290,8 @@
           <a:noFill/>
         </p:spPr>
         <p:txBody>
-          <a:bodyPr wrap="square" lIns="19050" tIns="0" rIns="19050" bIns="0">
-            <a:noAutofit/>
+          <a:bodyPr wrap="square" lIns="19050" rIns="19050" tIns="0" bIns="0">
+            <a:spAutoFit/>
           </a:bodyPr>
           <a:lstStyle/>
           <a:p>
@@ -5600,31 +5302,30 @@
               <a:spcAft>
                 <a:spcPts val="800"/>
               </a:spcAft>
-              <a:defRPr sz="1125" b="0">
+            </a:pPr>
+            <a:r>
+              <a:rPr sz="1128" b="1">
                 <a:solidFill>
                   <a:srgbClr val="777777"/>
                 </a:solidFill>
-                <a:latin typeface="맑은 고딕"/>
-              </a:defRPr>
-            </a:pPr>
-            <a:r>
-              <a:rPr lang="en-US" altLang="ko-KR"/>
+                <a:latin typeface="Pretendard"/>
+                <a:ea typeface="Pretendard"/>
+              </a:rPr>
               <a:t>05</a:t>
             </a:r>
-            <a:endParaRPr/>
-          </a:p>
-        </p:txBody>
-      </p:sp>
-      <p:sp>
-        <p:nvSpPr>
-          <p:cNvPr id="5" name="TextBox 4"/>
+          </a:p>
+        </p:txBody>
+      </p:sp>
+      <p:sp>
+        <p:nvSpPr>
+          <p:cNvPr id="5" name="Logo"/>
           <p:cNvSpPr txBox="1"/>
           <p:nvPr/>
         </p:nvSpPr>
         <p:spPr>
           <a:xfrm>
-            <a:off x="10540746" y="6006845"/>
-            <a:ext cx="1219200" cy="419100"/>
+            <a:off x="11163300" y="6413500"/>
+            <a:ext cx="1028700" cy="444500"/>
           </a:xfrm>
           <a:prstGeom prst="rect">
             <a:avLst/>
@@ -5632,8 +5333,8 @@
           <a:noFill/>
         </p:spPr>
         <p:txBody>
-          <a:bodyPr wrap="square" lIns="19050" tIns="0" rIns="19050" bIns="0">
-            <a:noAutofit/>
+          <a:bodyPr wrap="square" lIns="19050" rIns="19050" tIns="0" bIns="0">
+            <a:spAutoFit/>
           </a:bodyPr>
           <a:lstStyle/>
           <a:p>
@@ -5641,33 +5342,80 @@
               <a:lnSpc>
                 <a:spcPct val="130000"/>
               </a:lnSpc>
-              <a:defRPr sz="2250" b="1">
+              <a:spcAft>
+                <a:spcPts val="800"/>
+              </a:spcAft>
+            </a:pPr>
+            <a:r>
+              <a:rPr sz="2258" b="1">
                 <a:solidFill>
                   <a:srgbClr val="BE1551"/>
                 </a:solidFill>
-                <a:latin typeface="Arial"/>
-              </a:defRPr>
+                <a:latin typeface="Pretendard"/>
+                <a:ea typeface="Pretendard"/>
+              </a:rPr>
+              <a:t>CBNU</a:t>
+            </a:r>
+          </a:p>
+        </p:txBody>
+      </p:sp>
+      <p:sp>
+        <p:nvSpPr>
+          <p:cNvPr id="6" name="ImageSlot"/>
+          <p:cNvSpPr txBox="1"/>
+          <p:nvPr/>
+        </p:nvSpPr>
+        <p:spPr>
+          <a:xfrm>
+            <a:off x="342900" y="1238250"/>
+            <a:ext cx="5334000" cy="4857750"/>
+          </a:xfrm>
+          <a:prstGeom prst="rect">
+            <a:avLst/>
+          </a:prstGeom>
+          <a:noFill/>
+        </p:spPr>
+        <p:txBody>
+          <a:bodyPr wrap="square" lIns="19050" rIns="19050" tIns="0" bIns="0">
+            <a:spAutoFit/>
+          </a:bodyPr>
+          <a:lstStyle/>
+          <a:p>
+            <a:pPr algn="ctr">
+              <a:lnSpc>
+                <a:spcPct val="130000"/>
+              </a:lnSpc>
+              <a:spcAft>
+                <a:spcPts val="800"/>
+              </a:spcAft>
             </a:pPr>
             <a:r>
-              <a:t>CBNU</a:t>
-            </a:r>
-          </a:p>
-        </p:txBody>
-      </p:sp>
-      <p:sp>
-        <p:nvSpPr>
-          <p:cNvPr id="7" name="Rounded Rectangle 6"/>
+              <a:rPr sz="1600" b="1">
+                <a:solidFill>
+                  <a:srgbClr val="080808"/>
+                </a:solidFill>
+                <a:latin typeface="Pretendard"/>
+                <a:ea typeface="Pretendard"/>
+              </a:rPr>
+              <a:t>이미지 영역</a:t>
+            </a:r>
+          </a:p>
+        </p:txBody>
+      </p:sp>
+      <p:sp>
+        <p:nvSpPr>
+          <p:cNvPr id="7" name="Panel"/>
           <p:cNvSpPr/>
           <p:nvPr/>
         </p:nvSpPr>
         <p:spPr>
           <a:xfrm>
-            <a:off x="6121400" y="1447800"/>
-            <a:ext cx="5638546" cy="4368800"/>
+            <a:off x="6115050" y="1266825"/>
+            <a:ext cx="5715000" cy="4857750"/>
           </a:xfrm>
           <a:prstGeom prst="roundRect">
             <a:avLst>
-              <a:gd name="adj" fmla="val 5000"/>
+              <a:gd name="adj" fmla="val 6000"/>
             </a:avLst>
           </a:prstGeom>
           <a:solidFill>
@@ -5676,6 +5424,13 @@
           <a:ln>
             <a:noFill/>
           </a:ln>
+          <a:effectLst>
+            <a:outerShdw blurRad="38100" dist="19050" dir="5400000" algn="ctr" rotWithShape="0">
+              <a:srgbClr val="000000">
+                <a:alpha val="33000"/>
+              </a:srgbClr>
+            </a:outerShdw>
+          </a:effectLst>
         </p:spPr>
         <p:style>
           <a:lnRef idx="1">
@@ -5684,7 +5439,7 @@
           <a:fillRef idx="3">
             <a:schemeClr val="accent1"/>
           </a:fillRef>
-          <a:effectRef idx="2">
+          <a:effectRef idx="0">
             <a:schemeClr val="accent1"/>
           </a:effectRef>
           <a:fontRef idx="minor">
@@ -5696,20 +5451,19 @@
           <a:lstStyle/>
           <a:p>
             <a:pPr algn="ctr"/>
-            <a:endParaRPr/>
-          </a:p>
-        </p:txBody>
-      </p:sp>
-      <p:sp>
-        <p:nvSpPr>
-          <p:cNvPr id="8" name="Rectangle 7"/>
+          </a:p>
+        </p:txBody>
+      </p:sp>
+      <p:sp>
+        <p:nvSpPr>
+          <p:cNvPr id="8" name="PanelInterior"/>
           <p:cNvSpPr/>
           <p:nvPr/>
         </p:nvSpPr>
         <p:spPr>
           <a:xfrm>
-            <a:off x="6197600" y="1968500"/>
-            <a:ext cx="5486146" cy="3771900"/>
+            <a:off x="6267450" y="1781175"/>
+            <a:ext cx="5410200" cy="4191000"/>
           </a:xfrm>
           <a:prstGeom prst="rect">
             <a:avLst/>
@@ -5720,6 +5474,7 @@
           <a:ln>
             <a:noFill/>
           </a:ln>
+          <a:effectLst/>
         </p:spPr>
         <p:style>
           <a:lnRef idx="1">
@@ -5728,7 +5483,7 @@
           <a:fillRef idx="3">
             <a:schemeClr val="accent1"/>
           </a:fillRef>
-          <a:effectRef idx="2">
+          <a:effectRef idx="0">
             <a:schemeClr val="accent1"/>
           </a:effectRef>
           <a:fontRef idx="minor">
@@ -5740,20 +5495,19 @@
           <a:lstStyle/>
           <a:p>
             <a:pPr algn="ctr"/>
-            <a:endParaRPr/>
-          </a:p>
-        </p:txBody>
-      </p:sp>
-      <p:sp>
-        <p:nvSpPr>
-          <p:cNvPr id="9" name="TextBox 8"/>
+          </a:p>
+        </p:txBody>
+      </p:sp>
+      <p:sp>
+        <p:nvSpPr>
+          <p:cNvPr id="9" name="PanelTitle"/>
           <p:cNvSpPr txBox="1"/>
           <p:nvPr/>
         </p:nvSpPr>
         <p:spPr>
           <a:xfrm>
-            <a:off x="6324600" y="1549400"/>
-            <a:ext cx="5232146" cy="381000"/>
+            <a:off x="6324600" y="1314450"/>
+            <a:ext cx="5257800" cy="381000"/>
           </a:xfrm>
           <a:prstGeom prst="rect">
             <a:avLst/>
@@ -5761,8 +5515,8 @@
           <a:noFill/>
         </p:spPr>
         <p:txBody>
-          <a:bodyPr wrap="square" lIns="19050" tIns="0" rIns="19050" bIns="0">
-            <a:noAutofit/>
+          <a:bodyPr wrap="square" lIns="19050" rIns="19050" tIns="0" bIns="0">
+            <a:spAutoFit/>
           </a:bodyPr>
           <a:lstStyle/>
           <a:p>
@@ -5773,39 +5527,30 @@
               <a:spcAft>
                 <a:spcPts val="800"/>
               </a:spcAft>
-              <a:defRPr sz="1725" b="1">
+            </a:pPr>
+            <a:r>
+              <a:rPr sz="1730" b="1">
                 <a:solidFill>
                   <a:srgbClr val="FFFFFF"/>
                 </a:solidFill>
-                <a:latin typeface="맑은 고딕"/>
-              </a:defRPr>
-            </a:pPr>
-            <a:r>
-              <a:rPr lang="en-US" altLang="ko-KR"/>
-              <a:t>• [</a:t>
-            </a:r>
-            <a:r>
-              <a:rPr lang="ko-KR" altLang="en-US"/>
-              <a:t>설명 제목</a:t>
-            </a:r>
-            <a:r>
-              <a:rPr lang="en-US" altLang="ko-KR"/>
-              <a:t>]</a:t>
-            </a:r>
-            <a:endParaRPr/>
-          </a:p>
-        </p:txBody>
-      </p:sp>
-      <p:sp>
-        <p:nvSpPr>
-          <p:cNvPr id="10" name="TextBox 9"/>
+                <a:latin typeface="Pretendard"/>
+                <a:ea typeface="Pretendard"/>
+              </a:rPr>
+              <a:t>• [설명 제목]</a:t>
+            </a:r>
+          </a:p>
+        </p:txBody>
+      </p:sp>
+      <p:sp>
+        <p:nvSpPr>
+          <p:cNvPr id="10" name="PanelBody"/>
           <p:cNvSpPr txBox="1"/>
           <p:nvPr/>
         </p:nvSpPr>
         <p:spPr>
           <a:xfrm>
-            <a:off x="6350000" y="2159000"/>
-            <a:ext cx="5206746" cy="3454400"/>
+            <a:off x="6419850" y="1933575"/>
+            <a:ext cx="5105400" cy="3886200"/>
           </a:xfrm>
           <a:prstGeom prst="rect">
             <a:avLst/>
@@ -5813,8 +5558,8 @@
           <a:noFill/>
         </p:spPr>
         <p:txBody>
-          <a:bodyPr wrap="square" lIns="19050" tIns="0" rIns="19050" bIns="0">
-            <a:noAutofit/>
+          <a:bodyPr wrap="square" lIns="19050" rIns="19050" tIns="0" bIns="0">
+            <a:spAutoFit/>
           </a:bodyPr>
           <a:lstStyle/>
           <a:p>
@@ -5825,176 +5570,41 @@
               <a:spcAft>
                 <a:spcPts val="800"/>
               </a:spcAft>
-              <a:defRPr sz="1575" b="1">
+            </a:pPr>
+            <a:r>
+              <a:rPr sz="1572" b="1">
                 <a:solidFill>
                   <a:srgbClr val="080808"/>
                 </a:solidFill>
-                <a:latin typeface="맑은 고딕"/>
-              </a:defRPr>
-            </a:pPr>
-            <a:r>
-              <a:rPr lang="en-US" altLang="ko-KR"/>
-              <a:t>• </a:t>
-            </a:r>
-            <a:r>
-              <a:rPr lang="ko-KR" altLang="en-US"/>
-              <a:t>이미지의 핵심 내용
-</a:t>
-            </a:r>
-            <a:r>
-              <a:rPr lang="en-US" altLang="ko-KR"/>
-              <a:t>• </a:t>
-            </a:r>
-            <a:r>
-              <a:rPr lang="ko-KR" altLang="en-US"/>
-              <a:t>자료에서 확인한 근거
-</a:t>
-            </a:r>
-            <a:r>
-              <a:rPr lang="en-US" altLang="ko-KR"/>
-              <a:t>• </a:t>
-            </a:r>
-            <a:r>
-              <a:rPr lang="ko-KR" altLang="en-US"/>
-              <a:t>필요한 해석과 설명</a:t>
-            </a:r>
-            <a:endParaRPr/>
-          </a:p>
-        </p:txBody>
-      </p:sp>
-      <p:sp>
-        <p:nvSpPr>
-          <p:cNvPr id="11" name="직사각형 10">
-            <a:extLst>
-              <a:ext uri="{FF2B5EF4-FFF2-40B4-BE49-F238E27FC236}">
-                <a16:creationId xmlns:a16="http://schemas.microsoft.com/office/drawing/2014/main" id="{82CF15BA-CE71-7627-DAD4-A2D7261C4697}"/>
-              </a:ext>
-            </a:extLst>
-          </p:cNvPr>
-          <p:cNvSpPr/>
-          <p:nvPr/>
-        </p:nvSpPr>
-        <p:spPr>
-          <a:xfrm>
-            <a:off x="432054" y="1854200"/>
-            <a:ext cx="5334000" cy="3556000"/>
-          </a:xfrm>
-          <a:prstGeom prst="rect">
-            <a:avLst/>
-          </a:prstGeom>
-          <a:gradFill flip="none" rotWithShape="1">
-            <a:gsLst>
-              <a:gs pos="0">
-                <a:srgbClr val="F5F5F5"/>
-              </a:gs>
-              <a:gs pos="100000">
-                <a:schemeClr val="accent1">
-                  <a:tint val="50000"/>
-                  <a:shade val="100000"/>
-                  <a:satMod val="350000"/>
-                </a:schemeClr>
-              </a:gs>
-            </a:gsLst>
-            <a:lin ang="16200000" scaled="0"/>
-            <a:tileRect/>
-          </a:gradFill>
-          <a:ln w="12700">
-            <a:solidFill>
-              <a:srgbClr val="999999"/>
-            </a:solidFill>
-          </a:ln>
-        </p:spPr>
-        <p:style>
-          <a:lnRef idx="1">
-            <a:schemeClr val="accent1"/>
-          </a:lnRef>
-          <a:fillRef idx="3">
-            <a:schemeClr val="accent1"/>
-          </a:fillRef>
-          <a:effectRef idx="2">
-            <a:schemeClr val="accent1"/>
-          </a:effectRef>
-          <a:fontRef idx="minor">
-            <a:schemeClr val="lt1"/>
-          </a:fontRef>
-        </p:style>
-        <p:txBody>
-          <a:bodyPr rtlCol="0" anchor="ctr">
-            <a:noAutofit/>
-          </a:bodyPr>
-          <a:lstStyle/>
-          <a:p>
-            <a:pPr algn="ctr">
-              <a:lnSpc>
-                <a:spcPct val="130000"/>
-              </a:lnSpc>
-            </a:pPr>
-            <a:r>
-              <a:rPr lang="ko-KR" altLang="en-US">
-                <a:solidFill>
-                  <a:srgbClr val="444444"/>
-                </a:solidFill>
-                <a:latin typeface="맑은 고딕" panose="020B0503020000020004" pitchFamily="50" charset="-127"/>
+                <a:latin typeface="Pretendard"/>
+                <a:ea typeface="Pretendard"/>
               </a:rPr>
-              <a:t>이미지 영역</a:t>
-            </a:r>
-          </a:p>
-        </p:txBody>
-      </p:sp>
-      <p:sp>
-        <p:nvSpPr>
-          <p:cNvPr id="12" name="TextBox 11">
-            <a:extLst>
-              <a:ext uri="{FF2B5EF4-FFF2-40B4-BE49-F238E27FC236}">
-                <a16:creationId xmlns:a16="http://schemas.microsoft.com/office/drawing/2014/main" id="{29F02A09-8BA2-2273-24B0-9ACAD79A970F}"/>
-              </a:ext>
-            </a:extLst>
-          </p:cNvPr>
-          <p:cNvSpPr txBox="1"/>
-          <p:nvPr/>
-        </p:nvSpPr>
-        <p:spPr>
-          <a:xfrm>
-            <a:off x="432054" y="5562600"/>
-            <a:ext cx="5334000" cy="317500"/>
-          </a:xfrm>
-          <a:prstGeom prst="rect">
-            <a:avLst/>
-          </a:prstGeom>
-          <a:noFill/>
-        </p:spPr>
-        <p:txBody>
-          <a:bodyPr vert="horz" tIns="0" bIns="0" rtlCol="0">
-            <a:noAutofit/>
-          </a:bodyPr>
-          <a:lstStyle/>
-          <a:p>
-            <a:pPr algn="ctr">
-              <a:lnSpc>
-                <a:spcPct val="130000"/>
-              </a:lnSpc>
-            </a:pPr>
-            <a:r>
-              <a:rPr lang="en-US" altLang="ko-KR" sz="1600">
-                <a:latin typeface="맑은 고딕" panose="020B0503020000020004" pitchFamily="50" charset="-127"/>
+              <a:t>• 이미지의 핵심 내용</a:t>
+            </a:r>
+            <a:br/>
+            <a:br/>
+            <a:r>
+              <a:rPr sz="1572" b="1">
+                <a:solidFill>
+                  <a:srgbClr val="080808"/>
+                </a:solidFill>
+                <a:latin typeface="Pretendard"/>
+                <a:ea typeface="Pretendard"/>
               </a:rPr>
-              <a:t>[</a:t>
-            </a:r>
-            <a:r>
-              <a:rPr lang="ko-KR" altLang="en-US" sz="1600">
-                <a:latin typeface="맑은 고딕" panose="020B0503020000020004" pitchFamily="50" charset="-127"/>
+              <a:t>• 측정 결과</a:t>
+            </a:r>
+            <a:br/>
+            <a:br/>
+            <a:r>
+              <a:rPr sz="1572" b="1">
+                <a:solidFill>
+                  <a:srgbClr val="080808"/>
+                </a:solidFill>
+                <a:latin typeface="Pretendard"/>
+                <a:ea typeface="Pretendard"/>
               </a:rPr>
-              <a:t>이미지 캡션</a:t>
-            </a:r>
-            <a:r>
-              <a:rPr lang="en-US" altLang="ko-KR" sz="1600">
-                <a:latin typeface="맑은 고딕" panose="020B0503020000020004" pitchFamily="50" charset="-127"/>
-              </a:rPr>
-              <a:t>]</a:t>
-            </a:r>
-            <a:endParaRPr lang="ko-KR" altLang="en-US" sz="1600">
-              <a:latin typeface="맑은 고딕" panose="020B0503020000020004" pitchFamily="50" charset="-127"/>
-            </a:endParaRPr>
+              <a:t>• 필요한 해석</a:t>
+            </a:r>
           </a:p>
         </p:txBody>
       </p:sp>
@@ -6007,7 +5617,7 @@
 </file>
 
 <file path=ppt/slides/slide6.xml><?xml version="1.0" encoding="utf-8"?>
-<p:sld xmlns:a="http://schemas.openxmlformats.org/drawingml/2006/main" xmlns:r="http://schemas.openxmlformats.org/officeDocument/2006/relationships" xmlns:p="http://schemas.openxmlformats.org/presentationml/2006/main">
+<p:sld xmlns:a="http://schemas.openxmlformats.org/drawingml/2006/main" xmlns:p="http://schemas.openxmlformats.org/presentationml/2006/main" xmlns:r="http://schemas.openxmlformats.org/officeDocument/2006/relationships">
   <p:cSld>
     <p:spTree>
       <p:nvGrpSpPr>
@@ -6015,24 +5625,17 @@
         <p:cNvGrpSpPr/>
         <p:nvPr/>
       </p:nvGrpSpPr>
-      <p:grpSpPr>
-        <a:xfrm>
-          <a:off x="0" y="0"/>
-          <a:ext cx="0" cy="0"/>
-          <a:chOff x="0" y="0"/>
-          <a:chExt cx="0" cy="0"/>
-        </a:xfrm>
-      </p:grpSpPr>
-      <p:sp>
-        <p:nvSpPr>
-          <p:cNvPr id="2" name="Rectangle 1"/>
+      <p:grpSpPr/>
+      <p:sp>
+        <p:nvSpPr>
+          <p:cNvPr id="2" name="Header"/>
           <p:cNvSpPr/>
           <p:nvPr/>
         </p:nvSpPr>
         <p:spPr>
           <a:xfrm>
             <a:off x="0" y="0"/>
-            <a:ext cx="12192000" cy="1193800"/>
+            <a:ext cx="12192000" cy="781050"/>
           </a:xfrm>
           <a:prstGeom prst="rect">
             <a:avLst/>
@@ -6043,6 +5646,13 @@
           <a:ln>
             <a:noFill/>
           </a:ln>
+          <a:effectLst>
+            <a:outerShdw blurRad="38100" dist="19050" dir="5400000" algn="ctr" rotWithShape="0">
+              <a:srgbClr val="000000">
+                <a:alpha val="33000"/>
+              </a:srgbClr>
+            </a:outerShdw>
+          </a:effectLst>
         </p:spPr>
         <p:style>
           <a:lnRef idx="1">
@@ -6051,7 +5661,7 @@
           <a:fillRef idx="3">
             <a:schemeClr val="accent1"/>
           </a:fillRef>
-          <a:effectRef idx="2">
+          <a:effectRef idx="0">
             <a:schemeClr val="accent1"/>
           </a:effectRef>
           <a:fontRef idx="minor">
@@ -6063,20 +5673,19 @@
           <a:lstStyle/>
           <a:p>
             <a:pPr algn="ctr"/>
-            <a:endParaRPr/>
-          </a:p>
-        </p:txBody>
-      </p:sp>
-      <p:sp>
-        <p:nvSpPr>
-          <p:cNvPr id="3" name="TextBox 2"/>
+          </a:p>
+        </p:txBody>
+      </p:sp>
+      <p:sp>
+        <p:nvSpPr>
+          <p:cNvPr id="3" name="Title"/>
           <p:cNvSpPr txBox="1"/>
           <p:nvPr/>
         </p:nvSpPr>
         <p:spPr>
           <a:xfrm>
-            <a:off x="432054" y="432054"/>
-            <a:ext cx="11327892" cy="558800"/>
+            <a:off x="257175" y="38100"/>
+            <a:ext cx="11677650" cy="666750"/>
           </a:xfrm>
           <a:prstGeom prst="rect">
             <a:avLst/>
@@ -6084,8 +5693,8 @@
           <a:noFill/>
         </p:spPr>
         <p:txBody>
-          <a:bodyPr wrap="square" lIns="19050" tIns="0" rIns="19050" bIns="0">
-            <a:noAutofit/>
+          <a:bodyPr wrap="square" lIns="19050" rIns="19050" tIns="0" bIns="0">
+            <a:spAutoFit/>
           </a:bodyPr>
           <a:lstStyle/>
           <a:p>
@@ -6096,39 +5705,30 @@
               <a:spcAft>
                 <a:spcPts val="800"/>
               </a:spcAft>
-              <a:defRPr sz="3000" b="1">
+            </a:pPr>
+            <a:r>
+              <a:rPr sz="3000" b="1">
                 <a:solidFill>
                   <a:srgbClr val="FFFFFF"/>
                 </a:solidFill>
-                <a:latin typeface="맑은 고딕"/>
-              </a:defRPr>
-            </a:pPr>
-            <a:r>
-              <a:rPr lang="en-US" altLang="ko-KR"/>
-              <a:t>[</a:t>
-            </a:r>
-            <a:r>
-              <a:rPr lang="ko-KR" altLang="en-US"/>
-              <a:t>코드와 설명</a:t>
-            </a:r>
-            <a:r>
-              <a:rPr lang="en-US" altLang="ko-KR"/>
-              <a:t>]</a:t>
-            </a:r>
-            <a:endParaRPr/>
-          </a:p>
-        </p:txBody>
-      </p:sp>
-      <p:sp>
-        <p:nvSpPr>
-          <p:cNvPr id="4" name="TextBox 3"/>
+                <a:latin typeface="Pretendard"/>
+                <a:ea typeface="Pretendard"/>
+              </a:rPr>
+              <a:t>[코드와 설명]</a:t>
+            </a:r>
+          </a:p>
+        </p:txBody>
+      </p:sp>
+      <p:sp>
+        <p:nvSpPr>
+          <p:cNvPr id="4" name="Page"/>
           <p:cNvSpPr txBox="1"/>
           <p:nvPr/>
         </p:nvSpPr>
         <p:spPr>
           <a:xfrm>
-            <a:off x="432054" y="6197346"/>
-            <a:ext cx="1016000" cy="228600"/>
+            <a:off x="247650" y="6553200"/>
+            <a:ext cx="1016000" cy="279400"/>
           </a:xfrm>
           <a:prstGeom prst="rect">
             <a:avLst/>
@@ -6136,8 +5736,8 @@
           <a:noFill/>
         </p:spPr>
         <p:txBody>
-          <a:bodyPr wrap="square" lIns="19050" tIns="0" rIns="19050" bIns="0">
-            <a:noAutofit/>
+          <a:bodyPr wrap="square" lIns="19050" rIns="19050" tIns="0" bIns="0">
+            <a:spAutoFit/>
           </a:bodyPr>
           <a:lstStyle/>
           <a:p>
@@ -6148,31 +5748,30 @@
               <a:spcAft>
                 <a:spcPts val="800"/>
               </a:spcAft>
-              <a:defRPr sz="1125" b="0">
+            </a:pPr>
+            <a:r>
+              <a:rPr sz="1128" b="1">
                 <a:solidFill>
                   <a:srgbClr val="777777"/>
                 </a:solidFill>
-                <a:latin typeface="맑은 고딕"/>
-              </a:defRPr>
-            </a:pPr>
-            <a:r>
-              <a:rPr lang="en-US" altLang="ko-KR"/>
+                <a:latin typeface="Pretendard"/>
+                <a:ea typeface="Pretendard"/>
+              </a:rPr>
               <a:t>06</a:t>
             </a:r>
-            <a:endParaRPr/>
-          </a:p>
-        </p:txBody>
-      </p:sp>
-      <p:sp>
-        <p:nvSpPr>
-          <p:cNvPr id="5" name="TextBox 4"/>
+          </a:p>
+        </p:txBody>
+      </p:sp>
+      <p:sp>
+        <p:nvSpPr>
+          <p:cNvPr id="5" name="Logo"/>
           <p:cNvSpPr txBox="1"/>
           <p:nvPr/>
         </p:nvSpPr>
         <p:spPr>
           <a:xfrm>
-            <a:off x="10540746" y="6006845"/>
-            <a:ext cx="1219200" cy="419100"/>
+            <a:off x="11163300" y="6413500"/>
+            <a:ext cx="1028700" cy="444500"/>
           </a:xfrm>
           <a:prstGeom prst="rect">
             <a:avLst/>
@@ -6180,8 +5779,8 @@
           <a:noFill/>
         </p:spPr>
         <p:txBody>
-          <a:bodyPr wrap="square" lIns="19050" tIns="0" rIns="19050" bIns="0">
-            <a:noAutofit/>
+          <a:bodyPr wrap="square" lIns="19050" rIns="19050" tIns="0" bIns="0">
+            <a:spAutoFit/>
           </a:bodyPr>
           <a:lstStyle/>
           <a:p>
@@ -6189,14 +5788,18 @@
               <a:lnSpc>
                 <a:spcPct val="130000"/>
               </a:lnSpc>
-              <a:defRPr sz="2250" b="1">
+              <a:spcAft>
+                <a:spcPts val="800"/>
+              </a:spcAft>
+            </a:pPr>
+            <a:r>
+              <a:rPr sz="2258" b="1">
                 <a:solidFill>
                   <a:srgbClr val="BE1551"/>
                 </a:solidFill>
-                <a:latin typeface="Arial"/>
-              </a:defRPr>
-            </a:pPr>
-            <a:r>
+                <a:latin typeface="Pretendard"/>
+                <a:ea typeface="Pretendard"/>
+              </a:rPr>
               <a:t>CBNU</a:t>
             </a:r>
           </a:p>
@@ -6204,14 +5807,14 @@
       </p:sp>
       <p:sp>
         <p:nvSpPr>
-          <p:cNvPr id="6" name="Rectangle 5"/>
+          <p:cNvPr id="6" name="CodeBackground"/>
           <p:cNvSpPr/>
           <p:nvPr/>
         </p:nvSpPr>
         <p:spPr>
           <a:xfrm>
-            <a:off x="432054" y="1447800"/>
-            <a:ext cx="5334000" cy="4368800"/>
+            <a:off x="342900" y="1285875"/>
+            <a:ext cx="5334000" cy="4857750"/>
           </a:xfrm>
           <a:prstGeom prst="rect">
             <a:avLst/>
@@ -6222,6 +5825,7 @@
           <a:ln>
             <a:noFill/>
           </a:ln>
+          <a:effectLst/>
         </p:spPr>
         <p:style>
           <a:lnRef idx="1">
@@ -6230,7 +5834,7 @@
           <a:fillRef idx="3">
             <a:schemeClr val="accent1"/>
           </a:fillRef>
-          <a:effectRef idx="2">
+          <a:effectRef idx="0">
             <a:schemeClr val="accent1"/>
           </a:effectRef>
           <a:fontRef idx="minor">
@@ -6242,20 +5846,19 @@
           <a:lstStyle/>
           <a:p>
             <a:pPr algn="ctr"/>
-            <a:endParaRPr/>
-          </a:p>
-        </p:txBody>
-      </p:sp>
-      <p:sp>
-        <p:nvSpPr>
-          <p:cNvPr id="7" name="TextBox 6"/>
+          </a:p>
+        </p:txBody>
+      </p:sp>
+      <p:sp>
+        <p:nvSpPr>
+          <p:cNvPr id="7" name="CodeBody"/>
           <p:cNvSpPr txBox="1"/>
           <p:nvPr/>
         </p:nvSpPr>
         <p:spPr>
           <a:xfrm>
-            <a:off x="584200" y="1701800"/>
-            <a:ext cx="5029200" cy="3860800"/>
+            <a:off x="495300" y="1419225"/>
+            <a:ext cx="5029200" cy="4559300"/>
           </a:xfrm>
           <a:prstGeom prst="rect">
             <a:avLst/>
@@ -6263,8 +5866,8 @@
           <a:noFill/>
         </p:spPr>
         <p:txBody>
-          <a:bodyPr wrap="square" lIns="19050" tIns="0" rIns="19050" bIns="0">
-            <a:noAutofit/>
+          <a:bodyPr wrap="square" lIns="19050" rIns="19050" tIns="0" bIns="0">
+            <a:spAutoFit/>
           </a:bodyPr>
           <a:lstStyle/>
           <a:p>
@@ -6275,57 +5878,45 @@
               <a:spcAft>
                 <a:spcPts val="800"/>
               </a:spcAft>
-              <a:defRPr sz="1125" b="0">
+            </a:pPr>
+            <a:r>
+              <a:rPr sz="1128" b="1">
                 <a:solidFill>
                   <a:srgbClr val="F8F8F2"/>
                 </a:solidFill>
-                <a:latin typeface="Consolas"/>
-              </a:defRPr>
-            </a:pPr>
-            <a:r>
-              <a:rPr lang="en-US" altLang="ko-KR" sz="1600"/>
-              <a:t># </a:t>
-            </a:r>
-            <a:r>
-              <a:rPr lang="ko-KR" altLang="en-US" sz="1600"/>
-              <a:t>핵심 코드를 여기에 입력
-</a:t>
-            </a:r>
-            <a:r>
-              <a:rPr lang="en-US" altLang="ko-KR" sz="1600"/>
-              <a:t># </a:t>
-            </a:r>
-            <a:r>
-              <a:rPr lang="ko-KR" altLang="en-US" sz="1600"/>
-              <a:t>필요한 코드나 수식만 선택
-</a:t>
-            </a:r>
-            <a:r>
-              <a:rPr lang="en-US" altLang="ko-KR" sz="1600"/>
-              <a:t># </a:t>
-            </a:r>
-            <a:r>
-              <a:rPr lang="ko-KR" altLang="en-US" sz="1600"/>
-              <a:t>자세한 설명은 오른쪽에 작성</a:t>
-            </a:r>
-            <a:endParaRPr sz="1600"/>
-          </a:p>
-        </p:txBody>
-      </p:sp>
-      <p:sp>
-        <p:nvSpPr>
-          <p:cNvPr id="8" name="Rounded Rectangle 7"/>
+                <a:latin typeface="Pretendard"/>
+                <a:ea typeface="Pretendard"/>
+              </a:rPr>
+              <a:t># 핵심 코드</a:t>
+            </a:r>
+            <a:br/>
+            <a:r>
+              <a:rPr sz="1128" b="1">
+                <a:solidFill>
+                  <a:srgbClr val="F8F8F2"/>
+                </a:solidFill>
+                <a:latin typeface="Pretendard"/>
+                <a:ea typeface="Pretendard"/>
+              </a:rPr>
+              <a:t># 필요한 부분만 작성</a:t>
+            </a:r>
+          </a:p>
+        </p:txBody>
+      </p:sp>
+      <p:sp>
+        <p:nvSpPr>
+          <p:cNvPr id="8" name="Panel"/>
           <p:cNvSpPr/>
           <p:nvPr/>
         </p:nvSpPr>
         <p:spPr>
           <a:xfrm>
-            <a:off x="6121400" y="1447800"/>
-            <a:ext cx="5638546" cy="4368800"/>
+            <a:off x="6115050" y="1266825"/>
+            <a:ext cx="5715000" cy="4857750"/>
           </a:xfrm>
           <a:prstGeom prst="roundRect">
             <a:avLst>
-              <a:gd name="adj" fmla="val 5000"/>
+              <a:gd name="adj" fmla="val 6000"/>
             </a:avLst>
           </a:prstGeom>
           <a:solidFill>
@@ -6334,6 +5925,13 @@
           <a:ln>
             <a:noFill/>
           </a:ln>
+          <a:effectLst>
+            <a:outerShdw blurRad="38100" dist="19050" dir="5400000" algn="ctr" rotWithShape="0">
+              <a:srgbClr val="000000">
+                <a:alpha val="33000"/>
+              </a:srgbClr>
+            </a:outerShdw>
+          </a:effectLst>
         </p:spPr>
         <p:style>
           <a:lnRef idx="1">
@@ -6342,7 +5940,7 @@
           <a:fillRef idx="3">
             <a:schemeClr val="accent1"/>
           </a:fillRef>
-          <a:effectRef idx="2">
+          <a:effectRef idx="0">
             <a:schemeClr val="accent1"/>
           </a:effectRef>
           <a:fontRef idx="minor">
@@ -6354,20 +5952,19 @@
           <a:lstStyle/>
           <a:p>
             <a:pPr algn="ctr"/>
-            <a:endParaRPr/>
-          </a:p>
-        </p:txBody>
-      </p:sp>
-      <p:sp>
-        <p:nvSpPr>
-          <p:cNvPr id="9" name="Rectangle 8"/>
+          </a:p>
+        </p:txBody>
+      </p:sp>
+      <p:sp>
+        <p:nvSpPr>
+          <p:cNvPr id="9" name="PanelInterior"/>
           <p:cNvSpPr/>
           <p:nvPr/>
         </p:nvSpPr>
         <p:spPr>
           <a:xfrm>
-            <a:off x="6197600" y="1968500"/>
-            <a:ext cx="5486146" cy="3771900"/>
+            <a:off x="6267450" y="1781175"/>
+            <a:ext cx="5410200" cy="4191000"/>
           </a:xfrm>
           <a:prstGeom prst="rect">
             <a:avLst/>
@@ -6378,6 +5975,7 @@
           <a:ln>
             <a:noFill/>
           </a:ln>
+          <a:effectLst/>
         </p:spPr>
         <p:style>
           <a:lnRef idx="1">
@@ -6386,7 +5984,7 @@
           <a:fillRef idx="3">
             <a:schemeClr val="accent1"/>
           </a:fillRef>
-          <a:effectRef idx="2">
+          <a:effectRef idx="0">
             <a:schemeClr val="accent1"/>
           </a:effectRef>
           <a:fontRef idx="minor">
@@ -6398,20 +5996,19 @@
           <a:lstStyle/>
           <a:p>
             <a:pPr algn="ctr"/>
-            <a:endParaRPr/>
-          </a:p>
-        </p:txBody>
-      </p:sp>
-      <p:sp>
-        <p:nvSpPr>
-          <p:cNvPr id="10" name="TextBox 9"/>
+          </a:p>
+        </p:txBody>
+      </p:sp>
+      <p:sp>
+        <p:nvSpPr>
+          <p:cNvPr id="10" name="PanelTitle"/>
           <p:cNvSpPr txBox="1"/>
           <p:nvPr/>
         </p:nvSpPr>
         <p:spPr>
           <a:xfrm>
-            <a:off x="6324600" y="1549400"/>
-            <a:ext cx="5232146" cy="381000"/>
+            <a:off x="6324600" y="1314450"/>
+            <a:ext cx="5257800" cy="381000"/>
           </a:xfrm>
           <a:prstGeom prst="rect">
             <a:avLst/>
@@ -6419,8 +6016,8 @@
           <a:noFill/>
         </p:spPr>
         <p:txBody>
-          <a:bodyPr wrap="square" lIns="19050" tIns="0" rIns="19050" bIns="0">
-            <a:noAutofit/>
+          <a:bodyPr wrap="square" lIns="19050" rIns="19050" tIns="0" bIns="0">
+            <a:spAutoFit/>
           </a:bodyPr>
           <a:lstStyle/>
           <a:p>
@@ -6431,39 +6028,30 @@
               <a:spcAft>
                 <a:spcPts val="800"/>
               </a:spcAft>
-              <a:defRPr sz="1725" b="1">
+            </a:pPr>
+            <a:r>
+              <a:rPr sz="1730" b="1">
                 <a:solidFill>
                   <a:srgbClr val="FFFFFF"/>
                 </a:solidFill>
-                <a:latin typeface="맑은 고딕"/>
-              </a:defRPr>
-            </a:pPr>
-            <a:r>
-              <a:rPr lang="en-US" altLang="ko-KR"/>
-              <a:t>• [</a:t>
-            </a:r>
-            <a:r>
-              <a:rPr lang="ko-KR" altLang="en-US"/>
-              <a:t>코드 설명 제목</a:t>
-            </a:r>
-            <a:r>
-              <a:rPr lang="en-US" altLang="ko-KR"/>
-              <a:t>]</a:t>
-            </a:r>
-            <a:endParaRPr/>
-          </a:p>
-        </p:txBody>
-      </p:sp>
-      <p:sp>
-        <p:nvSpPr>
-          <p:cNvPr id="11" name="TextBox 10"/>
+                <a:latin typeface="Pretendard"/>
+                <a:ea typeface="Pretendard"/>
+              </a:rPr>
+              <a:t>• [코드 설명]</a:t>
+            </a:r>
+          </a:p>
+        </p:txBody>
+      </p:sp>
+      <p:sp>
+        <p:nvSpPr>
+          <p:cNvPr id="11" name="PanelBody"/>
           <p:cNvSpPr txBox="1"/>
           <p:nvPr/>
         </p:nvSpPr>
         <p:spPr>
           <a:xfrm>
-            <a:off x="6350000" y="2159000"/>
-            <a:ext cx="5206746" cy="3454400"/>
+            <a:off x="6419850" y="1933575"/>
+            <a:ext cx="5105400" cy="3886200"/>
           </a:xfrm>
           <a:prstGeom prst="rect">
             <a:avLst/>
@@ -6471,8 +6059,8 @@
           <a:noFill/>
         </p:spPr>
         <p:txBody>
-          <a:bodyPr wrap="square" lIns="19050" tIns="0" rIns="19050" bIns="0">
-            <a:noAutofit/>
+          <a:bodyPr wrap="square" lIns="19050" rIns="19050" tIns="0" bIns="0">
+            <a:spAutoFit/>
           </a:bodyPr>
           <a:lstStyle/>
           <a:p>
@@ -6483,40 +6071,41 @@
               <a:spcAft>
                 <a:spcPts val="800"/>
               </a:spcAft>
-              <a:defRPr sz="1575" b="1">
+            </a:pPr>
+            <a:r>
+              <a:rPr sz="1572" b="1">
                 <a:solidFill>
                   <a:srgbClr val="080808"/>
                 </a:solidFill>
-                <a:latin typeface="맑은 고딕"/>
-              </a:defRPr>
-            </a:pPr>
-            <a:r>
-              <a:rPr lang="en-US" altLang="ko-KR"/>
-              <a:t>• </a:t>
-            </a:r>
-            <a:r>
-              <a:rPr lang="ko-KR" altLang="en-US"/>
-              <a:t>코드의 역할
-</a:t>
-            </a:r>
-            <a:r>
-              <a:rPr lang="en-US" altLang="ko-KR"/>
-              <a:t>• </a:t>
-            </a:r>
-            <a:r>
-              <a:rPr lang="ko-KR" altLang="en-US"/>
-              <a:t>주요 처리 과정
-</a:t>
-            </a:r>
-            <a:r>
-              <a:rPr lang="en-US" altLang="ko-KR"/>
-              <a:t>• </a:t>
-            </a:r>
-            <a:r>
-              <a:rPr lang="ko-KR" altLang="en-US"/>
-              <a:t>핵심 변수나 수식의 의미</a:t>
-            </a:r>
-            <a:endParaRPr/>
+                <a:latin typeface="Pretendard"/>
+                <a:ea typeface="Pretendard"/>
+              </a:rPr>
+              <a:t>• 코드의 역할</a:t>
+            </a:r>
+            <a:br/>
+            <a:br/>
+            <a:r>
+              <a:rPr sz="1572" b="1">
+                <a:solidFill>
+                  <a:srgbClr val="080808"/>
+                </a:solidFill>
+                <a:latin typeface="Pretendard"/>
+                <a:ea typeface="Pretendard"/>
+              </a:rPr>
+              <a:t>• 주요 과정</a:t>
+            </a:r>
+            <a:br/>
+            <a:br/>
+            <a:r>
+              <a:rPr sz="1572" b="1">
+                <a:solidFill>
+                  <a:srgbClr val="080808"/>
+                </a:solidFill>
+                <a:latin typeface="Pretendard"/>
+                <a:ea typeface="Pretendard"/>
+              </a:rPr>
+              <a:t>• 결과 해석</a:t>
+            </a:r>
           </a:p>
         </p:txBody>
       </p:sp>
@@ -6529,7 +6118,7 @@
 </file>
 
 <file path=ppt/slides/slide7.xml><?xml version="1.0" encoding="utf-8"?>
-<p:sld xmlns:a="http://schemas.openxmlformats.org/drawingml/2006/main" xmlns:r="http://schemas.openxmlformats.org/officeDocument/2006/relationships" xmlns:p="http://schemas.openxmlformats.org/presentationml/2006/main">
+<p:sld xmlns:a="http://schemas.openxmlformats.org/drawingml/2006/main" xmlns:p="http://schemas.openxmlformats.org/presentationml/2006/main" xmlns:r="http://schemas.openxmlformats.org/officeDocument/2006/relationships">
   <p:cSld>
     <p:spTree>
       <p:nvGrpSpPr>
@@ -6537,24 +6126,17 @@
         <p:cNvGrpSpPr/>
         <p:nvPr/>
       </p:nvGrpSpPr>
-      <p:grpSpPr>
-        <a:xfrm>
-          <a:off x="0" y="0"/>
-          <a:ext cx="0" cy="0"/>
-          <a:chOff x="0" y="0"/>
-          <a:chExt cx="0" cy="0"/>
-        </a:xfrm>
-      </p:grpSpPr>
-      <p:sp>
-        <p:nvSpPr>
-          <p:cNvPr id="2" name="Rectangle 1"/>
+      <p:grpSpPr/>
+      <p:sp>
+        <p:nvSpPr>
+          <p:cNvPr id="2" name="Header"/>
           <p:cNvSpPr/>
           <p:nvPr/>
         </p:nvSpPr>
         <p:spPr>
           <a:xfrm>
             <a:off x="0" y="0"/>
-            <a:ext cx="12192000" cy="1193800"/>
+            <a:ext cx="12192000" cy="781050"/>
           </a:xfrm>
           <a:prstGeom prst="rect">
             <a:avLst/>
@@ -6565,6 +6147,13 @@
           <a:ln>
             <a:noFill/>
           </a:ln>
+          <a:effectLst>
+            <a:outerShdw blurRad="38100" dist="19050" dir="5400000" algn="ctr" rotWithShape="0">
+              <a:srgbClr val="000000">
+                <a:alpha val="33000"/>
+              </a:srgbClr>
+            </a:outerShdw>
+          </a:effectLst>
         </p:spPr>
         <p:style>
           <a:lnRef idx="1">
@@ -6573,7 +6162,7 @@
           <a:fillRef idx="3">
             <a:schemeClr val="accent1"/>
           </a:fillRef>
-          <a:effectRef idx="2">
+          <a:effectRef idx="0">
             <a:schemeClr val="accent1"/>
           </a:effectRef>
           <a:fontRef idx="minor">
@@ -6585,20 +6174,19 @@
           <a:lstStyle/>
           <a:p>
             <a:pPr algn="ctr"/>
-            <a:endParaRPr/>
-          </a:p>
-        </p:txBody>
-      </p:sp>
-      <p:sp>
-        <p:nvSpPr>
-          <p:cNvPr id="3" name="TextBox 2"/>
+          </a:p>
+        </p:txBody>
+      </p:sp>
+      <p:sp>
+        <p:nvSpPr>
+          <p:cNvPr id="3" name="Title"/>
           <p:cNvSpPr txBox="1"/>
           <p:nvPr/>
         </p:nvSpPr>
         <p:spPr>
           <a:xfrm>
-            <a:off x="432054" y="432054"/>
-            <a:ext cx="11327892" cy="558800"/>
+            <a:off x="257175" y="38100"/>
+            <a:ext cx="11677650" cy="666750"/>
           </a:xfrm>
           <a:prstGeom prst="rect">
             <a:avLst/>
@@ -6606,8 +6194,8 @@
           <a:noFill/>
         </p:spPr>
         <p:txBody>
-          <a:bodyPr wrap="square" lIns="19050" tIns="0" rIns="19050" bIns="0">
-            <a:noAutofit/>
+          <a:bodyPr wrap="square" lIns="19050" rIns="19050" tIns="0" bIns="0">
+            <a:spAutoFit/>
           </a:bodyPr>
           <a:lstStyle/>
           <a:p>
@@ -6618,39 +6206,30 @@
               <a:spcAft>
                 <a:spcPts val="800"/>
               </a:spcAft>
-              <a:defRPr sz="3000" b="1">
+            </a:pPr>
+            <a:r>
+              <a:rPr sz="3000" b="1">
                 <a:solidFill>
                   <a:srgbClr val="FFFFFF"/>
                 </a:solidFill>
-                <a:latin typeface="맑은 고딕"/>
-              </a:defRPr>
-            </a:pPr>
-            <a:r>
-              <a:rPr lang="en-US" altLang="ko-KR"/>
-              <a:t>[</a:t>
-            </a:r>
-            <a:r>
-              <a:rPr lang="ko-KR" altLang="en-US"/>
-              <a:t>표와 설명</a:t>
-            </a:r>
-            <a:r>
-              <a:rPr lang="en-US" altLang="ko-KR"/>
-              <a:t>]</a:t>
-            </a:r>
-            <a:endParaRPr/>
-          </a:p>
-        </p:txBody>
-      </p:sp>
-      <p:sp>
-        <p:nvSpPr>
-          <p:cNvPr id="4" name="TextBox 3"/>
+                <a:latin typeface="Pretendard"/>
+                <a:ea typeface="Pretendard"/>
+              </a:rPr>
+              <a:t>[표와 설명]</a:t>
+            </a:r>
+          </a:p>
+        </p:txBody>
+      </p:sp>
+      <p:sp>
+        <p:nvSpPr>
+          <p:cNvPr id="4" name="Page"/>
           <p:cNvSpPr txBox="1"/>
           <p:nvPr/>
         </p:nvSpPr>
         <p:spPr>
           <a:xfrm>
-            <a:off x="432054" y="6197346"/>
-            <a:ext cx="1016000" cy="228600"/>
+            <a:off x="247650" y="6553200"/>
+            <a:ext cx="1016000" cy="279400"/>
           </a:xfrm>
           <a:prstGeom prst="rect">
             <a:avLst/>
@@ -6658,8 +6237,8 @@
           <a:noFill/>
         </p:spPr>
         <p:txBody>
-          <a:bodyPr wrap="square" lIns="19050" tIns="0" rIns="19050" bIns="0">
-            <a:noAutofit/>
+          <a:bodyPr wrap="square" lIns="19050" rIns="19050" tIns="0" bIns="0">
+            <a:spAutoFit/>
           </a:bodyPr>
           <a:lstStyle/>
           <a:p>
@@ -6670,31 +6249,30 @@
               <a:spcAft>
                 <a:spcPts val="800"/>
               </a:spcAft>
-              <a:defRPr sz="1125" b="0">
+            </a:pPr>
+            <a:r>
+              <a:rPr sz="1128" b="1">
                 <a:solidFill>
                   <a:srgbClr val="777777"/>
                 </a:solidFill>
-                <a:latin typeface="맑은 고딕"/>
-              </a:defRPr>
-            </a:pPr>
-            <a:r>
-              <a:rPr lang="en-US" altLang="ko-KR"/>
+                <a:latin typeface="Pretendard"/>
+                <a:ea typeface="Pretendard"/>
+              </a:rPr>
               <a:t>07</a:t>
             </a:r>
-            <a:endParaRPr/>
-          </a:p>
-        </p:txBody>
-      </p:sp>
-      <p:sp>
-        <p:nvSpPr>
-          <p:cNvPr id="5" name="TextBox 4"/>
+          </a:p>
+        </p:txBody>
+      </p:sp>
+      <p:sp>
+        <p:nvSpPr>
+          <p:cNvPr id="5" name="Logo"/>
           <p:cNvSpPr txBox="1"/>
           <p:nvPr/>
         </p:nvSpPr>
         <p:spPr>
           <a:xfrm>
-            <a:off x="10540746" y="6006845"/>
-            <a:ext cx="1219200" cy="419100"/>
+            <a:off x="11163300" y="6413500"/>
+            <a:ext cx="1028700" cy="444500"/>
           </a:xfrm>
           <a:prstGeom prst="rect">
             <a:avLst/>
@@ -6702,8 +6280,8 @@
           <a:noFill/>
         </p:spPr>
         <p:txBody>
-          <a:bodyPr wrap="square" lIns="19050" tIns="0" rIns="19050" bIns="0">
-            <a:noAutofit/>
+          <a:bodyPr wrap="square" lIns="19050" rIns="19050" tIns="0" bIns="0">
+            <a:spAutoFit/>
           </a:bodyPr>
           <a:lstStyle/>
           <a:p>
@@ -6711,14 +6289,18 @@
               <a:lnSpc>
                 <a:spcPct val="130000"/>
               </a:lnSpc>
-              <a:defRPr sz="2250" b="1">
+              <a:spcAft>
+                <a:spcPts val="800"/>
+              </a:spcAft>
+            </a:pPr>
+            <a:r>
+              <a:rPr sz="2258" b="1">
                 <a:solidFill>
                   <a:srgbClr val="BE1551"/>
                 </a:solidFill>
-                <a:latin typeface="Arial"/>
-              </a:defRPr>
-            </a:pPr>
-            <a:r>
+                <a:latin typeface="Pretendard"/>
+                <a:ea typeface="Pretendard"/>
+              </a:rPr>
               <a:t>CBNU</a:t>
             </a:r>
           </a:p>
@@ -6726,21 +6308,15 @@
       </p:sp>
       <p:graphicFrame>
         <p:nvGraphicFramePr>
-          <p:cNvPr id="6" name="Table 5"/>
+          <p:cNvPr id="6" name="Table"/>
           <p:cNvGraphicFramePr>
             <a:graphicFrameLocks noGrp="1"/>
           </p:cNvGraphicFramePr>
-          <p:nvPr>
-            <p:extLst>
-              <p:ext uri="{D42A27DB-BD31-4B8C-83A1-F6EECF244321}">
-                <p14:modId xmlns:p14="http://schemas.microsoft.com/office/powerpoint/2010/main" val="74819040"/>
-              </p:ext>
-            </p:extLst>
-          </p:nvPr>
+          <p:nvPr/>
         </p:nvGraphicFramePr>
         <p:xfrm>
-          <a:off x="432054" y="1447800"/>
-          <a:ext cx="11327892" cy="2616200"/>
+          <a:off x="476250" y="1162050"/>
+          <a:ext cx="11239500" cy="3028950"/>
         </p:xfrm>
         <a:graphic>
           <a:graphicData uri="http://schemas.openxmlformats.org/drawingml/2006/table">
@@ -6749,88 +6325,37 @@
                 <a:tableStyleId>{5C22544A-7EE6-4342-B048-85BDC9FD1C3A}</a:tableStyleId>
               </a:tblPr>
               <a:tblGrid>
-                <a:gridCol w="1887982">
-                  <a:extLst>
-                    <a:ext uri="{9D8B030D-6E8A-4147-A177-3AD203B41FA5}">
-                      <a16:colId xmlns:a16="http://schemas.microsoft.com/office/drawing/2014/main" val="20000"/>
-                    </a:ext>
-                  </a:extLst>
-                </a:gridCol>
-                <a:gridCol w="1887982">
-                  <a:extLst>
-                    <a:ext uri="{9D8B030D-6E8A-4147-A177-3AD203B41FA5}">
-                      <a16:colId xmlns:a16="http://schemas.microsoft.com/office/drawing/2014/main" val="20001"/>
-                    </a:ext>
-                  </a:extLst>
-                </a:gridCol>
-                <a:gridCol w="1887982">
-                  <a:extLst>
-                    <a:ext uri="{9D8B030D-6E8A-4147-A177-3AD203B41FA5}">
-                      <a16:colId xmlns:a16="http://schemas.microsoft.com/office/drawing/2014/main" val="20002"/>
-                    </a:ext>
-                  </a:extLst>
-                </a:gridCol>
-                <a:gridCol w="1887982">
-                  <a:extLst>
-                    <a:ext uri="{9D8B030D-6E8A-4147-A177-3AD203B41FA5}">
-                      <a16:colId xmlns:a16="http://schemas.microsoft.com/office/drawing/2014/main" val="20003"/>
-                    </a:ext>
-                  </a:extLst>
-                </a:gridCol>
-                <a:gridCol w="1887982">
-                  <a:extLst>
-                    <a:ext uri="{9D8B030D-6E8A-4147-A177-3AD203B41FA5}">
-                      <a16:colId xmlns:a16="http://schemas.microsoft.com/office/drawing/2014/main" val="20004"/>
-                    </a:ext>
-                  </a:extLst>
-                </a:gridCol>
-                <a:gridCol w="1887982">
-                  <a:extLst>
-                    <a:ext uri="{9D8B030D-6E8A-4147-A177-3AD203B41FA5}">
-                      <a16:colId xmlns:a16="http://schemas.microsoft.com/office/drawing/2014/main" val="20005"/>
-                    </a:ext>
-                  </a:extLst>
-                </a:gridCol>
+                <a:gridCol w="3746500"/>
+                <a:gridCol w="3746500"/>
+                <a:gridCol w="3746500"/>
               </a:tblGrid>
-              <a:tr h="436033">
+              <a:tr h="504825">
                 <a:tc>
                   <a:txBody>
-                    <a:bodyPr/>
+                    <a:bodyPr wrap="square" lIns="19050" rIns="19050" tIns="0" bIns="0"/>
                     <a:lstStyle/>
                     <a:p>
-                      <a:pPr marL="0" indent="0" algn="ctr">
+                      <a:pPr algn="ctr">
                         <a:lnSpc>
                           <a:spcPct val="130000"/>
                         </a:lnSpc>
-                        <a:spcBef>
-                          <a:spcPts val="0"/>
-                        </a:spcBef>
                         <a:spcAft>
-                          <a:spcPts val="0"/>
+                          <a:spcPts val="800"/>
                         </a:spcAft>
-                        <a:defRPr sz="1650" b="1">
+                      </a:pPr>
+                      <a:r>
+                        <a:rPr sz="1655" b="1">
                           <a:solidFill>
                             <a:srgbClr val="FFFFFF"/>
                           </a:solidFill>
-                          <a:latin typeface="맑은 고딕"/>
-                        </a:defRPr>
-                      </a:pPr>
-                      <a:r>
-                        <a:rPr lang="en-US" altLang="ko-KR" sz="1650"/>
-                        <a:t>[</a:t>
+                          <a:latin typeface="Pretendard"/>
+                          <a:ea typeface="Pretendard"/>
+                        </a:rPr>
+                        <a:t>[항목]</a:t>
                       </a:r>
-                      <a:r>
-                        <a:rPr lang="ko-KR" altLang="en-US" sz="1650"/>
-                        <a:t>항목</a:t>
-                      </a:r>
-                      <a:r>
-                        <a:rPr lang="en-US" altLang="ko-KR" sz="1650"/>
-                        <a:t>]</a:t>
-                      </a:r>
-                      <a:endParaRPr sz="1650"/>
                     </a:p>
                   </a:txBody>
-                  <a:tcPr anchor="ctr">
+                  <a:tcPr anchor="ctr" marT="45720" marB="45720" marL="91440" marR="91440">
                     <a:solidFill>
                       <a:srgbClr val="1C50B3"/>
                     </a:solidFill>
@@ -6838,42 +6363,30 @@
                 </a:tc>
                 <a:tc>
                   <a:txBody>
-                    <a:bodyPr/>
+                    <a:bodyPr wrap="square" lIns="19050" rIns="19050" tIns="0" bIns="0"/>
                     <a:lstStyle/>
                     <a:p>
-                      <a:pPr marL="0" indent="0" algn="ctr">
+                      <a:pPr algn="ctr">
                         <a:lnSpc>
                           <a:spcPct val="130000"/>
                         </a:lnSpc>
-                        <a:spcBef>
-                          <a:spcPts val="0"/>
-                        </a:spcBef>
                         <a:spcAft>
-                          <a:spcPts val="0"/>
+                          <a:spcPts val="800"/>
                         </a:spcAft>
-                        <a:defRPr sz="1650" b="1">
+                      </a:pPr>
+                      <a:r>
+                        <a:rPr sz="1655" b="1">
                           <a:solidFill>
                             <a:srgbClr val="FFFFFF"/>
                           </a:solidFill>
-                          <a:latin typeface="맑은 고딕"/>
-                        </a:defRPr>
-                      </a:pPr>
-                      <a:r>
-                        <a:rPr lang="en-US" altLang="ko-KR" sz="1650"/>
-                        <a:t>[</a:t>
+                          <a:latin typeface="Pretendard"/>
+                          <a:ea typeface="Pretendard"/>
+                        </a:rPr>
+                        <a:t>[항목]</a:t>
                       </a:r>
-                      <a:r>
-                        <a:rPr lang="ko-KR" altLang="en-US" sz="1650"/>
-                        <a:t>구분 </a:t>
-                      </a:r>
-                      <a:r>
-                        <a:rPr lang="en-US" altLang="ko-KR" sz="1650"/>
-                        <a:t>1]</a:t>
-                      </a:r>
-                      <a:endParaRPr sz="1650"/>
                     </a:p>
                   </a:txBody>
-                  <a:tcPr anchor="ctr">
+                  <a:tcPr anchor="ctr" marT="45720" marB="45720" marL="91440" marR="91440">
                     <a:solidFill>
                       <a:srgbClr val="1C50B3"/>
                     </a:solidFill>
@@ -6881,217 +6394,63 @@
                 </a:tc>
                 <a:tc>
                   <a:txBody>
-                    <a:bodyPr/>
+                    <a:bodyPr wrap="square" lIns="19050" rIns="19050" tIns="0" bIns="0"/>
                     <a:lstStyle/>
                     <a:p>
-                      <a:pPr marL="0" indent="0" algn="ctr">
+                      <a:pPr algn="ctr">
                         <a:lnSpc>
                           <a:spcPct val="130000"/>
                         </a:lnSpc>
-                        <a:spcBef>
-                          <a:spcPts val="0"/>
-                        </a:spcBef>
                         <a:spcAft>
-                          <a:spcPts val="0"/>
+                          <a:spcPts val="800"/>
                         </a:spcAft>
-                        <a:defRPr sz="1650" b="1">
+                      </a:pPr>
+                      <a:r>
+                        <a:rPr sz="1655" b="1">
                           <a:solidFill>
                             <a:srgbClr val="FFFFFF"/>
                           </a:solidFill>
-                          <a:latin typeface="맑은 고딕"/>
-                        </a:defRPr>
-                      </a:pPr>
-                      <a:r>
-                        <a:rPr lang="en-US" altLang="ko-KR" sz="1650"/>
-                        <a:t>[</a:t>
+                          <a:latin typeface="Pretendard"/>
+                          <a:ea typeface="Pretendard"/>
+                        </a:rPr>
+                        <a:t>[항목]</a:t>
                       </a:r>
-                      <a:r>
-                        <a:rPr lang="ko-KR" altLang="en-US" sz="1650"/>
-                        <a:t>구분 </a:t>
-                      </a:r>
-                      <a:r>
-                        <a:rPr lang="en-US" altLang="ko-KR" sz="1650"/>
-                        <a:t>2]</a:t>
-                      </a:r>
-                      <a:endParaRPr sz="1650"/>
                     </a:p>
                   </a:txBody>
-                  <a:tcPr anchor="ctr">
+                  <a:tcPr anchor="ctr" marT="45720" marB="45720" marL="91440" marR="91440">
                     <a:solidFill>
                       <a:srgbClr val="1C50B3"/>
                     </a:solidFill>
                   </a:tcPr>
                 </a:tc>
+              </a:tr>
+              <a:tr h="504825">
                 <a:tc>
                   <a:txBody>
-                    <a:bodyPr/>
+                    <a:bodyPr wrap="square" lIns="19050" rIns="19050" tIns="0" bIns="0"/>
                     <a:lstStyle/>
                     <a:p>
-                      <a:pPr marL="0" indent="0" algn="ctr">
+                      <a:pPr algn="ctr">
                         <a:lnSpc>
                           <a:spcPct val="130000"/>
                         </a:lnSpc>
-                        <a:spcBef>
-                          <a:spcPts val="0"/>
-                        </a:spcBef>
                         <a:spcAft>
-                          <a:spcPts val="0"/>
+                          <a:spcPts val="800"/>
                         </a:spcAft>
-                        <a:defRPr sz="1650" b="1">
-                          <a:solidFill>
-                            <a:srgbClr val="FFFFFF"/>
-                          </a:solidFill>
-                          <a:latin typeface="맑은 고딕"/>
-                        </a:defRPr>
                       </a:pPr>
                       <a:r>
-                        <a:rPr lang="en-US" altLang="ko-KR" sz="1650"/>
-                        <a:t>[</a:t>
-                      </a:r>
-                      <a:r>
-                        <a:rPr lang="ko-KR" altLang="en-US" sz="1650"/>
-                        <a:t>구분 </a:t>
-                      </a:r>
-                      <a:r>
-                        <a:rPr lang="en-US" altLang="ko-KR" sz="1650"/>
-                        <a:t>3]</a:t>
-                      </a:r>
-                      <a:endParaRPr sz="1650"/>
-                    </a:p>
-                  </a:txBody>
-                  <a:tcPr anchor="ctr">
-                    <a:solidFill>
-                      <a:srgbClr val="1C50B3"/>
-                    </a:solidFill>
-                  </a:tcPr>
-                </a:tc>
-                <a:tc>
-                  <a:txBody>
-                    <a:bodyPr/>
-                    <a:lstStyle/>
-                    <a:p>
-                      <a:pPr marL="0" indent="0" algn="ctr">
-                        <a:lnSpc>
-                          <a:spcPct val="130000"/>
-                        </a:lnSpc>
-                        <a:spcBef>
-                          <a:spcPts val="0"/>
-                        </a:spcBef>
-                        <a:spcAft>
-                          <a:spcPts val="0"/>
-                        </a:spcAft>
-                        <a:defRPr sz="1650" b="1">
-                          <a:solidFill>
-                            <a:srgbClr val="FFFFFF"/>
-                          </a:solidFill>
-                          <a:latin typeface="맑은 고딕"/>
-                        </a:defRPr>
-                      </a:pPr>
-                      <a:r>
-                        <a:rPr lang="en-US" altLang="ko-KR" sz="1650"/>
-                        <a:t>[</a:t>
-                      </a:r>
-                      <a:r>
-                        <a:rPr lang="ko-KR" altLang="en-US" sz="1650"/>
-                        <a:t>구분 </a:t>
-                      </a:r>
-                      <a:r>
-                        <a:rPr lang="en-US" altLang="ko-KR" sz="1650"/>
-                        <a:t>4]</a:t>
-                      </a:r>
-                      <a:endParaRPr sz="1650"/>
-                    </a:p>
-                  </a:txBody>
-                  <a:tcPr anchor="ctr">
-                    <a:solidFill>
-                      <a:srgbClr val="1C50B3"/>
-                    </a:solidFill>
-                  </a:tcPr>
-                </a:tc>
-                <a:tc>
-                  <a:txBody>
-                    <a:bodyPr/>
-                    <a:lstStyle/>
-                    <a:p>
-                      <a:pPr marL="0" indent="0" algn="ctr">
-                        <a:lnSpc>
-                          <a:spcPct val="130000"/>
-                        </a:lnSpc>
-                        <a:spcBef>
-                          <a:spcPts val="0"/>
-                        </a:spcBef>
-                        <a:spcAft>
-                          <a:spcPts val="0"/>
-                        </a:spcAft>
-                        <a:defRPr sz="1650" b="1">
-                          <a:solidFill>
-                            <a:srgbClr val="FFFFFF"/>
-                          </a:solidFill>
-                          <a:latin typeface="맑은 고딕"/>
-                        </a:defRPr>
-                      </a:pPr>
-                      <a:r>
-                        <a:rPr lang="en-US" altLang="ko-KR" sz="1650"/>
-                        <a:t>[</a:t>
-                      </a:r>
-                      <a:r>
-                        <a:rPr lang="ko-KR" altLang="en-US" sz="1650"/>
-                        <a:t>구분 </a:t>
-                      </a:r>
-                      <a:r>
-                        <a:rPr lang="en-US" altLang="ko-KR" sz="1650"/>
-                        <a:t>5]</a:t>
-                      </a:r>
-                      <a:endParaRPr sz="1650"/>
-                    </a:p>
-                  </a:txBody>
-                  <a:tcPr anchor="ctr">
-                    <a:solidFill>
-                      <a:srgbClr val="1C50B3"/>
-                    </a:solidFill>
-                  </a:tcPr>
-                </a:tc>
-                <a:extLst>
-                  <a:ext uri="{0D108BD9-81ED-4DB2-BD59-A6C34878D82A}">
-                    <a16:rowId xmlns:a16="http://schemas.microsoft.com/office/drawing/2014/main" val="10000"/>
-                  </a:ext>
-                </a:extLst>
-              </a:tr>
-              <a:tr h="436033">
-                <a:tc>
-                  <a:txBody>
-                    <a:bodyPr/>
-                    <a:lstStyle/>
-                    <a:p>
-                      <a:pPr marL="0" indent="0" algn="ctr">
-                        <a:lnSpc>
-                          <a:spcPct val="130000"/>
-                        </a:lnSpc>
-                        <a:spcBef>
-                          <a:spcPts val="0"/>
-                        </a:spcBef>
-                        <a:spcAft>
-                          <a:spcPts val="0"/>
-                        </a:spcAft>
-                        <a:defRPr sz="1650" b="0">
+                        <a:rPr sz="1655" b="1">
                           <a:solidFill>
                             <a:srgbClr val="080808"/>
                           </a:solidFill>
-                          <a:latin typeface="맑은 고딕"/>
-                        </a:defRPr>
-                      </a:pPr>
-                      <a:r>
-                        <a:rPr lang="ko-KR" altLang="en-US" sz="1650"/>
-                        <a:t>항목 </a:t>
+                          <a:latin typeface="Pretendard"/>
+                          <a:ea typeface="Pretendard"/>
+                        </a:rPr>
+                        <a:t>내용</a:t>
                       </a:r>
-                      <a:r>
-                        <a:rPr lang="en-US" altLang="ko-KR" sz="1650"/>
-                        <a:t>1</a:t>
-                      </a:r>
-                      <a:endParaRPr sz="1650"/>
                     </a:p>
                   </a:txBody>
-                  <a:tcPr anchor="ctr">
+                  <a:tcPr anchor="ctr" marT="45720" marB="45720" marL="91440" marR="91440">
                     <a:solidFill>
                       <a:srgbClr val="FFFFFF"/>
                     </a:solidFill>
@@ -7099,34 +6458,30 @@
                 </a:tc>
                 <a:tc>
                   <a:txBody>
-                    <a:bodyPr/>
+                    <a:bodyPr wrap="square" lIns="19050" rIns="19050" tIns="0" bIns="0"/>
                     <a:lstStyle/>
                     <a:p>
-                      <a:pPr marL="0" indent="0" algn="ctr">
+                      <a:pPr algn="ctr">
                         <a:lnSpc>
                           <a:spcPct val="130000"/>
                         </a:lnSpc>
-                        <a:spcBef>
-                          <a:spcPts val="0"/>
-                        </a:spcBef>
                         <a:spcAft>
-                          <a:spcPts val="0"/>
+                          <a:spcPts val="800"/>
                         </a:spcAft>
-                        <a:defRPr sz="1650" b="0">
+                      </a:pPr>
+                      <a:r>
+                        <a:rPr sz="1655" b="1">
                           <a:solidFill>
                             <a:srgbClr val="080808"/>
                           </a:solidFill>
-                          <a:latin typeface="맑은 고딕"/>
-                        </a:defRPr>
-                      </a:pPr>
-                      <a:r>
-                        <a:rPr lang="ko-KR" altLang="en-US" sz="1650"/>
+                          <a:latin typeface="Pretendard"/>
+                          <a:ea typeface="Pretendard"/>
+                        </a:rPr>
                         <a:t>내용</a:t>
                       </a:r>
-                      <a:endParaRPr sz="1650"/>
                     </a:p>
                   </a:txBody>
-                  <a:tcPr anchor="ctr">
+                  <a:tcPr anchor="ctr" marT="45720" marB="45720" marL="91440" marR="91440">
                     <a:solidFill>
                       <a:srgbClr val="FFFFFF"/>
                     </a:solidFill>
@@ -7134,34 +6489,158 @@
                 </a:tc>
                 <a:tc>
                   <a:txBody>
-                    <a:bodyPr/>
+                    <a:bodyPr wrap="square" lIns="19050" rIns="19050" tIns="0" bIns="0"/>
                     <a:lstStyle/>
                     <a:p>
-                      <a:pPr marL="0" indent="0" algn="ctr">
+                      <a:pPr algn="ctr">
                         <a:lnSpc>
                           <a:spcPct val="130000"/>
                         </a:lnSpc>
-                        <a:spcBef>
-                          <a:spcPts val="0"/>
-                        </a:spcBef>
                         <a:spcAft>
-                          <a:spcPts val="0"/>
+                          <a:spcPts val="800"/>
                         </a:spcAft>
-                        <a:defRPr sz="1650" b="0">
+                      </a:pPr>
+                      <a:r>
+                        <a:rPr sz="1655" b="1">
                           <a:solidFill>
                             <a:srgbClr val="080808"/>
                           </a:solidFill>
-                          <a:latin typeface="맑은 고딕"/>
-                        </a:defRPr>
+                          <a:latin typeface="Pretendard"/>
+                          <a:ea typeface="Pretendard"/>
+                        </a:rPr>
+                        <a:t>내용</a:t>
+                      </a:r>
+                    </a:p>
+                  </a:txBody>
+                  <a:tcPr anchor="ctr" marT="45720" marB="45720" marL="91440" marR="91440">
+                    <a:solidFill>
+                      <a:srgbClr val="FFFFFF"/>
+                    </a:solidFill>
+                  </a:tcPr>
+                </a:tc>
+              </a:tr>
+              <a:tr h="504825">
+                <a:tc>
+                  <a:txBody>
+                    <a:bodyPr wrap="square" lIns="19050" rIns="19050" tIns="0" bIns="0"/>
+                    <a:lstStyle/>
+                    <a:p>
+                      <a:pPr algn="ctr">
+                        <a:lnSpc>
+                          <a:spcPct val="130000"/>
+                        </a:lnSpc>
+                        <a:spcAft>
+                          <a:spcPts val="800"/>
+                        </a:spcAft>
                       </a:pPr>
                       <a:r>
-                        <a:rPr lang="ko-KR" altLang="en-US" sz="1650"/>
+                        <a:rPr sz="1655" b="1">
+                          <a:solidFill>
+                            <a:srgbClr val="080808"/>
+                          </a:solidFill>
+                          <a:latin typeface="Pretendard"/>
+                          <a:ea typeface="Pretendard"/>
+                        </a:rPr>
                         <a:t>내용</a:t>
                       </a:r>
-                      <a:endParaRPr sz="1650"/>
                     </a:p>
                   </a:txBody>
-                  <a:tcPr anchor="ctr">
+                  <a:tcPr anchor="ctr" marT="45720" marB="45720" marL="91440" marR="91440">
+                    <a:solidFill>
+                      <a:srgbClr val="EEF3FB"/>
+                    </a:solidFill>
+                  </a:tcPr>
+                </a:tc>
+                <a:tc>
+                  <a:txBody>
+                    <a:bodyPr wrap="square" lIns="19050" rIns="19050" tIns="0" bIns="0"/>
+                    <a:lstStyle/>
+                    <a:p>
+                      <a:pPr algn="ctr">
+                        <a:lnSpc>
+                          <a:spcPct val="130000"/>
+                        </a:lnSpc>
+                        <a:spcAft>
+                          <a:spcPts val="800"/>
+                        </a:spcAft>
+                      </a:pPr>
+                      <a:r>
+                        <a:rPr sz="1655" b="1">
+                          <a:solidFill>
+                            <a:srgbClr val="080808"/>
+                          </a:solidFill>
+                          <a:latin typeface="Pretendard"/>
+                          <a:ea typeface="Pretendard"/>
+                        </a:rPr>
+                        <a:t>내용</a:t>
+                      </a:r>
+                    </a:p>
+                  </a:txBody>
+                  <a:tcPr anchor="ctr" marT="45720" marB="45720" marL="91440" marR="91440">
+                    <a:solidFill>
+                      <a:srgbClr val="EEF3FB"/>
+                    </a:solidFill>
+                  </a:tcPr>
+                </a:tc>
+                <a:tc>
+                  <a:txBody>
+                    <a:bodyPr wrap="square" lIns="19050" rIns="19050" tIns="0" bIns="0"/>
+                    <a:lstStyle/>
+                    <a:p>
+                      <a:pPr algn="ctr">
+                        <a:lnSpc>
+                          <a:spcPct val="130000"/>
+                        </a:lnSpc>
+                        <a:spcAft>
+                          <a:spcPts val="800"/>
+                        </a:spcAft>
+                      </a:pPr>
+                      <a:r>
+                        <a:rPr sz="1655" b="1">
+                          <a:solidFill>
+                            <a:srgbClr val="080808"/>
+                          </a:solidFill>
+                          <a:latin typeface="Pretendard"/>
+                          <a:ea typeface="Pretendard"/>
+                        </a:rPr>
+                        <a:t>내용</a:t>
+                      </a:r>
+                    </a:p>
+                  </a:txBody>
+                  <a:tcPr anchor="ctr" marT="45720" marB="45720" marL="91440" marR="91440">
+                    <a:solidFill>
+                      <a:srgbClr val="EEF3FB"/>
+                    </a:solidFill>
+                  </a:tcPr>
+                </a:tc>
+              </a:tr>
+              <a:tr h="504825">
+                <a:tc>
+                  <a:txBody>
+                    <a:bodyPr wrap="square" lIns="19050" rIns="19050" tIns="0" bIns="0"/>
+                    <a:lstStyle/>
+                    <a:p>
+                      <a:pPr algn="ctr">
+                        <a:lnSpc>
+                          <a:spcPct val="130000"/>
+                        </a:lnSpc>
+                        <a:spcAft>
+                          <a:spcPts val="800"/>
+                        </a:spcAft>
+                      </a:pPr>
+                      <a:r>
+                        <a:rPr sz="1655" b="1">
+                          <a:solidFill>
+                            <a:srgbClr val="080808"/>
+                          </a:solidFill>
+                          <a:latin typeface="Pretendard"/>
+                          <a:ea typeface="Pretendard"/>
+                        </a:rPr>
+                        <a:t>내용</a:t>
+                      </a:r>
+                    </a:p>
+                  </a:txBody>
+                  <a:tcPr anchor="ctr" marT="45720" marB="45720" marL="91440" marR="91440">
                     <a:solidFill>
                       <a:srgbClr val="FFFFFF"/>
                     </a:solidFill>
@@ -7169,34 +6648,30 @@
                 </a:tc>
                 <a:tc>
                   <a:txBody>
-                    <a:bodyPr/>
+                    <a:bodyPr wrap="square" lIns="19050" rIns="19050" tIns="0" bIns="0"/>
                     <a:lstStyle/>
                     <a:p>
-                      <a:pPr marL="0" indent="0" algn="ctr">
+                      <a:pPr algn="ctr">
                         <a:lnSpc>
                           <a:spcPct val="130000"/>
                         </a:lnSpc>
-                        <a:spcBef>
-                          <a:spcPts val="0"/>
-                        </a:spcBef>
                         <a:spcAft>
-                          <a:spcPts val="0"/>
+                          <a:spcPts val="800"/>
                         </a:spcAft>
-                        <a:defRPr sz="1650" b="0">
+                      </a:pPr>
+                      <a:r>
+                        <a:rPr sz="1655" b="1">
                           <a:solidFill>
                             <a:srgbClr val="080808"/>
                           </a:solidFill>
-                          <a:latin typeface="맑은 고딕"/>
-                        </a:defRPr>
-                      </a:pPr>
-                      <a:r>
-                        <a:rPr lang="ko-KR" altLang="en-US" sz="1650"/>
+                          <a:latin typeface="Pretendard"/>
+                          <a:ea typeface="Pretendard"/>
+                        </a:rPr>
                         <a:t>내용</a:t>
                       </a:r>
-                      <a:endParaRPr sz="1650"/>
                     </a:p>
                   </a:txBody>
-                  <a:tcPr anchor="ctr">
+                  <a:tcPr anchor="ctr" marT="45720" marB="45720" marL="91440" marR="91440">
                     <a:solidFill>
                       <a:srgbClr val="FFFFFF"/>
                     </a:solidFill>
@@ -7204,34 +6679,158 @@
                 </a:tc>
                 <a:tc>
                   <a:txBody>
-                    <a:bodyPr/>
+                    <a:bodyPr wrap="square" lIns="19050" rIns="19050" tIns="0" bIns="0"/>
                     <a:lstStyle/>
                     <a:p>
-                      <a:pPr marL="0" indent="0" algn="ctr">
+                      <a:pPr algn="ctr">
                         <a:lnSpc>
                           <a:spcPct val="130000"/>
                         </a:lnSpc>
-                        <a:spcBef>
-                          <a:spcPts val="0"/>
-                        </a:spcBef>
                         <a:spcAft>
-                          <a:spcPts val="0"/>
+                          <a:spcPts val="800"/>
                         </a:spcAft>
-                        <a:defRPr sz="1650" b="0">
+                      </a:pPr>
+                      <a:r>
+                        <a:rPr sz="1655" b="1">
                           <a:solidFill>
                             <a:srgbClr val="080808"/>
                           </a:solidFill>
-                          <a:latin typeface="맑은 고딕"/>
-                        </a:defRPr>
+                          <a:latin typeface="Pretendard"/>
+                          <a:ea typeface="Pretendard"/>
+                        </a:rPr>
+                        <a:t>내용</a:t>
+                      </a:r>
+                    </a:p>
+                  </a:txBody>
+                  <a:tcPr anchor="ctr" marT="45720" marB="45720" marL="91440" marR="91440">
+                    <a:solidFill>
+                      <a:srgbClr val="FFFFFF"/>
+                    </a:solidFill>
+                  </a:tcPr>
+                </a:tc>
+              </a:tr>
+              <a:tr h="504825">
+                <a:tc>
+                  <a:txBody>
+                    <a:bodyPr wrap="square" lIns="19050" rIns="19050" tIns="0" bIns="0"/>
+                    <a:lstStyle/>
+                    <a:p>
+                      <a:pPr algn="ctr">
+                        <a:lnSpc>
+                          <a:spcPct val="130000"/>
+                        </a:lnSpc>
+                        <a:spcAft>
+                          <a:spcPts val="800"/>
+                        </a:spcAft>
                       </a:pPr>
                       <a:r>
-                        <a:rPr lang="ko-KR" altLang="en-US" sz="1650"/>
+                        <a:rPr sz="1655" b="1">
+                          <a:solidFill>
+                            <a:srgbClr val="080808"/>
+                          </a:solidFill>
+                          <a:latin typeface="Pretendard"/>
+                          <a:ea typeface="Pretendard"/>
+                        </a:rPr>
                         <a:t>내용</a:t>
                       </a:r>
-                      <a:endParaRPr sz="1650"/>
                     </a:p>
                   </a:txBody>
-                  <a:tcPr anchor="ctr">
+                  <a:tcPr anchor="ctr" marT="45720" marB="45720" marL="91440" marR="91440">
+                    <a:solidFill>
+                      <a:srgbClr val="EEF3FB"/>
+                    </a:solidFill>
+                  </a:tcPr>
+                </a:tc>
+                <a:tc>
+                  <a:txBody>
+                    <a:bodyPr wrap="square" lIns="19050" rIns="19050" tIns="0" bIns="0"/>
+                    <a:lstStyle/>
+                    <a:p>
+                      <a:pPr algn="ctr">
+                        <a:lnSpc>
+                          <a:spcPct val="130000"/>
+                        </a:lnSpc>
+                        <a:spcAft>
+                          <a:spcPts val="800"/>
+                        </a:spcAft>
+                      </a:pPr>
+                      <a:r>
+                        <a:rPr sz="1655" b="1">
+                          <a:solidFill>
+                            <a:srgbClr val="080808"/>
+                          </a:solidFill>
+                          <a:latin typeface="Pretendard"/>
+                          <a:ea typeface="Pretendard"/>
+                        </a:rPr>
+                        <a:t>내용</a:t>
+                      </a:r>
+                    </a:p>
+                  </a:txBody>
+                  <a:tcPr anchor="ctr" marT="45720" marB="45720" marL="91440" marR="91440">
+                    <a:solidFill>
+                      <a:srgbClr val="EEF3FB"/>
+                    </a:solidFill>
+                  </a:tcPr>
+                </a:tc>
+                <a:tc>
+                  <a:txBody>
+                    <a:bodyPr wrap="square" lIns="19050" rIns="19050" tIns="0" bIns="0"/>
+                    <a:lstStyle/>
+                    <a:p>
+                      <a:pPr algn="ctr">
+                        <a:lnSpc>
+                          <a:spcPct val="130000"/>
+                        </a:lnSpc>
+                        <a:spcAft>
+                          <a:spcPts val="800"/>
+                        </a:spcAft>
+                      </a:pPr>
+                      <a:r>
+                        <a:rPr sz="1655" b="1">
+                          <a:solidFill>
+                            <a:srgbClr val="080808"/>
+                          </a:solidFill>
+                          <a:latin typeface="Pretendard"/>
+                          <a:ea typeface="Pretendard"/>
+                        </a:rPr>
+                        <a:t>내용</a:t>
+                      </a:r>
+                    </a:p>
+                  </a:txBody>
+                  <a:tcPr anchor="ctr" marT="45720" marB="45720" marL="91440" marR="91440">
+                    <a:solidFill>
+                      <a:srgbClr val="EEF3FB"/>
+                    </a:solidFill>
+                  </a:tcPr>
+                </a:tc>
+              </a:tr>
+              <a:tr h="504825">
+                <a:tc>
+                  <a:txBody>
+                    <a:bodyPr wrap="square" lIns="19050" rIns="19050" tIns="0" bIns="0"/>
+                    <a:lstStyle/>
+                    <a:p>
+                      <a:pPr algn="ctr">
+                        <a:lnSpc>
+                          <a:spcPct val="130000"/>
+                        </a:lnSpc>
+                        <a:spcAft>
+                          <a:spcPts val="800"/>
+                        </a:spcAft>
+                      </a:pPr>
+                      <a:r>
+                        <a:rPr sz="1655" b="1">
+                          <a:solidFill>
+                            <a:srgbClr val="080808"/>
+                          </a:solidFill>
+                          <a:latin typeface="Pretendard"/>
+                          <a:ea typeface="Pretendard"/>
+                        </a:rPr>
+                        <a:t>내용</a:t>
+                      </a:r>
+                    </a:p>
+                  </a:txBody>
+                  <a:tcPr anchor="ctr" marT="45720" marB="45720" marL="91440" marR="91440">
                     <a:solidFill>
                       <a:srgbClr val="FFFFFF"/>
                     </a:solidFill>
@@ -7239,301 +6838,30 @@
                 </a:tc>
                 <a:tc>
                   <a:txBody>
-                    <a:bodyPr/>
+                    <a:bodyPr wrap="square" lIns="19050" rIns="19050" tIns="0" bIns="0"/>
                     <a:lstStyle/>
                     <a:p>
-                      <a:pPr marL="0" indent="0" algn="ctr">
+                      <a:pPr algn="ctr">
                         <a:lnSpc>
                           <a:spcPct val="130000"/>
                         </a:lnSpc>
-                        <a:spcBef>
-                          <a:spcPts val="0"/>
-                        </a:spcBef>
                         <a:spcAft>
-                          <a:spcPts val="0"/>
+                          <a:spcPts val="800"/>
                         </a:spcAft>
-                        <a:defRPr sz="1650" b="0">
+                      </a:pPr>
+                      <a:r>
+                        <a:rPr sz="1655" b="1">
                           <a:solidFill>
                             <a:srgbClr val="080808"/>
                           </a:solidFill>
-                          <a:latin typeface="맑은 고딕"/>
-                        </a:defRPr>
-                      </a:pPr>
-                      <a:r>
-                        <a:rPr lang="ko-KR" altLang="en-US" sz="1650"/>
+                          <a:latin typeface="Pretendard"/>
+                          <a:ea typeface="Pretendard"/>
+                        </a:rPr>
                         <a:t>내용</a:t>
                       </a:r>
-                      <a:endParaRPr sz="1650"/>
                     </a:p>
                   </a:txBody>
-                  <a:tcPr anchor="ctr">
-                    <a:solidFill>
-                      <a:srgbClr val="FFFFFF"/>
-                    </a:solidFill>
-                  </a:tcPr>
-                </a:tc>
-                <a:extLst>
-                  <a:ext uri="{0D108BD9-81ED-4DB2-BD59-A6C34878D82A}">
-                    <a16:rowId xmlns:a16="http://schemas.microsoft.com/office/drawing/2014/main" val="10001"/>
-                  </a:ext>
-                </a:extLst>
-              </a:tr>
-              <a:tr h="436033">
-                <a:tc>
-                  <a:txBody>
-                    <a:bodyPr/>
-                    <a:lstStyle/>
-                    <a:p>
-                      <a:pPr marL="0" indent="0" algn="ctr">
-                        <a:lnSpc>
-                          <a:spcPct val="130000"/>
-                        </a:lnSpc>
-                        <a:spcBef>
-                          <a:spcPts val="0"/>
-                        </a:spcBef>
-                        <a:spcAft>
-                          <a:spcPts val="0"/>
-                        </a:spcAft>
-                        <a:defRPr sz="1650" b="0">
-                          <a:solidFill>
-                            <a:srgbClr val="080808"/>
-                          </a:solidFill>
-                          <a:latin typeface="맑은 고딕"/>
-                        </a:defRPr>
-                      </a:pPr>
-                      <a:r>
-                        <a:rPr lang="ko-KR" altLang="en-US" sz="1650"/>
-                        <a:t>항목 </a:t>
-                      </a:r>
-                      <a:r>
-                        <a:rPr lang="en-US" altLang="ko-KR" sz="1650"/>
-                        <a:t>2</a:t>
-                      </a:r>
-                      <a:endParaRPr sz="1650"/>
-                    </a:p>
-                  </a:txBody>
-                  <a:tcPr anchor="ctr">
-                    <a:solidFill>
-                      <a:srgbClr val="EEF3FB"/>
-                    </a:solidFill>
-                  </a:tcPr>
-                </a:tc>
-                <a:tc>
-                  <a:txBody>
-                    <a:bodyPr/>
-                    <a:lstStyle/>
-                    <a:p>
-                      <a:pPr marL="0" indent="0" algn="ctr">
-                        <a:lnSpc>
-                          <a:spcPct val="130000"/>
-                        </a:lnSpc>
-                        <a:spcBef>
-                          <a:spcPts val="0"/>
-                        </a:spcBef>
-                        <a:spcAft>
-                          <a:spcPts val="0"/>
-                        </a:spcAft>
-                        <a:defRPr sz="1650" b="0">
-                          <a:solidFill>
-                            <a:srgbClr val="080808"/>
-                          </a:solidFill>
-                          <a:latin typeface="맑은 고딕"/>
-                        </a:defRPr>
-                      </a:pPr>
-                      <a:r>
-                        <a:rPr lang="ko-KR" altLang="en-US" sz="1650"/>
-                        <a:t>내용</a:t>
-                      </a:r>
-                      <a:endParaRPr sz="1650"/>
-                    </a:p>
-                  </a:txBody>
-                  <a:tcPr anchor="ctr">
-                    <a:solidFill>
-                      <a:srgbClr val="EEF3FB"/>
-                    </a:solidFill>
-                  </a:tcPr>
-                </a:tc>
-                <a:tc>
-                  <a:txBody>
-                    <a:bodyPr/>
-                    <a:lstStyle/>
-                    <a:p>
-                      <a:pPr marL="0" indent="0" algn="ctr">
-                        <a:lnSpc>
-                          <a:spcPct val="130000"/>
-                        </a:lnSpc>
-                        <a:spcBef>
-                          <a:spcPts val="0"/>
-                        </a:spcBef>
-                        <a:spcAft>
-                          <a:spcPts val="0"/>
-                        </a:spcAft>
-                        <a:defRPr sz="1650" b="0">
-                          <a:solidFill>
-                            <a:srgbClr val="080808"/>
-                          </a:solidFill>
-                          <a:latin typeface="맑은 고딕"/>
-                        </a:defRPr>
-                      </a:pPr>
-                      <a:r>
-                        <a:rPr lang="ko-KR" altLang="en-US" sz="1650"/>
-                        <a:t>내용</a:t>
-                      </a:r>
-                      <a:endParaRPr sz="1650"/>
-                    </a:p>
-                  </a:txBody>
-                  <a:tcPr anchor="ctr">
-                    <a:solidFill>
-                      <a:srgbClr val="EEF3FB"/>
-                    </a:solidFill>
-                  </a:tcPr>
-                </a:tc>
-                <a:tc>
-                  <a:txBody>
-                    <a:bodyPr/>
-                    <a:lstStyle/>
-                    <a:p>
-                      <a:pPr marL="0" indent="0" algn="ctr">
-                        <a:lnSpc>
-                          <a:spcPct val="130000"/>
-                        </a:lnSpc>
-                        <a:spcBef>
-                          <a:spcPts val="0"/>
-                        </a:spcBef>
-                        <a:spcAft>
-                          <a:spcPts val="0"/>
-                        </a:spcAft>
-                        <a:defRPr sz="1650" b="0">
-                          <a:solidFill>
-                            <a:srgbClr val="080808"/>
-                          </a:solidFill>
-                          <a:latin typeface="맑은 고딕"/>
-                        </a:defRPr>
-                      </a:pPr>
-                      <a:r>
-                        <a:rPr lang="ko-KR" altLang="en-US" sz="1650"/>
-                        <a:t>내용</a:t>
-                      </a:r>
-                      <a:endParaRPr sz="1650"/>
-                    </a:p>
-                  </a:txBody>
-                  <a:tcPr anchor="ctr">
-                    <a:solidFill>
-                      <a:srgbClr val="EEF3FB"/>
-                    </a:solidFill>
-                  </a:tcPr>
-                </a:tc>
-                <a:tc>
-                  <a:txBody>
-                    <a:bodyPr/>
-                    <a:lstStyle/>
-                    <a:p>
-                      <a:pPr marL="0" indent="0" algn="ctr">
-                        <a:lnSpc>
-                          <a:spcPct val="130000"/>
-                        </a:lnSpc>
-                        <a:spcBef>
-                          <a:spcPts val="0"/>
-                        </a:spcBef>
-                        <a:spcAft>
-                          <a:spcPts val="0"/>
-                        </a:spcAft>
-                        <a:defRPr sz="1650" b="0">
-                          <a:solidFill>
-                            <a:srgbClr val="080808"/>
-                          </a:solidFill>
-                          <a:latin typeface="맑은 고딕"/>
-                        </a:defRPr>
-                      </a:pPr>
-                      <a:r>
-                        <a:rPr lang="ko-KR" altLang="en-US" sz="1650"/>
-                        <a:t>내용</a:t>
-                      </a:r>
-                      <a:endParaRPr sz="1650"/>
-                    </a:p>
-                  </a:txBody>
-                  <a:tcPr anchor="ctr">
-                    <a:solidFill>
-                      <a:srgbClr val="EEF3FB"/>
-                    </a:solidFill>
-                  </a:tcPr>
-                </a:tc>
-                <a:tc>
-                  <a:txBody>
-                    <a:bodyPr/>
-                    <a:lstStyle/>
-                    <a:p>
-                      <a:pPr marL="0" indent="0" algn="ctr">
-                        <a:lnSpc>
-                          <a:spcPct val="130000"/>
-                        </a:lnSpc>
-                        <a:spcBef>
-                          <a:spcPts val="0"/>
-                        </a:spcBef>
-                        <a:spcAft>
-                          <a:spcPts val="0"/>
-                        </a:spcAft>
-                        <a:defRPr sz="1650" b="0">
-                          <a:solidFill>
-                            <a:srgbClr val="080808"/>
-                          </a:solidFill>
-                          <a:latin typeface="맑은 고딕"/>
-                        </a:defRPr>
-                      </a:pPr>
-                      <a:r>
-                        <a:rPr lang="ko-KR" altLang="en-US" sz="1650"/>
-                        <a:t>내용</a:t>
-                      </a:r>
-                      <a:endParaRPr sz="1650"/>
-                    </a:p>
-                  </a:txBody>
-                  <a:tcPr anchor="ctr">
-                    <a:solidFill>
-                      <a:srgbClr val="EEF3FB"/>
-                    </a:solidFill>
-                  </a:tcPr>
-                </a:tc>
-                <a:extLst>
-                  <a:ext uri="{0D108BD9-81ED-4DB2-BD59-A6C34878D82A}">
-                    <a16:rowId xmlns:a16="http://schemas.microsoft.com/office/drawing/2014/main" val="10002"/>
-                  </a:ext>
-                </a:extLst>
-              </a:tr>
-              <a:tr h="436033">
-                <a:tc>
-                  <a:txBody>
-                    <a:bodyPr/>
-                    <a:lstStyle/>
-                    <a:p>
-                      <a:pPr marL="0" indent="0" algn="ctr">
-                        <a:lnSpc>
-                          <a:spcPct val="130000"/>
-                        </a:lnSpc>
-                        <a:spcBef>
-                          <a:spcPts val="0"/>
-                        </a:spcBef>
-                        <a:spcAft>
-                          <a:spcPts val="0"/>
-                        </a:spcAft>
-                        <a:defRPr sz="1650" b="0">
-                          <a:solidFill>
-                            <a:srgbClr val="080808"/>
-                          </a:solidFill>
-                          <a:latin typeface="맑은 고딕"/>
-                        </a:defRPr>
-                      </a:pPr>
-                      <a:r>
-                        <a:rPr lang="ko-KR" altLang="en-US" sz="1650"/>
-                        <a:t>항목 </a:t>
-                      </a:r>
-                      <a:r>
-                        <a:rPr lang="en-US" altLang="ko-KR" sz="1650"/>
-                        <a:t>3</a:t>
-                      </a:r>
-                      <a:endParaRPr sz="1650"/>
-                    </a:p>
-                  </a:txBody>
-                  <a:tcPr anchor="ctr">
+                  <a:tcPr anchor="ctr" marT="45720" marB="45720" marL="91440" marR="91440">
                     <a:solidFill>
                       <a:srgbClr val="FFFFFF"/>
                     </a:solidFill>
@@ -7541,626 +6869,35 @@
                 </a:tc>
                 <a:tc>
                   <a:txBody>
-                    <a:bodyPr/>
+                    <a:bodyPr wrap="square" lIns="19050" rIns="19050" tIns="0" bIns="0"/>
                     <a:lstStyle/>
                     <a:p>
-                      <a:pPr marL="0" indent="0" algn="ctr">
+                      <a:pPr algn="ctr">
                         <a:lnSpc>
                           <a:spcPct val="130000"/>
                         </a:lnSpc>
-                        <a:spcBef>
-                          <a:spcPts val="0"/>
-                        </a:spcBef>
                         <a:spcAft>
-                          <a:spcPts val="0"/>
+                          <a:spcPts val="800"/>
                         </a:spcAft>
-                        <a:defRPr sz="1650" b="0">
+                      </a:pPr>
+                      <a:r>
+                        <a:rPr sz="1655" b="1">
                           <a:solidFill>
                             <a:srgbClr val="080808"/>
                           </a:solidFill>
-                          <a:latin typeface="맑은 고딕"/>
-                        </a:defRPr>
-                      </a:pPr>
-                      <a:r>
-                        <a:rPr lang="ko-KR" altLang="en-US" sz="1650"/>
+                          <a:latin typeface="Pretendard"/>
+                          <a:ea typeface="Pretendard"/>
+                        </a:rPr>
                         <a:t>내용</a:t>
                       </a:r>
-                      <a:endParaRPr sz="1650"/>
                     </a:p>
                   </a:txBody>
-                  <a:tcPr anchor="ctr">
+                  <a:tcPr anchor="ctr" marT="45720" marB="45720" marL="91440" marR="91440">
                     <a:solidFill>
                       <a:srgbClr val="FFFFFF"/>
                     </a:solidFill>
                   </a:tcPr>
                 </a:tc>
-                <a:tc>
-                  <a:txBody>
-                    <a:bodyPr/>
-                    <a:lstStyle/>
-                    <a:p>
-                      <a:pPr marL="0" indent="0" algn="ctr">
-                        <a:lnSpc>
-                          <a:spcPct val="130000"/>
-                        </a:lnSpc>
-                        <a:spcBef>
-                          <a:spcPts val="0"/>
-                        </a:spcBef>
-                        <a:spcAft>
-                          <a:spcPts val="0"/>
-                        </a:spcAft>
-                        <a:defRPr sz="1650" b="0">
-                          <a:solidFill>
-                            <a:srgbClr val="080808"/>
-                          </a:solidFill>
-                          <a:latin typeface="맑은 고딕"/>
-                        </a:defRPr>
-                      </a:pPr>
-                      <a:r>
-                        <a:rPr lang="ko-KR" altLang="en-US" sz="1650"/>
-                        <a:t>내용</a:t>
-                      </a:r>
-                      <a:endParaRPr sz="1650"/>
-                    </a:p>
-                  </a:txBody>
-                  <a:tcPr anchor="ctr">
-                    <a:solidFill>
-                      <a:srgbClr val="FFFFFF"/>
-                    </a:solidFill>
-                  </a:tcPr>
-                </a:tc>
-                <a:tc>
-                  <a:txBody>
-                    <a:bodyPr/>
-                    <a:lstStyle/>
-                    <a:p>
-                      <a:pPr marL="0" indent="0" algn="ctr">
-                        <a:lnSpc>
-                          <a:spcPct val="130000"/>
-                        </a:lnSpc>
-                        <a:spcBef>
-                          <a:spcPts val="0"/>
-                        </a:spcBef>
-                        <a:spcAft>
-                          <a:spcPts val="0"/>
-                        </a:spcAft>
-                        <a:defRPr sz="1650" b="0">
-                          <a:solidFill>
-                            <a:srgbClr val="080808"/>
-                          </a:solidFill>
-                          <a:latin typeface="맑은 고딕"/>
-                        </a:defRPr>
-                      </a:pPr>
-                      <a:r>
-                        <a:rPr lang="ko-KR" altLang="en-US" sz="1650"/>
-                        <a:t>내용</a:t>
-                      </a:r>
-                      <a:endParaRPr sz="1650"/>
-                    </a:p>
-                  </a:txBody>
-                  <a:tcPr anchor="ctr">
-                    <a:solidFill>
-                      <a:srgbClr val="FFFFFF"/>
-                    </a:solidFill>
-                  </a:tcPr>
-                </a:tc>
-                <a:tc>
-                  <a:txBody>
-                    <a:bodyPr/>
-                    <a:lstStyle/>
-                    <a:p>
-                      <a:pPr marL="0" indent="0" algn="ctr">
-                        <a:lnSpc>
-                          <a:spcPct val="130000"/>
-                        </a:lnSpc>
-                        <a:spcBef>
-                          <a:spcPts val="0"/>
-                        </a:spcBef>
-                        <a:spcAft>
-                          <a:spcPts val="0"/>
-                        </a:spcAft>
-                        <a:defRPr sz="1650" b="0">
-                          <a:solidFill>
-                            <a:srgbClr val="080808"/>
-                          </a:solidFill>
-                          <a:latin typeface="맑은 고딕"/>
-                        </a:defRPr>
-                      </a:pPr>
-                      <a:r>
-                        <a:rPr lang="ko-KR" altLang="en-US" sz="1650"/>
-                        <a:t>내용</a:t>
-                      </a:r>
-                      <a:endParaRPr sz="1650"/>
-                    </a:p>
-                  </a:txBody>
-                  <a:tcPr anchor="ctr">
-                    <a:solidFill>
-                      <a:srgbClr val="FFFFFF"/>
-                    </a:solidFill>
-                  </a:tcPr>
-                </a:tc>
-                <a:tc>
-                  <a:txBody>
-                    <a:bodyPr/>
-                    <a:lstStyle/>
-                    <a:p>
-                      <a:pPr marL="0" indent="0" algn="ctr">
-                        <a:lnSpc>
-                          <a:spcPct val="130000"/>
-                        </a:lnSpc>
-                        <a:spcBef>
-                          <a:spcPts val="0"/>
-                        </a:spcBef>
-                        <a:spcAft>
-                          <a:spcPts val="0"/>
-                        </a:spcAft>
-                        <a:defRPr sz="1650" b="0">
-                          <a:solidFill>
-                            <a:srgbClr val="080808"/>
-                          </a:solidFill>
-                          <a:latin typeface="맑은 고딕"/>
-                        </a:defRPr>
-                      </a:pPr>
-                      <a:r>
-                        <a:rPr lang="ko-KR" altLang="en-US" sz="1650"/>
-                        <a:t>내용</a:t>
-                      </a:r>
-                      <a:endParaRPr sz="1650"/>
-                    </a:p>
-                  </a:txBody>
-                  <a:tcPr anchor="ctr">
-                    <a:solidFill>
-                      <a:srgbClr val="FFFFFF"/>
-                    </a:solidFill>
-                  </a:tcPr>
-                </a:tc>
-                <a:extLst>
-                  <a:ext uri="{0D108BD9-81ED-4DB2-BD59-A6C34878D82A}">
-                    <a16:rowId xmlns:a16="http://schemas.microsoft.com/office/drawing/2014/main" val="10003"/>
-                  </a:ext>
-                </a:extLst>
-              </a:tr>
-              <a:tr h="436033">
-                <a:tc>
-                  <a:txBody>
-                    <a:bodyPr/>
-                    <a:lstStyle/>
-                    <a:p>
-                      <a:pPr marL="0" indent="0" algn="ctr">
-                        <a:lnSpc>
-                          <a:spcPct val="130000"/>
-                        </a:lnSpc>
-                        <a:spcBef>
-                          <a:spcPts val="0"/>
-                        </a:spcBef>
-                        <a:spcAft>
-                          <a:spcPts val="0"/>
-                        </a:spcAft>
-                        <a:defRPr sz="1650" b="0">
-                          <a:solidFill>
-                            <a:srgbClr val="080808"/>
-                          </a:solidFill>
-                          <a:latin typeface="맑은 고딕"/>
-                        </a:defRPr>
-                      </a:pPr>
-                      <a:r>
-                        <a:rPr lang="ko-KR" altLang="en-US" sz="1650"/>
-                        <a:t>항목 </a:t>
-                      </a:r>
-                      <a:r>
-                        <a:rPr lang="en-US" altLang="ko-KR" sz="1650"/>
-                        <a:t>4</a:t>
-                      </a:r>
-                      <a:endParaRPr sz="1650"/>
-                    </a:p>
-                  </a:txBody>
-                  <a:tcPr anchor="ctr">
-                    <a:solidFill>
-                      <a:srgbClr val="EEF3FB"/>
-                    </a:solidFill>
-                  </a:tcPr>
-                </a:tc>
-                <a:tc>
-                  <a:txBody>
-                    <a:bodyPr/>
-                    <a:lstStyle/>
-                    <a:p>
-                      <a:pPr marL="0" indent="0" algn="ctr">
-                        <a:lnSpc>
-                          <a:spcPct val="130000"/>
-                        </a:lnSpc>
-                        <a:spcBef>
-                          <a:spcPts val="0"/>
-                        </a:spcBef>
-                        <a:spcAft>
-                          <a:spcPts val="0"/>
-                        </a:spcAft>
-                        <a:defRPr sz="1650" b="0">
-                          <a:solidFill>
-                            <a:srgbClr val="080808"/>
-                          </a:solidFill>
-                          <a:latin typeface="맑은 고딕"/>
-                        </a:defRPr>
-                      </a:pPr>
-                      <a:r>
-                        <a:rPr lang="ko-KR" altLang="en-US" sz="1650"/>
-                        <a:t>내용</a:t>
-                      </a:r>
-                      <a:endParaRPr sz="1650"/>
-                    </a:p>
-                  </a:txBody>
-                  <a:tcPr anchor="ctr">
-                    <a:solidFill>
-                      <a:srgbClr val="EEF3FB"/>
-                    </a:solidFill>
-                  </a:tcPr>
-                </a:tc>
-                <a:tc>
-                  <a:txBody>
-                    <a:bodyPr/>
-                    <a:lstStyle/>
-                    <a:p>
-                      <a:pPr marL="0" indent="0" algn="ctr">
-                        <a:lnSpc>
-                          <a:spcPct val="130000"/>
-                        </a:lnSpc>
-                        <a:spcBef>
-                          <a:spcPts val="0"/>
-                        </a:spcBef>
-                        <a:spcAft>
-                          <a:spcPts val="0"/>
-                        </a:spcAft>
-                        <a:defRPr sz="1650" b="0">
-                          <a:solidFill>
-                            <a:srgbClr val="080808"/>
-                          </a:solidFill>
-                          <a:latin typeface="맑은 고딕"/>
-                        </a:defRPr>
-                      </a:pPr>
-                      <a:r>
-                        <a:rPr lang="ko-KR" altLang="en-US" sz="1650"/>
-                        <a:t>내용</a:t>
-                      </a:r>
-                      <a:endParaRPr sz="1650"/>
-                    </a:p>
-                  </a:txBody>
-                  <a:tcPr anchor="ctr">
-                    <a:solidFill>
-                      <a:srgbClr val="EEF3FB"/>
-                    </a:solidFill>
-                  </a:tcPr>
-                </a:tc>
-                <a:tc>
-                  <a:txBody>
-                    <a:bodyPr/>
-                    <a:lstStyle/>
-                    <a:p>
-                      <a:pPr marL="0" indent="0" algn="ctr">
-                        <a:lnSpc>
-                          <a:spcPct val="130000"/>
-                        </a:lnSpc>
-                        <a:spcBef>
-                          <a:spcPts val="0"/>
-                        </a:spcBef>
-                        <a:spcAft>
-                          <a:spcPts val="0"/>
-                        </a:spcAft>
-                        <a:defRPr sz="1650" b="0">
-                          <a:solidFill>
-                            <a:srgbClr val="080808"/>
-                          </a:solidFill>
-                          <a:latin typeface="맑은 고딕"/>
-                        </a:defRPr>
-                      </a:pPr>
-                      <a:r>
-                        <a:rPr lang="ko-KR" altLang="en-US" sz="1650"/>
-                        <a:t>내용</a:t>
-                      </a:r>
-                      <a:endParaRPr sz="1650"/>
-                    </a:p>
-                  </a:txBody>
-                  <a:tcPr anchor="ctr">
-                    <a:solidFill>
-                      <a:srgbClr val="EEF3FB"/>
-                    </a:solidFill>
-                  </a:tcPr>
-                </a:tc>
-                <a:tc>
-                  <a:txBody>
-                    <a:bodyPr/>
-                    <a:lstStyle/>
-                    <a:p>
-                      <a:pPr marL="0" indent="0" algn="ctr">
-                        <a:lnSpc>
-                          <a:spcPct val="130000"/>
-                        </a:lnSpc>
-                        <a:spcBef>
-                          <a:spcPts val="0"/>
-                        </a:spcBef>
-                        <a:spcAft>
-                          <a:spcPts val="0"/>
-                        </a:spcAft>
-                        <a:defRPr sz="1650" b="0">
-                          <a:solidFill>
-                            <a:srgbClr val="080808"/>
-                          </a:solidFill>
-                          <a:latin typeface="맑은 고딕"/>
-                        </a:defRPr>
-                      </a:pPr>
-                      <a:r>
-                        <a:rPr lang="ko-KR" altLang="en-US" sz="1650"/>
-                        <a:t>내용</a:t>
-                      </a:r>
-                      <a:endParaRPr sz="1650"/>
-                    </a:p>
-                  </a:txBody>
-                  <a:tcPr anchor="ctr">
-                    <a:solidFill>
-                      <a:srgbClr val="EEF3FB"/>
-                    </a:solidFill>
-                  </a:tcPr>
-                </a:tc>
-                <a:tc>
-                  <a:txBody>
-                    <a:bodyPr/>
-                    <a:lstStyle/>
-                    <a:p>
-                      <a:pPr marL="0" indent="0" algn="ctr">
-                        <a:lnSpc>
-                          <a:spcPct val="130000"/>
-                        </a:lnSpc>
-                        <a:spcBef>
-                          <a:spcPts val="0"/>
-                        </a:spcBef>
-                        <a:spcAft>
-                          <a:spcPts val="0"/>
-                        </a:spcAft>
-                        <a:defRPr sz="1650" b="0">
-                          <a:solidFill>
-                            <a:srgbClr val="080808"/>
-                          </a:solidFill>
-                          <a:latin typeface="맑은 고딕"/>
-                        </a:defRPr>
-                      </a:pPr>
-                      <a:r>
-                        <a:rPr lang="ko-KR" altLang="en-US" sz="1650"/>
-                        <a:t>내용</a:t>
-                      </a:r>
-                      <a:endParaRPr sz="1650"/>
-                    </a:p>
-                  </a:txBody>
-                  <a:tcPr anchor="ctr">
-                    <a:solidFill>
-                      <a:srgbClr val="EEF3FB"/>
-                    </a:solidFill>
-                  </a:tcPr>
-                </a:tc>
-                <a:extLst>
-                  <a:ext uri="{0D108BD9-81ED-4DB2-BD59-A6C34878D82A}">
-                    <a16:rowId xmlns:a16="http://schemas.microsoft.com/office/drawing/2014/main" val="10004"/>
-                  </a:ext>
-                </a:extLst>
-              </a:tr>
-              <a:tr h="436033">
-                <a:tc>
-                  <a:txBody>
-                    <a:bodyPr/>
-                    <a:lstStyle/>
-                    <a:p>
-                      <a:pPr marL="0" indent="0" algn="ctr">
-                        <a:lnSpc>
-                          <a:spcPct val="130000"/>
-                        </a:lnSpc>
-                        <a:spcBef>
-                          <a:spcPts val="0"/>
-                        </a:spcBef>
-                        <a:spcAft>
-                          <a:spcPts val="0"/>
-                        </a:spcAft>
-                        <a:defRPr sz="1650" b="0">
-                          <a:solidFill>
-                            <a:srgbClr val="080808"/>
-                          </a:solidFill>
-                          <a:latin typeface="맑은 고딕"/>
-                        </a:defRPr>
-                      </a:pPr>
-                      <a:r>
-                        <a:rPr lang="ko-KR" altLang="en-US" sz="1650"/>
-                        <a:t>항목 </a:t>
-                      </a:r>
-                      <a:r>
-                        <a:rPr lang="en-US" altLang="ko-KR" sz="1650"/>
-                        <a:t>5</a:t>
-                      </a:r>
-                      <a:endParaRPr sz="1650"/>
-                    </a:p>
-                  </a:txBody>
-                  <a:tcPr anchor="ctr">
-                    <a:solidFill>
-                      <a:srgbClr val="FFFFFF"/>
-                    </a:solidFill>
-                  </a:tcPr>
-                </a:tc>
-                <a:tc>
-                  <a:txBody>
-                    <a:bodyPr/>
-                    <a:lstStyle/>
-                    <a:p>
-                      <a:pPr marL="0" indent="0" algn="ctr">
-                        <a:lnSpc>
-                          <a:spcPct val="130000"/>
-                        </a:lnSpc>
-                        <a:spcBef>
-                          <a:spcPts val="0"/>
-                        </a:spcBef>
-                        <a:spcAft>
-                          <a:spcPts val="0"/>
-                        </a:spcAft>
-                        <a:defRPr sz="1650" b="0">
-                          <a:solidFill>
-                            <a:srgbClr val="080808"/>
-                          </a:solidFill>
-                          <a:latin typeface="맑은 고딕"/>
-                        </a:defRPr>
-                      </a:pPr>
-                      <a:r>
-                        <a:rPr lang="ko-KR" altLang="en-US" sz="1650"/>
-                        <a:t>내용</a:t>
-                      </a:r>
-                      <a:endParaRPr sz="1650"/>
-                    </a:p>
-                  </a:txBody>
-                  <a:tcPr anchor="ctr">
-                    <a:solidFill>
-                      <a:srgbClr val="FFFFFF"/>
-                    </a:solidFill>
-                  </a:tcPr>
-                </a:tc>
-                <a:tc>
-                  <a:txBody>
-                    <a:bodyPr/>
-                    <a:lstStyle/>
-                    <a:p>
-                      <a:pPr marL="0" indent="0" algn="ctr">
-                        <a:lnSpc>
-                          <a:spcPct val="130000"/>
-                        </a:lnSpc>
-                        <a:spcBef>
-                          <a:spcPts val="0"/>
-                        </a:spcBef>
-                        <a:spcAft>
-                          <a:spcPts val="0"/>
-                        </a:spcAft>
-                        <a:defRPr sz="1650" b="0">
-                          <a:solidFill>
-                            <a:srgbClr val="080808"/>
-                          </a:solidFill>
-                          <a:latin typeface="맑은 고딕"/>
-                        </a:defRPr>
-                      </a:pPr>
-                      <a:r>
-                        <a:rPr lang="ko-KR" altLang="en-US" sz="1650"/>
-                        <a:t>내용</a:t>
-                      </a:r>
-                      <a:endParaRPr sz="1650"/>
-                    </a:p>
-                  </a:txBody>
-                  <a:tcPr anchor="ctr">
-                    <a:solidFill>
-                      <a:srgbClr val="FFFFFF"/>
-                    </a:solidFill>
-                  </a:tcPr>
-                </a:tc>
-                <a:tc>
-                  <a:txBody>
-                    <a:bodyPr/>
-                    <a:lstStyle/>
-                    <a:p>
-                      <a:pPr marL="0" indent="0" algn="ctr">
-                        <a:lnSpc>
-                          <a:spcPct val="130000"/>
-                        </a:lnSpc>
-                        <a:spcBef>
-                          <a:spcPts val="0"/>
-                        </a:spcBef>
-                        <a:spcAft>
-                          <a:spcPts val="0"/>
-                        </a:spcAft>
-                        <a:defRPr sz="1650" b="0">
-                          <a:solidFill>
-                            <a:srgbClr val="080808"/>
-                          </a:solidFill>
-                          <a:latin typeface="맑은 고딕"/>
-                        </a:defRPr>
-                      </a:pPr>
-                      <a:r>
-                        <a:rPr lang="ko-KR" altLang="en-US" sz="1650"/>
-                        <a:t>내용</a:t>
-                      </a:r>
-                      <a:endParaRPr sz="1650"/>
-                    </a:p>
-                  </a:txBody>
-                  <a:tcPr anchor="ctr">
-                    <a:solidFill>
-                      <a:srgbClr val="FFFFFF"/>
-                    </a:solidFill>
-                  </a:tcPr>
-                </a:tc>
-                <a:tc>
-                  <a:txBody>
-                    <a:bodyPr/>
-                    <a:lstStyle/>
-                    <a:p>
-                      <a:pPr marL="0" indent="0" algn="ctr">
-                        <a:lnSpc>
-                          <a:spcPct val="130000"/>
-                        </a:lnSpc>
-                        <a:spcBef>
-                          <a:spcPts val="0"/>
-                        </a:spcBef>
-                        <a:spcAft>
-                          <a:spcPts val="0"/>
-                        </a:spcAft>
-                        <a:defRPr sz="1650" b="0">
-                          <a:solidFill>
-                            <a:srgbClr val="080808"/>
-                          </a:solidFill>
-                          <a:latin typeface="맑은 고딕"/>
-                        </a:defRPr>
-                      </a:pPr>
-                      <a:r>
-                        <a:rPr lang="ko-KR" altLang="en-US" sz="1650"/>
-                        <a:t>내용</a:t>
-                      </a:r>
-                      <a:endParaRPr sz="1650"/>
-                    </a:p>
-                  </a:txBody>
-                  <a:tcPr anchor="ctr">
-                    <a:solidFill>
-                      <a:srgbClr val="FFFFFF"/>
-                    </a:solidFill>
-                  </a:tcPr>
-                </a:tc>
-                <a:tc>
-                  <a:txBody>
-                    <a:bodyPr/>
-                    <a:lstStyle/>
-                    <a:p>
-                      <a:pPr marL="0" indent="0" algn="ctr">
-                        <a:lnSpc>
-                          <a:spcPct val="130000"/>
-                        </a:lnSpc>
-                        <a:spcBef>
-                          <a:spcPts val="0"/>
-                        </a:spcBef>
-                        <a:spcAft>
-                          <a:spcPts val="0"/>
-                        </a:spcAft>
-                        <a:defRPr sz="1650" b="0">
-                          <a:solidFill>
-                            <a:srgbClr val="080808"/>
-                          </a:solidFill>
-                          <a:latin typeface="맑은 고딕"/>
-                        </a:defRPr>
-                      </a:pPr>
-                      <a:r>
-                        <a:rPr lang="ko-KR" altLang="en-US" sz="1650"/>
-                        <a:t>내용</a:t>
-                      </a:r>
-                      <a:endParaRPr sz="1650"/>
-                    </a:p>
-                  </a:txBody>
-                  <a:tcPr anchor="ctr">
-                    <a:solidFill>
-                      <a:srgbClr val="FFFFFF"/>
-                    </a:solidFill>
-                  </a:tcPr>
-                </a:tc>
-                <a:extLst>
-                  <a:ext uri="{0D108BD9-81ED-4DB2-BD59-A6C34878D82A}">
-                    <a16:rowId xmlns:a16="http://schemas.microsoft.com/office/drawing/2014/main" val="10005"/>
-                  </a:ext>
-                </a:extLst>
               </a:tr>
             </a:tbl>
           </a:graphicData>
@@ -8168,18 +6905,18 @@
       </p:graphicFrame>
       <p:sp>
         <p:nvSpPr>
-          <p:cNvPr id="7" name="Rounded Rectangle 6"/>
+          <p:cNvPr id="7" name="Panel"/>
           <p:cNvSpPr/>
           <p:nvPr/>
         </p:nvSpPr>
         <p:spPr>
           <a:xfrm>
-            <a:off x="432054" y="4292600"/>
-            <a:ext cx="11327892" cy="1524000"/>
+            <a:off x="476250" y="4457700"/>
+            <a:ext cx="11239500" cy="1981200"/>
           </a:xfrm>
           <a:prstGeom prst="roundRect">
             <a:avLst>
-              <a:gd name="adj" fmla="val 5000"/>
+              <a:gd name="adj" fmla="val 6000"/>
             </a:avLst>
           </a:prstGeom>
           <a:solidFill>
@@ -8188,6 +6925,13 @@
           <a:ln>
             <a:noFill/>
           </a:ln>
+          <a:effectLst>
+            <a:outerShdw blurRad="38100" dist="19050" dir="5400000" algn="ctr" rotWithShape="0">
+              <a:srgbClr val="000000">
+                <a:alpha val="33000"/>
+              </a:srgbClr>
+            </a:outerShdw>
+          </a:effectLst>
         </p:spPr>
         <p:style>
           <a:lnRef idx="1">
@@ -8196,7 +6940,7 @@
           <a:fillRef idx="3">
             <a:schemeClr val="accent1"/>
           </a:fillRef>
-          <a:effectRef idx="2">
+          <a:effectRef idx="0">
             <a:schemeClr val="accent1"/>
           </a:effectRef>
           <a:fontRef idx="minor">
@@ -8208,20 +6952,19 @@
           <a:lstStyle/>
           <a:p>
             <a:pPr algn="ctr"/>
-            <a:endParaRPr/>
-          </a:p>
-        </p:txBody>
-      </p:sp>
-      <p:sp>
-        <p:nvSpPr>
-          <p:cNvPr id="8" name="Rectangle 7"/>
+          </a:p>
+        </p:txBody>
+      </p:sp>
+      <p:sp>
+        <p:nvSpPr>
+          <p:cNvPr id="8" name="PanelInterior"/>
           <p:cNvSpPr/>
           <p:nvPr/>
         </p:nvSpPr>
         <p:spPr>
           <a:xfrm>
-            <a:off x="508254" y="4800600"/>
-            <a:ext cx="11175492" cy="939800"/>
+            <a:off x="628650" y="4972050"/>
+            <a:ext cx="10934700" cy="1314450"/>
           </a:xfrm>
           <a:prstGeom prst="rect">
             <a:avLst/>
@@ -8232,6 +6975,7 @@
           <a:ln>
             <a:noFill/>
           </a:ln>
+          <a:effectLst/>
         </p:spPr>
         <p:style>
           <a:lnRef idx="1">
@@ -8240,7 +6984,7 @@
           <a:fillRef idx="3">
             <a:schemeClr val="accent1"/>
           </a:fillRef>
-          <a:effectRef idx="2">
+          <a:effectRef idx="0">
             <a:schemeClr val="accent1"/>
           </a:effectRef>
           <a:fontRef idx="minor">
@@ -8252,20 +6996,19 @@
           <a:lstStyle/>
           <a:p>
             <a:pPr algn="ctr"/>
-            <a:endParaRPr/>
-          </a:p>
-        </p:txBody>
-      </p:sp>
-      <p:sp>
-        <p:nvSpPr>
-          <p:cNvPr id="9" name="TextBox 8"/>
+          </a:p>
+        </p:txBody>
+      </p:sp>
+      <p:sp>
+        <p:nvSpPr>
+          <p:cNvPr id="9" name="PanelTitle"/>
           <p:cNvSpPr txBox="1"/>
           <p:nvPr/>
         </p:nvSpPr>
         <p:spPr>
           <a:xfrm>
-            <a:off x="635254" y="4394200"/>
-            <a:ext cx="10921492" cy="381000"/>
+            <a:off x="685800" y="4495800"/>
+            <a:ext cx="10820400" cy="381000"/>
           </a:xfrm>
           <a:prstGeom prst="rect">
             <a:avLst/>
@@ -8273,8 +7016,8 @@
           <a:noFill/>
         </p:spPr>
         <p:txBody>
-          <a:bodyPr wrap="square" lIns="19050" tIns="0" rIns="19050" bIns="0">
-            <a:noAutofit/>
+          <a:bodyPr wrap="square" lIns="19050" rIns="19050" tIns="0" bIns="0">
+            <a:spAutoFit/>
           </a:bodyPr>
           <a:lstStyle/>
           <a:p>
@@ -8285,39 +7028,30 @@
               <a:spcAft>
                 <a:spcPts val="800"/>
               </a:spcAft>
-              <a:defRPr sz="1725" b="1">
+            </a:pPr>
+            <a:r>
+              <a:rPr sz="1730" b="1">
                 <a:solidFill>
                   <a:srgbClr val="FFFFFF"/>
                 </a:solidFill>
-                <a:latin typeface="맑은 고딕"/>
-              </a:defRPr>
-            </a:pPr>
-            <a:r>
-              <a:rPr lang="en-US" altLang="ko-KR"/>
-              <a:t>• [</a:t>
-            </a:r>
-            <a:r>
-              <a:rPr lang="ko-KR" altLang="en-US"/>
-              <a:t>표의 핵심 내용</a:t>
-            </a:r>
-            <a:r>
-              <a:rPr lang="en-US" altLang="ko-KR"/>
-              <a:t>]</a:t>
-            </a:r>
-            <a:endParaRPr/>
-          </a:p>
-        </p:txBody>
-      </p:sp>
-      <p:sp>
-        <p:nvSpPr>
-          <p:cNvPr id="10" name="TextBox 9"/>
+                <a:latin typeface="Pretendard"/>
+                <a:ea typeface="Pretendard"/>
+              </a:rPr>
+              <a:t>• [표의 핵심 내용]</a:t>
+            </a:r>
+          </a:p>
+        </p:txBody>
+      </p:sp>
+      <p:sp>
+        <p:nvSpPr>
+          <p:cNvPr id="10" name="PanelBody"/>
           <p:cNvSpPr txBox="1"/>
           <p:nvPr/>
         </p:nvSpPr>
         <p:spPr>
           <a:xfrm>
-            <a:off x="660654" y="4927600"/>
-            <a:ext cx="10870692" cy="736600"/>
+            <a:off x="781050" y="5124450"/>
+            <a:ext cx="10629900" cy="1009650"/>
           </a:xfrm>
           <a:prstGeom prst="rect">
             <a:avLst/>
@@ -8325,8 +7059,8 @@
           <a:noFill/>
         </p:spPr>
         <p:txBody>
-          <a:bodyPr wrap="square" lIns="19050" tIns="0" rIns="19050" bIns="0">
-            <a:noAutofit/>
+          <a:bodyPr wrap="square" lIns="19050" rIns="19050" tIns="0" bIns="0">
+            <a:spAutoFit/>
           </a:bodyPr>
           <a:lstStyle/>
           <a:p>
@@ -8337,31 +7071,28 @@
               <a:spcAft>
                 <a:spcPts val="800"/>
               </a:spcAft>
-              <a:defRPr sz="1650" b="1">
+            </a:pPr>
+            <a:r>
+              <a:rPr sz="1655" b="1">
                 <a:solidFill>
                   <a:srgbClr val="080808"/>
                 </a:solidFill>
-                <a:latin typeface="맑은 고딕"/>
-              </a:defRPr>
-            </a:pPr>
-            <a:r>
-              <a:rPr lang="en-US" altLang="ko-KR"/>
-              <a:t>• </a:t>
-            </a:r>
-            <a:r>
-              <a:rPr lang="ko-KR" altLang="en-US"/>
-              <a:t>항목 대조와 주요 차이
-</a:t>
-            </a:r>
-            <a:r>
-              <a:rPr lang="en-US" altLang="ko-KR"/>
-              <a:t>• </a:t>
-            </a:r>
-            <a:r>
-              <a:rPr lang="ko-KR" altLang="en-US"/>
-              <a:t>중요한 값의 의미</a:t>
-            </a:r>
-            <a:endParaRPr/>
+                <a:latin typeface="Pretendard"/>
+                <a:ea typeface="Pretendard"/>
+              </a:rPr>
+              <a:t>• 주요 차이</a:t>
+            </a:r>
+            <a:br/>
+            <a:r>
+              <a:rPr sz="1655" b="1">
+                <a:solidFill>
+                  <a:srgbClr val="080808"/>
+                </a:solidFill>
+                <a:latin typeface="Pretendard"/>
+                <a:ea typeface="Pretendard"/>
+              </a:rPr>
+              <a:t>• 결과의 의미</a:t>
+            </a:r>
           </a:p>
         </p:txBody>
       </p:sp>
@@ -8374,7 +7105,7 @@
 </file>
 
 <file path=ppt/slides/slide8.xml><?xml version="1.0" encoding="utf-8"?>
-<p:sld xmlns:a="http://schemas.openxmlformats.org/drawingml/2006/main" xmlns:r="http://schemas.openxmlformats.org/officeDocument/2006/relationships" xmlns:p="http://schemas.openxmlformats.org/presentationml/2006/main">
+<p:sld xmlns:a="http://schemas.openxmlformats.org/drawingml/2006/main" xmlns:p="http://schemas.openxmlformats.org/presentationml/2006/main" xmlns:r="http://schemas.openxmlformats.org/officeDocument/2006/relationships">
   <p:cSld>
     <p:spTree>
       <p:nvGrpSpPr>
@@ -8382,24 +7113,17 @@
         <p:cNvGrpSpPr/>
         <p:nvPr/>
       </p:nvGrpSpPr>
-      <p:grpSpPr>
-        <a:xfrm>
-          <a:off x="0" y="0"/>
-          <a:ext cx="0" cy="0"/>
-          <a:chOff x="0" y="0"/>
-          <a:chExt cx="0" cy="0"/>
-        </a:xfrm>
-      </p:grpSpPr>
-      <p:sp>
-        <p:nvSpPr>
-          <p:cNvPr id="2" name="Rectangle 1"/>
+      <p:grpSpPr/>
+      <p:sp>
+        <p:nvSpPr>
+          <p:cNvPr id="2" name="Header"/>
           <p:cNvSpPr/>
           <p:nvPr/>
         </p:nvSpPr>
         <p:spPr>
           <a:xfrm>
             <a:off x="0" y="0"/>
-            <a:ext cx="12192000" cy="1193800"/>
+            <a:ext cx="12192000" cy="781050"/>
           </a:xfrm>
           <a:prstGeom prst="rect">
             <a:avLst/>
@@ -8410,6 +7134,13 @@
           <a:ln>
             <a:noFill/>
           </a:ln>
+          <a:effectLst>
+            <a:outerShdw blurRad="38100" dist="19050" dir="5400000" algn="ctr" rotWithShape="0">
+              <a:srgbClr val="000000">
+                <a:alpha val="33000"/>
+              </a:srgbClr>
+            </a:outerShdw>
+          </a:effectLst>
         </p:spPr>
         <p:style>
           <a:lnRef idx="1">
@@ -8418,7 +7149,7 @@
           <a:fillRef idx="3">
             <a:schemeClr val="accent1"/>
           </a:fillRef>
-          <a:effectRef idx="2">
+          <a:effectRef idx="0">
             <a:schemeClr val="accent1"/>
           </a:effectRef>
           <a:fontRef idx="minor">
@@ -8430,20 +7161,19 @@
           <a:lstStyle/>
           <a:p>
             <a:pPr algn="ctr"/>
-            <a:endParaRPr/>
-          </a:p>
-        </p:txBody>
-      </p:sp>
-      <p:sp>
-        <p:nvSpPr>
-          <p:cNvPr id="3" name="TextBox 2"/>
+          </a:p>
+        </p:txBody>
+      </p:sp>
+      <p:sp>
+        <p:nvSpPr>
+          <p:cNvPr id="3" name="Title"/>
           <p:cNvSpPr txBox="1"/>
           <p:nvPr/>
         </p:nvSpPr>
         <p:spPr>
           <a:xfrm>
-            <a:off x="432054" y="432054"/>
-            <a:ext cx="11327892" cy="558800"/>
+            <a:off x="257175" y="38100"/>
+            <a:ext cx="11677650" cy="666750"/>
           </a:xfrm>
           <a:prstGeom prst="rect">
             <a:avLst/>
@@ -8451,8 +7181,8 @@
           <a:noFill/>
         </p:spPr>
         <p:txBody>
-          <a:bodyPr wrap="square" lIns="19050" tIns="0" rIns="19050" bIns="0">
-            <a:noAutofit/>
+          <a:bodyPr wrap="square" lIns="19050" rIns="19050" tIns="0" bIns="0">
+            <a:spAutoFit/>
           </a:bodyPr>
           <a:lstStyle/>
           <a:p>
@@ -8463,39 +7193,30 @@
               <a:spcAft>
                 <a:spcPts val="800"/>
               </a:spcAft>
-              <a:defRPr sz="3000" b="1">
+            </a:pPr>
+            <a:r>
+              <a:rPr sz="3000" b="1">
                 <a:solidFill>
                   <a:srgbClr val="FFFFFF"/>
                 </a:solidFill>
-                <a:latin typeface="맑은 고딕"/>
-              </a:defRPr>
-            </a:pPr>
-            <a:r>
-              <a:rPr lang="en-US" altLang="ko-KR"/>
-              <a:t>[</a:t>
-            </a:r>
-            <a:r>
-              <a:rPr lang="ko-KR" altLang="en-US"/>
-              <a:t>이미지 두 개</a:t>
-            </a:r>
-            <a:r>
-              <a:rPr lang="en-US" altLang="ko-KR"/>
-              <a:t>]</a:t>
-            </a:r>
-            <a:endParaRPr/>
-          </a:p>
-        </p:txBody>
-      </p:sp>
-      <p:sp>
-        <p:nvSpPr>
-          <p:cNvPr id="4" name="TextBox 3"/>
+                <a:latin typeface="Pretendard"/>
+                <a:ea typeface="Pretendard"/>
+              </a:rPr>
+              <a:t>[이미지 두 개]</a:t>
+            </a:r>
+          </a:p>
+        </p:txBody>
+      </p:sp>
+      <p:sp>
+        <p:nvSpPr>
+          <p:cNvPr id="4" name="Page"/>
           <p:cNvSpPr txBox="1"/>
           <p:nvPr/>
         </p:nvSpPr>
         <p:spPr>
           <a:xfrm>
-            <a:off x="432054" y="6197346"/>
-            <a:ext cx="1016000" cy="228600"/>
+            <a:off x="247650" y="6553200"/>
+            <a:ext cx="1016000" cy="279400"/>
           </a:xfrm>
           <a:prstGeom prst="rect">
             <a:avLst/>
@@ -8503,8 +7224,8 @@
           <a:noFill/>
         </p:spPr>
         <p:txBody>
-          <a:bodyPr wrap="square" lIns="19050" tIns="0" rIns="19050" bIns="0">
-            <a:noAutofit/>
+          <a:bodyPr wrap="square" lIns="19050" rIns="19050" tIns="0" bIns="0">
+            <a:spAutoFit/>
           </a:bodyPr>
           <a:lstStyle/>
           <a:p>
@@ -8515,31 +7236,30 @@
               <a:spcAft>
                 <a:spcPts val="800"/>
               </a:spcAft>
-              <a:defRPr sz="1125" b="0">
+            </a:pPr>
+            <a:r>
+              <a:rPr sz="1128" b="1">
                 <a:solidFill>
                   <a:srgbClr val="777777"/>
                 </a:solidFill>
-                <a:latin typeface="맑은 고딕"/>
-              </a:defRPr>
-            </a:pPr>
-            <a:r>
-              <a:rPr lang="en-US" altLang="ko-KR"/>
+                <a:latin typeface="Pretendard"/>
+                <a:ea typeface="Pretendard"/>
+              </a:rPr>
               <a:t>08</a:t>
             </a:r>
-            <a:endParaRPr/>
-          </a:p>
-        </p:txBody>
-      </p:sp>
-      <p:sp>
-        <p:nvSpPr>
-          <p:cNvPr id="5" name="TextBox 4"/>
+          </a:p>
+        </p:txBody>
+      </p:sp>
+      <p:sp>
+        <p:nvSpPr>
+          <p:cNvPr id="5" name="Logo"/>
           <p:cNvSpPr txBox="1"/>
           <p:nvPr/>
         </p:nvSpPr>
         <p:spPr>
           <a:xfrm>
-            <a:off x="10540746" y="6006845"/>
-            <a:ext cx="1219200" cy="419100"/>
+            <a:off x="11163300" y="6413500"/>
+            <a:ext cx="1028700" cy="444500"/>
           </a:xfrm>
           <a:prstGeom prst="rect">
             <a:avLst/>
@@ -8547,8 +7267,8 @@
           <a:noFill/>
         </p:spPr>
         <p:txBody>
-          <a:bodyPr wrap="square" lIns="19050" tIns="0" rIns="19050" bIns="0">
-            <a:noAutofit/>
+          <a:bodyPr wrap="square" lIns="19050" rIns="19050" tIns="0" bIns="0">
+            <a:spAutoFit/>
           </a:bodyPr>
           <a:lstStyle/>
           <a:p>
@@ -8556,14 +7276,18 @@
               <a:lnSpc>
                 <a:spcPct val="130000"/>
               </a:lnSpc>
-              <a:defRPr sz="2250" b="1">
+              <a:spcAft>
+                <a:spcPts val="800"/>
+              </a:spcAft>
+            </a:pPr>
+            <a:r>
+              <a:rPr sz="2258" b="1">
                 <a:solidFill>
                   <a:srgbClr val="BE1551"/>
                 </a:solidFill>
-                <a:latin typeface="Arial"/>
-              </a:defRPr>
-            </a:pPr>
-            <a:r>
+                <a:latin typeface="Pretendard"/>
+                <a:ea typeface="Pretendard"/>
+              </a:rPr>
               <a:t>CBNU</a:t>
             </a:r>
           </a:p>
@@ -8571,14 +7295,14 @@
       </p:sp>
       <p:sp>
         <p:nvSpPr>
-          <p:cNvPr id="6" name="TextBox 5"/>
+          <p:cNvPr id="6" name="LeftTitle"/>
           <p:cNvSpPr txBox="1"/>
           <p:nvPr/>
         </p:nvSpPr>
         <p:spPr>
           <a:xfrm>
-            <a:off x="432054" y="1473200"/>
-            <a:ext cx="5334000" cy="381000"/>
+            <a:off x="342900" y="1130300"/>
+            <a:ext cx="5334000" cy="406400"/>
           </a:xfrm>
           <a:prstGeom prst="rect">
             <a:avLst/>
@@ -8586,8 +7310,8 @@
           <a:noFill/>
         </p:spPr>
         <p:txBody>
-          <a:bodyPr wrap="square" lIns="19050" tIns="0" rIns="19050" bIns="0">
-            <a:noAutofit/>
+          <a:bodyPr wrap="square" lIns="19050" rIns="19050" tIns="0" bIns="0">
+            <a:spAutoFit/>
           </a:bodyPr>
           <a:lstStyle/>
           <a:p>
@@ -8598,39 +7322,30 @@
               <a:spcAft>
                 <a:spcPts val="800"/>
               </a:spcAft>
-              <a:defRPr sz="1875" b="1">
+            </a:pPr>
+            <a:r>
+              <a:rPr sz="1875" b="1">
                 <a:solidFill>
                   <a:srgbClr val="080808"/>
                 </a:solidFill>
-                <a:latin typeface="맑은 고딕"/>
-              </a:defRPr>
-            </a:pPr>
-            <a:r>
-              <a:rPr lang="en-US" altLang="ko-KR"/>
-              <a:t>[</a:t>
-            </a:r>
-            <a:r>
-              <a:rPr lang="ko-KR" altLang="en-US"/>
-              <a:t>왼쪽 이미지 제목</a:t>
-            </a:r>
-            <a:r>
-              <a:rPr lang="en-US" altLang="ko-KR"/>
-              <a:t>]</a:t>
-            </a:r>
-            <a:endParaRPr/>
-          </a:p>
-        </p:txBody>
-      </p:sp>
-      <p:sp>
-        <p:nvSpPr>
-          <p:cNvPr id="8" name="TextBox 7"/>
+                <a:latin typeface="Pretendard"/>
+                <a:ea typeface="Pretendard"/>
+              </a:rPr>
+              <a:t>[왼쪽 이미지 제목]</a:t>
+            </a:r>
+          </a:p>
+        </p:txBody>
+      </p:sp>
+      <p:sp>
+        <p:nvSpPr>
+          <p:cNvPr id="7" name="RightTitle"/>
           <p:cNvSpPr txBox="1"/>
           <p:nvPr/>
         </p:nvSpPr>
         <p:spPr>
           <a:xfrm>
-            <a:off x="6425946" y="1473200"/>
-            <a:ext cx="5334000" cy="381000"/>
+            <a:off x="6115050" y="1130300"/>
+            <a:ext cx="5715000" cy="406400"/>
           </a:xfrm>
           <a:prstGeom prst="rect">
             <a:avLst/>
@@ -8638,8 +7353,8 @@
           <a:noFill/>
         </p:spPr>
         <p:txBody>
-          <a:bodyPr wrap="square" lIns="19050" tIns="0" rIns="19050" bIns="0">
-            <a:noAutofit/>
+          <a:bodyPr wrap="square" lIns="19050" rIns="19050" tIns="0" bIns="0">
+            <a:spAutoFit/>
           </a:bodyPr>
           <a:lstStyle/>
           <a:p>
@@ -8650,39 +7365,30 @@
               <a:spcAft>
                 <a:spcPts val="800"/>
               </a:spcAft>
-              <a:defRPr sz="1875" b="1">
+            </a:pPr>
+            <a:r>
+              <a:rPr sz="1875" b="1">
                 <a:solidFill>
                   <a:srgbClr val="080808"/>
                 </a:solidFill>
-                <a:latin typeface="맑은 고딕"/>
-              </a:defRPr>
-            </a:pPr>
-            <a:r>
-              <a:rPr lang="en-US" altLang="ko-KR"/>
-              <a:t>[</a:t>
-            </a:r>
-            <a:r>
-              <a:rPr lang="ko-KR" altLang="en-US"/>
-              <a:t>오른쪽 이미지 제목</a:t>
-            </a:r>
-            <a:r>
-              <a:rPr lang="en-US" altLang="ko-KR"/>
-              <a:t>]</a:t>
-            </a:r>
-            <a:endParaRPr/>
-          </a:p>
-        </p:txBody>
-      </p:sp>
-      <p:sp>
-        <p:nvSpPr>
-          <p:cNvPr id="10" name="TextBox 9"/>
+                <a:latin typeface="Pretendard"/>
+                <a:ea typeface="Pretendard"/>
+              </a:rPr>
+              <a:t>[오른쪽 이미지 제목]</a:t>
+            </a:r>
+          </a:p>
+        </p:txBody>
+      </p:sp>
+      <p:sp>
+        <p:nvSpPr>
+          <p:cNvPr id="8" name="LeftImageSlot"/>
           <p:cNvSpPr txBox="1"/>
           <p:nvPr/>
         </p:nvSpPr>
         <p:spPr>
           <a:xfrm>
-            <a:off x="432054" y="5549900"/>
-            <a:ext cx="11327892" cy="368300"/>
+            <a:off x="342900" y="1625600"/>
+            <a:ext cx="5334000" cy="4368800"/>
           </a:xfrm>
           <a:prstGeom prst="rect">
             <a:avLst/>
@@ -8690,8 +7396,8 @@
           <a:noFill/>
         </p:spPr>
         <p:txBody>
-          <a:bodyPr wrap="square" lIns="19050" tIns="0" rIns="19050" bIns="0">
-            <a:noAutofit/>
+          <a:bodyPr wrap="square" lIns="19050" rIns="19050" tIns="0" bIns="0">
+            <a:spAutoFit/>
           </a:bodyPr>
           <a:lstStyle/>
           <a:p>
@@ -8702,66 +7408,151 @@
               <a:spcAft>
                 <a:spcPts val="800"/>
               </a:spcAft>
-              <a:defRPr sz="1800" b="0">
+            </a:pPr>
+            <a:r>
+              <a:rPr sz="1600" b="1">
                 <a:solidFill>
                   <a:srgbClr val="080808"/>
                 </a:solidFill>
-                <a:latin typeface="맑은 고딕"/>
-              </a:defRPr>
+                <a:latin typeface="Pretendard"/>
+                <a:ea typeface="Pretendard"/>
+              </a:rPr>
+              <a:t>이미지 영역</a:t>
+            </a:r>
+          </a:p>
+        </p:txBody>
+      </p:sp>
+      <p:sp>
+        <p:nvSpPr>
+          <p:cNvPr id="9" name="RightImageSlot"/>
+          <p:cNvSpPr txBox="1"/>
+          <p:nvPr/>
+        </p:nvSpPr>
+        <p:spPr>
+          <a:xfrm>
+            <a:off x="6115050" y="1625600"/>
+            <a:ext cx="5715000" cy="4368800"/>
+          </a:xfrm>
+          <a:prstGeom prst="rect">
+            <a:avLst/>
+          </a:prstGeom>
+          <a:noFill/>
+        </p:spPr>
+        <p:txBody>
+          <a:bodyPr wrap="square" lIns="19050" rIns="19050" tIns="0" bIns="0">
+            <a:spAutoFit/>
+          </a:bodyPr>
+          <a:lstStyle/>
+          <a:p>
+            <a:pPr algn="ctr">
+              <a:lnSpc>
+                <a:spcPct val="130000"/>
+              </a:lnSpc>
+              <a:spcAft>
+                <a:spcPts val="800"/>
+              </a:spcAft>
             </a:pPr>
             <a:r>
-              <a:rPr lang="en-US" altLang="ko-KR"/>
-              <a:t>• </a:t>
-            </a:r>
-            <a:r>
-              <a:rPr lang="ko-KR" altLang="en-US"/>
-              <a:t>이미지와 자료에서 확인한 핵심 내용</a:t>
-            </a:r>
-            <a:endParaRPr/>
-          </a:p>
-        </p:txBody>
-      </p:sp>
-      <p:sp>
-        <p:nvSpPr>
-          <p:cNvPr id="11" name="직사각형 10">
-            <a:extLst>
-              <a:ext uri="{FF2B5EF4-FFF2-40B4-BE49-F238E27FC236}">
-                <a16:creationId xmlns:a16="http://schemas.microsoft.com/office/drawing/2014/main" id="{5FE1B508-17BE-9AF5-FC27-EBC7D19B1344}"/>
-              </a:ext>
-            </a:extLst>
-          </p:cNvPr>
+              <a:rPr sz="1600" b="1">
+                <a:solidFill>
+                  <a:srgbClr val="080808"/>
+                </a:solidFill>
+                <a:latin typeface="Pretendard"/>
+                <a:ea typeface="Pretendard"/>
+              </a:rPr>
+              <a:t>이미지 영역</a:t>
+            </a:r>
+          </a:p>
+        </p:txBody>
+      </p:sp>
+      <p:sp>
+        <p:nvSpPr>
+          <p:cNvPr id="10" name="Caption"/>
+          <p:cNvSpPr txBox="1"/>
+          <p:nvPr/>
+        </p:nvSpPr>
+        <p:spPr>
+          <a:xfrm>
+            <a:off x="342900" y="6159500"/>
+            <a:ext cx="11487150" cy="355600"/>
+          </a:xfrm>
+          <a:prstGeom prst="rect">
+            <a:avLst/>
+          </a:prstGeom>
+          <a:noFill/>
+        </p:spPr>
+        <p:txBody>
+          <a:bodyPr wrap="square" lIns="19050" rIns="19050" tIns="0" bIns="0">
+            <a:spAutoFit/>
+          </a:bodyPr>
+          <a:lstStyle/>
+          <a:p>
+            <a:pPr algn="l">
+              <a:lnSpc>
+                <a:spcPct val="130000"/>
+              </a:lnSpc>
+              <a:spcAft>
+                <a:spcPts val="800"/>
+              </a:spcAft>
+            </a:pPr>
+            <a:r>
+              <a:rPr sz="1800" b="1">
+                <a:solidFill>
+                  <a:srgbClr val="080808"/>
+                </a:solidFill>
+                <a:latin typeface="Pretendard"/>
+                <a:ea typeface="Pretendard"/>
+              </a:rPr>
+              <a:t>• 비교의 핵심 메시지</a:t>
+            </a:r>
+          </a:p>
+        </p:txBody>
+      </p:sp>
+    </p:spTree>
+  </p:cSld>
+  <p:clrMapOvr>
+    <a:masterClrMapping/>
+  </p:clrMapOvr>
+</p:sld>
+</file>
+
+<file path=ppt/slides/slide9.xml><?xml version="1.0" encoding="utf-8"?>
+<p:sld xmlns:a="http://schemas.openxmlformats.org/drawingml/2006/main" xmlns:p="http://schemas.openxmlformats.org/presentationml/2006/main" xmlns:r="http://schemas.openxmlformats.org/officeDocument/2006/relationships">
+  <p:cSld>
+    <p:spTree>
+      <p:nvGrpSpPr>
+        <p:cNvPr id="1" name=""/>
+        <p:cNvGrpSpPr/>
+        <p:nvPr/>
+      </p:nvGrpSpPr>
+      <p:grpSpPr/>
+      <p:sp>
+        <p:nvSpPr>
+          <p:cNvPr id="2" name="Header"/>
           <p:cNvSpPr/>
           <p:nvPr/>
         </p:nvSpPr>
         <p:spPr>
           <a:xfrm>
-            <a:off x="432054" y="1981200"/>
-            <a:ext cx="5334000" cy="3302000"/>
-          </a:xfrm>
-          <a:prstGeom prst="rect">
-            <a:avLst/>
-          </a:prstGeom>
-          <a:gradFill flip="none" rotWithShape="1">
-            <a:gsLst>
-              <a:gs pos="0">
-                <a:srgbClr val="F5F5F5"/>
-              </a:gs>
-              <a:gs pos="100000">
-                <a:schemeClr val="accent1">
-                  <a:tint val="50000"/>
-                  <a:shade val="100000"/>
-                  <a:satMod val="350000"/>
-                </a:schemeClr>
-              </a:gs>
-            </a:gsLst>
-            <a:lin ang="16200000" scaled="0"/>
-            <a:tileRect/>
-          </a:gradFill>
-          <a:ln w="12700">
-            <a:solidFill>
-              <a:srgbClr val="999999"/>
-            </a:solidFill>
+            <a:off x="0" y="0"/>
+            <a:ext cx="12192000" cy="781050"/>
+          </a:xfrm>
+          <a:prstGeom prst="rect">
+            <a:avLst/>
+          </a:prstGeom>
+          <a:solidFill>
+            <a:srgbClr val="1C50B3"/>
+          </a:solidFill>
+          <a:ln>
+            <a:noFill/>
           </a:ln>
+          <a:effectLst>
+            <a:outerShdw blurRad="38100" dist="19050" dir="5400000" algn="ctr" rotWithShape="0">
+              <a:srgbClr val="000000">
+                <a:alpha val="33000"/>
+              </a:srgbClr>
+            </a:outerShdw>
+          </a:effectLst>
         </p:spPr>
         <p:style>
           <a:lnRef idx="1">
@@ -8770,7 +7561,7 @@
           <a:fillRef idx="3">
             <a:schemeClr val="accent1"/>
           </a:fillRef>
-          <a:effectRef idx="2">
+          <a:effectRef idx="0">
             <a:schemeClr val="accent1"/>
           </a:effectRef>
           <a:fontRef idx="minor">
@@ -8778,69 +7569,214 @@
           </a:fontRef>
         </p:style>
         <p:txBody>
-          <a:bodyPr rtlCol="0" anchor="ctr">
-            <a:noAutofit/>
+          <a:bodyPr rtlCol="0" anchor="ctr"/>
+          <a:lstStyle/>
+          <a:p>
+            <a:pPr algn="ctr"/>
+          </a:p>
+        </p:txBody>
+      </p:sp>
+      <p:sp>
+        <p:nvSpPr>
+          <p:cNvPr id="3" name="Title"/>
+          <p:cNvSpPr txBox="1"/>
+          <p:nvPr/>
+        </p:nvSpPr>
+        <p:spPr>
+          <a:xfrm>
+            <a:off x="257175" y="38100"/>
+            <a:ext cx="11677650" cy="666750"/>
+          </a:xfrm>
+          <a:prstGeom prst="rect">
+            <a:avLst/>
+          </a:prstGeom>
+          <a:noFill/>
+        </p:spPr>
+        <p:txBody>
+          <a:bodyPr wrap="square" lIns="19050" rIns="19050" tIns="0" bIns="0">
+            <a:spAutoFit/>
           </a:bodyPr>
           <a:lstStyle/>
           <a:p>
-            <a:pPr algn="ctr">
+            <a:pPr algn="l">
               <a:lnSpc>
                 <a:spcPct val="130000"/>
               </a:lnSpc>
+              <a:spcAft>
+                <a:spcPts val="800"/>
+              </a:spcAft>
             </a:pPr>
             <a:r>
-              <a:rPr lang="ko-KR" altLang="en-US">
-                <a:solidFill>
-                  <a:srgbClr val="444444"/>
-                </a:solidFill>
-                <a:latin typeface="맑은 고딕" panose="020B0503020000020004" pitchFamily="50" charset="-127"/>
+              <a:rPr sz="3000" b="1">
+                <a:solidFill>
+                  <a:srgbClr val="FFFFFF"/>
+                </a:solidFill>
+                <a:latin typeface="Pretendard"/>
+                <a:ea typeface="Pretendard"/>
               </a:rPr>
-              <a:t>이미지 영역</a:t>
-            </a:r>
-          </a:p>
-        </p:txBody>
-      </p:sp>
-      <p:sp>
-        <p:nvSpPr>
-          <p:cNvPr id="12" name="직사각형 11">
-            <a:extLst>
-              <a:ext uri="{FF2B5EF4-FFF2-40B4-BE49-F238E27FC236}">
-                <a16:creationId xmlns:a16="http://schemas.microsoft.com/office/drawing/2014/main" id="{F2AAD82F-5F45-65C9-2C55-137A30980A05}"/>
-              </a:ext>
-            </a:extLst>
-          </p:cNvPr>
+              <a:t>[한 줄 수식]</a:t>
+            </a:r>
+          </a:p>
+        </p:txBody>
+      </p:sp>
+      <p:sp>
+        <p:nvSpPr>
+          <p:cNvPr id="4" name="Page"/>
+          <p:cNvSpPr txBox="1"/>
+          <p:nvPr/>
+        </p:nvSpPr>
+        <p:spPr>
+          <a:xfrm>
+            <a:off x="247650" y="6553200"/>
+            <a:ext cx="1016000" cy="279400"/>
+          </a:xfrm>
+          <a:prstGeom prst="rect">
+            <a:avLst/>
+          </a:prstGeom>
+          <a:noFill/>
+        </p:spPr>
+        <p:txBody>
+          <a:bodyPr wrap="square" lIns="19050" rIns="19050" tIns="0" bIns="0">
+            <a:spAutoFit/>
+          </a:bodyPr>
+          <a:lstStyle/>
+          <a:p>
+            <a:pPr algn="l">
+              <a:lnSpc>
+                <a:spcPct val="130000"/>
+              </a:lnSpc>
+              <a:spcAft>
+                <a:spcPts val="800"/>
+              </a:spcAft>
+            </a:pPr>
+            <a:r>
+              <a:rPr sz="1128" b="1">
+                <a:solidFill>
+                  <a:srgbClr val="777777"/>
+                </a:solidFill>
+                <a:latin typeface="Pretendard"/>
+                <a:ea typeface="Pretendard"/>
+              </a:rPr>
+              <a:t>09</a:t>
+            </a:r>
+          </a:p>
+        </p:txBody>
+      </p:sp>
+      <p:sp>
+        <p:nvSpPr>
+          <p:cNvPr id="5" name="Logo"/>
+          <p:cNvSpPr txBox="1"/>
+          <p:nvPr/>
+        </p:nvSpPr>
+        <p:spPr>
+          <a:xfrm>
+            <a:off x="11163300" y="6413500"/>
+            <a:ext cx="1028700" cy="444500"/>
+          </a:xfrm>
+          <a:prstGeom prst="rect">
+            <a:avLst/>
+          </a:prstGeom>
+          <a:noFill/>
+        </p:spPr>
+        <p:txBody>
+          <a:bodyPr wrap="square" lIns="19050" rIns="19050" tIns="0" bIns="0">
+            <a:spAutoFit/>
+          </a:bodyPr>
+          <a:lstStyle/>
+          <a:p>
+            <a:pPr algn="r">
+              <a:lnSpc>
+                <a:spcPct val="130000"/>
+              </a:lnSpc>
+              <a:spcAft>
+                <a:spcPts val="800"/>
+              </a:spcAft>
+            </a:pPr>
+            <a:r>
+              <a:rPr sz="2258" b="1">
+                <a:solidFill>
+                  <a:srgbClr val="BE1551"/>
+                </a:solidFill>
+                <a:latin typeface="Pretendard"/>
+                <a:ea typeface="Pretendard"/>
+              </a:rPr>
+              <a:t>CBNU</a:t>
+            </a:r>
+          </a:p>
+        </p:txBody>
+      </p:sp>
+      <p:sp>
+        <p:nvSpPr>
+          <p:cNvPr id="6" name="Equation"/>
+          <p:cNvSpPr txBox="1"/>
+          <p:nvPr/>
+        </p:nvSpPr>
+        <p:spPr>
+          <a:xfrm>
+            <a:off x="342900" y="1460500"/>
+            <a:ext cx="11487150" cy="558800"/>
+          </a:xfrm>
+          <a:prstGeom prst="rect">
+            <a:avLst/>
+          </a:prstGeom>
+          <a:noFill/>
+        </p:spPr>
+        <p:txBody>
+          <a:bodyPr wrap="square" lIns="19050" rIns="19050" tIns="0" bIns="0">
+            <a:spAutoFit/>
+          </a:bodyPr>
+          <a:lstStyle/>
+          <a:p>
+            <a:pPr algn="l">
+              <a:lnSpc>
+                <a:spcPct val="130000"/>
+              </a:lnSpc>
+              <a:spcAft>
+                <a:spcPts val="800"/>
+              </a:spcAft>
+            </a:pPr>
+            <a:r>
+              <a:rPr sz="2200" b="1">
+                <a:solidFill>
+                  <a:srgbClr val="080808"/>
+                </a:solidFill>
+                <a:latin typeface="Pretendard"/>
+                <a:ea typeface="Pretendard"/>
+              </a:rPr>
+              <a:t>[수식]</a:t>
+            </a:r>
+          </a:p>
+        </p:txBody>
+      </p:sp>
+      <p:sp>
+        <p:nvSpPr>
+          <p:cNvPr id="7" name="ExplanationBox"/>
           <p:cNvSpPr/>
           <p:nvPr/>
         </p:nvSpPr>
         <p:spPr>
           <a:xfrm>
-            <a:off x="6425946" y="1981200"/>
-            <a:ext cx="5334000" cy="3302000"/>
-          </a:xfrm>
-          <a:prstGeom prst="rect">
-            <a:avLst/>
-          </a:prstGeom>
-          <a:gradFill flip="none" rotWithShape="1">
-            <a:gsLst>
-              <a:gs pos="0">
-                <a:srgbClr val="F5F5F5"/>
-              </a:gs>
-              <a:gs pos="100000">
-                <a:schemeClr val="accent1">
-                  <a:tint val="50000"/>
-                  <a:shade val="100000"/>
-                  <a:satMod val="350000"/>
-                </a:schemeClr>
-              </a:gs>
-            </a:gsLst>
-            <a:lin ang="16200000" scaled="0"/>
-            <a:tileRect/>
-          </a:gradFill>
-          <a:ln w="12700">
-            <a:solidFill>
-              <a:srgbClr val="999999"/>
-            </a:solidFill>
+            <a:off x="257175" y="2413000"/>
+            <a:ext cx="11677650" cy="3930650"/>
+          </a:xfrm>
+          <a:prstGeom prst="roundRect">
+            <a:avLst>
+              <a:gd name="adj" fmla="val 6000"/>
+            </a:avLst>
+          </a:prstGeom>
+          <a:solidFill>
+            <a:srgbClr val="1C50B3"/>
+          </a:solidFill>
+          <a:ln>
+            <a:noFill/>
           </a:ln>
+          <a:effectLst>
+            <a:outerShdw blurRad="38100" dist="19050" dir="5400000" algn="ctr" rotWithShape="0">
+              <a:srgbClr val="000000">
+                <a:alpha val="33000"/>
+              </a:srgbClr>
+            </a:outerShdw>
+          </a:effectLst>
         </p:spPr>
         <p:style>
           <a:lnRef idx="1">
@@ -8849,7 +7785,7 @@
           <a:fillRef idx="3">
             <a:schemeClr val="accent1"/>
           </a:fillRef>
-          <a:effectRef idx="2">
+          <a:effectRef idx="0">
             <a:schemeClr val="accent1"/>
           </a:effectRef>
           <a:fontRef idx="minor">
@@ -8857,24 +7793,120 @@
           </a:fontRef>
         </p:style>
         <p:txBody>
-          <a:bodyPr rtlCol="0" anchor="ctr">
-            <a:noAutofit/>
+          <a:bodyPr rtlCol="0" anchor="ctr"/>
+          <a:lstStyle/>
+          <a:p>
+            <a:pPr algn="ctr"/>
+          </a:p>
+        </p:txBody>
+      </p:sp>
+      <p:sp>
+        <p:nvSpPr>
+          <p:cNvPr id="8" name="ExplanationBoxInterior"/>
+          <p:cNvSpPr/>
+          <p:nvPr/>
+        </p:nvSpPr>
+        <p:spPr>
+          <a:xfrm>
+            <a:off x="409575" y="2565400"/>
+            <a:ext cx="11372850" cy="3625850"/>
+          </a:xfrm>
+          <a:prstGeom prst="rect">
+            <a:avLst/>
+          </a:prstGeom>
+          <a:solidFill>
+            <a:srgbClr val="FFFFFF"/>
+          </a:solidFill>
+          <a:ln>
+            <a:noFill/>
+          </a:ln>
+          <a:effectLst/>
+        </p:spPr>
+        <p:style>
+          <a:lnRef idx="1">
+            <a:schemeClr val="accent1"/>
+          </a:lnRef>
+          <a:fillRef idx="3">
+            <a:schemeClr val="accent1"/>
+          </a:fillRef>
+          <a:effectRef idx="0">
+            <a:schemeClr val="accent1"/>
+          </a:effectRef>
+          <a:fontRef idx="minor">
+            <a:schemeClr val="lt1"/>
+          </a:fontRef>
+        </p:style>
+        <p:txBody>
+          <a:bodyPr rtlCol="0" anchor="ctr"/>
+          <a:lstStyle/>
+          <a:p>
+            <a:pPr algn="ctr"/>
+          </a:p>
+        </p:txBody>
+      </p:sp>
+      <p:sp>
+        <p:nvSpPr>
+          <p:cNvPr id="9" name="Body"/>
+          <p:cNvSpPr txBox="1"/>
+          <p:nvPr/>
+        </p:nvSpPr>
+        <p:spPr>
+          <a:xfrm>
+            <a:off x="561975" y="2717800"/>
+            <a:ext cx="11068050" cy="3321050"/>
+          </a:xfrm>
+          <a:prstGeom prst="rect">
+            <a:avLst/>
+          </a:prstGeom>
+          <a:noFill/>
+        </p:spPr>
+        <p:txBody>
+          <a:bodyPr wrap="square" lIns="19050" rIns="19050" tIns="0" bIns="0">
+            <a:spAutoFit/>
           </a:bodyPr>
           <a:lstStyle/>
           <a:p>
-            <a:pPr algn="ctr">
+            <a:pPr algn="l">
               <a:lnSpc>
                 <a:spcPct val="130000"/>
               </a:lnSpc>
+              <a:spcAft>
+                <a:spcPts val="800"/>
+              </a:spcAft>
             </a:pPr>
             <a:r>
-              <a:rPr lang="ko-KR" altLang="en-US">
-                <a:solidFill>
-                  <a:srgbClr val="444444"/>
-                </a:solidFill>
-                <a:latin typeface="맑은 고딕" panose="020B0503020000020004" pitchFamily="50" charset="-127"/>
+              <a:rPr sz="2200" b="1">
+                <a:solidFill>
+                  <a:srgbClr val="080808"/>
+                </a:solidFill>
+                <a:latin typeface="Pretendard"/>
+                <a:ea typeface="Pretendard"/>
               </a:rPr>
-              <a:t>이미지 영역</a:t>
+              <a:t>• 다음 값의 선택</a:t>
+            </a:r>
+            <a:br/>
+            <a:br/>
+            <a:r>
+              <a:rPr sz="2200" b="1">
+                <a:solidFill>
+                  <a:srgbClr val="080808"/>
+                </a:solidFill>
+                <a:latin typeface="Pretendard"/>
+                <a:ea typeface="Pretendard"/>
+              </a:rPr>
+              <a:t>• 갱신 과정</a:t>
+            </a:r>
+            <a:br/>
+            <a:br/>
+            <a:r>
+              <a:rPr sz="2200" b="1">
+                <a:solidFill>
+                  <a:srgbClr val="080808"/>
+                </a:solidFill>
+                <a:latin typeface="Pretendard"/>
+                <a:ea typeface="Pretendard"/>
+              </a:rPr>
+              <a:t>• 학습 결과 해석</a:t>
             </a:r>
           </a:p>
         </p:txBody>
@@ -9205,319 +8237,4 @@
   </a:objectDefaults>
   <a:extraClrSchemeLst/>
 </a:theme>
-</file>
-
-<file path=ppt/theme/theme2.xml><?xml version="1.0" encoding="utf-8"?>
-<a:theme xmlns:a="http://schemas.openxmlformats.org/drawingml/2006/main" name="Office 테마">
-  <a:themeElements>
-    <a:clrScheme name="Office">
-      <a:dk1>
-        <a:sysClr val="windowText" lastClr="000000"/>
-      </a:dk1>
-      <a:lt1>
-        <a:sysClr val="window" lastClr="FFFFFF"/>
-      </a:lt1>
-      <a:dk2>
-        <a:srgbClr val="0E2841"/>
-      </a:dk2>
-      <a:lt2>
-        <a:srgbClr val="E8E8E8"/>
-      </a:lt2>
-      <a:accent1>
-        <a:srgbClr val="156082"/>
-      </a:accent1>
-      <a:accent2>
-        <a:srgbClr val="E97132"/>
-      </a:accent2>
-      <a:accent3>
-        <a:srgbClr val="196B24"/>
-      </a:accent3>
-      <a:accent4>
-        <a:srgbClr val="0F9ED5"/>
-      </a:accent4>
-      <a:accent5>
-        <a:srgbClr val="A02B93"/>
-      </a:accent5>
-      <a:accent6>
-        <a:srgbClr val="4EA72E"/>
-      </a:accent6>
-      <a:hlink>
-        <a:srgbClr val="467886"/>
-      </a:hlink>
-      <a:folHlink>
-        <a:srgbClr val="96607D"/>
-      </a:folHlink>
-    </a:clrScheme>
-    <a:fontScheme name="Office">
-      <a:majorFont>
-        <a:latin typeface="맑은 고딕" panose="02110004020202020204"/>
-        <a:ea typeface=""/>
-        <a:cs typeface=""/>
-        <a:font script="Jpan" typeface="游ゴシック Light"/>
-        <a:font script="Hang" typeface="맑은 고딕"/>
-        <a:font script="Hans" typeface="等线 Light"/>
-        <a:font script="Hant" typeface="新細明體"/>
-        <a:font script="Arab" typeface="Times New Roman"/>
-        <a:font script="Hebr" typeface="Times New Roman"/>
-        <a:font script="Thai" typeface="Angsana New"/>
-        <a:font script="Ethi" typeface="Nyala"/>
-        <a:font script="Beng" typeface="Vrinda"/>
-        <a:font script="Gujr" typeface="Shruti"/>
-        <a:font script="Khmr" typeface="MoolBoran"/>
-        <a:font script="Knda" typeface="Tunga"/>
-        <a:font script="Guru" typeface="Raavi"/>
-        <a:font script="Cans" typeface="Euphemia"/>
-        <a:font script="Cher" typeface="Plantagenet Cherokee"/>
-        <a:font script="Yiii" typeface="Microsoft Yi Baiti"/>
-        <a:font script="Tibt" typeface="Microsoft Himalaya"/>
-        <a:font script="Thaa" typeface="MV Boli"/>
-        <a:font script="Deva" typeface="Mangal"/>
-        <a:font script="Telu" typeface="Gautami"/>
-        <a:font script="Taml" typeface="Latha"/>
-        <a:font script="Syrc" typeface="Estrangelo Edessa"/>
-        <a:font script="Orya" typeface="Kalinga"/>
-        <a:font script="Mlym" typeface="Kartika"/>
-        <a:font script="Laoo" typeface="DokChampa"/>
-        <a:font script="Sinh" typeface="Iskoola Pota"/>
-        <a:font script="Mong" typeface="Mongolian Baiti"/>
-        <a:font script="Viet" typeface="Times New Roman"/>
-        <a:font script="Uigh" typeface="Microsoft Uighur"/>
-        <a:font script="Geor" typeface="Sylfaen"/>
-        <a:font script="Armn" typeface="Arial"/>
-        <a:font script="Bugi" typeface="Leelawadee UI"/>
-        <a:font script="Bopo" typeface="Microsoft JhengHei"/>
-        <a:font script="Java" typeface="Javanese Text"/>
-        <a:font script="Lisu" typeface="Segoe UI"/>
-        <a:font script="Mymr" typeface="Myanmar Text"/>
-        <a:font script="Nkoo" typeface="Ebrima"/>
-        <a:font script="Olck" typeface="Nirmala UI"/>
-        <a:font script="Osma" typeface="Ebrima"/>
-        <a:font script="Phag" typeface="Phagspa"/>
-        <a:font script="Syrn" typeface="Estrangelo Edessa"/>
-        <a:font script="Syrj" typeface="Estrangelo Edessa"/>
-        <a:font script="Syre" typeface="Estrangelo Edessa"/>
-        <a:font script="Sora" typeface="Nirmala UI"/>
-        <a:font script="Tale" typeface="Microsoft Tai Le"/>
-        <a:font script="Talu" typeface="Microsoft New Tai Lue"/>
-        <a:font script="Tfng" typeface="Ebrima"/>
-      </a:majorFont>
-      <a:minorFont>
-        <a:latin typeface="맑은 고딕" panose="02110004020202020204"/>
-        <a:ea typeface=""/>
-        <a:cs typeface=""/>
-        <a:font script="Jpan" typeface="游ゴシック"/>
-        <a:font script="Hang" typeface="맑은 고딕"/>
-        <a:font script="Hans" typeface="等线"/>
-        <a:font script="Hant" typeface="新細明體"/>
-        <a:font script="Arab" typeface="Arial"/>
-        <a:font script="Hebr" typeface="Arial"/>
-        <a:font script="Thai" typeface="Cordia New"/>
-        <a:font script="Ethi" typeface="Nyala"/>
-        <a:font script="Beng" typeface="Vrinda"/>
-        <a:font script="Gujr" typeface="Shruti"/>
-        <a:font script="Khmr" typeface="DaunPenh"/>
-        <a:font script="Knda" typeface="Tunga"/>
-        <a:font script="Guru" typeface="Raavi"/>
-        <a:font script="Cans" typeface="Euphemia"/>
-        <a:font script="Cher" typeface="Plantagenet Cherokee"/>
-        <a:font script="Yiii" typeface="Microsoft Yi Baiti"/>
-        <a:font script="Tibt" typeface="Microsoft Himalaya"/>
-        <a:font script="Thaa" typeface="MV Boli"/>
-        <a:font script="Deva" typeface="Mangal"/>
-        <a:font script="Telu" typeface="Gautami"/>
-        <a:font script="Taml" typeface="Latha"/>
-        <a:font script="Syrc" typeface="Estrangelo Edessa"/>
-        <a:font script="Orya" typeface="Kalinga"/>
-        <a:font script="Mlym" typeface="Kartika"/>
-        <a:font script="Laoo" typeface="DokChampa"/>
-        <a:font script="Sinh" typeface="Iskoola Pota"/>
-        <a:font script="Mong" typeface="Mongolian Baiti"/>
-        <a:font script="Viet" typeface="Arial"/>
-        <a:font script="Uigh" typeface="Microsoft Uighur"/>
-        <a:font script="Geor" typeface="Sylfaen"/>
-        <a:font script="Armn" typeface="Arial"/>
-        <a:font script="Bugi" typeface="Leelawadee UI"/>
-        <a:font script="Bopo" typeface="Microsoft JhengHei"/>
-        <a:font script="Java" typeface="Javanese Text"/>
-        <a:font script="Lisu" typeface="Segoe UI"/>
-        <a:font script="Mymr" typeface="Myanmar Text"/>
-        <a:font script="Nkoo" typeface="Ebrima"/>
-        <a:font script="Olck" typeface="Nirmala UI"/>
-        <a:font script="Osma" typeface="Ebrima"/>
-        <a:font script="Phag" typeface="Phagspa"/>
-        <a:font script="Syrn" typeface="Estrangelo Edessa"/>
-        <a:font script="Syrj" typeface="Estrangelo Edessa"/>
-        <a:font script="Syre" typeface="Estrangelo Edessa"/>
-        <a:font script="Sora" typeface="Nirmala UI"/>
-        <a:font script="Tale" typeface="Microsoft Tai Le"/>
-        <a:font script="Talu" typeface="Microsoft New Tai Lue"/>
-        <a:font script="Tfng" typeface="Ebrima"/>
-      </a:minorFont>
-    </a:fontScheme>
-    <a:fmtScheme name="Office">
-      <a:fillStyleLst>
-        <a:solidFill>
-          <a:schemeClr val="phClr"/>
-        </a:solidFill>
-        <a:gradFill rotWithShape="1">
-          <a:gsLst>
-            <a:gs pos="0">
-              <a:schemeClr val="phClr">
-                <a:lumMod val="110000"/>
-                <a:satMod val="105000"/>
-                <a:tint val="67000"/>
-              </a:schemeClr>
-            </a:gs>
-            <a:gs pos="50000">
-              <a:schemeClr val="phClr">
-                <a:lumMod val="105000"/>
-                <a:satMod val="103000"/>
-                <a:tint val="73000"/>
-              </a:schemeClr>
-            </a:gs>
-            <a:gs pos="100000">
-              <a:schemeClr val="phClr">
-                <a:lumMod val="105000"/>
-                <a:satMod val="109000"/>
-                <a:tint val="81000"/>
-              </a:schemeClr>
-            </a:gs>
-          </a:gsLst>
-          <a:lin ang="5400000" scaled="0"/>
-        </a:gradFill>
-        <a:gradFill rotWithShape="1">
-          <a:gsLst>
-            <a:gs pos="0">
-              <a:schemeClr val="phClr">
-                <a:satMod val="103000"/>
-                <a:lumMod val="102000"/>
-                <a:tint val="94000"/>
-              </a:schemeClr>
-            </a:gs>
-            <a:gs pos="50000">
-              <a:schemeClr val="phClr">
-                <a:satMod val="110000"/>
-                <a:lumMod val="100000"/>
-                <a:shade val="100000"/>
-              </a:schemeClr>
-            </a:gs>
-            <a:gs pos="100000">
-              <a:schemeClr val="phClr">
-                <a:lumMod val="99000"/>
-                <a:satMod val="120000"/>
-                <a:shade val="78000"/>
-              </a:schemeClr>
-            </a:gs>
-          </a:gsLst>
-          <a:lin ang="5400000" scaled="0"/>
-        </a:gradFill>
-      </a:fillStyleLst>
-      <a:lnStyleLst>
-        <a:ln w="12700" cap="flat" cmpd="sng" algn="ctr">
-          <a:solidFill>
-            <a:schemeClr val="phClr"/>
-          </a:solidFill>
-          <a:prstDash val="solid"/>
-          <a:miter lim="800000"/>
-        </a:ln>
-        <a:ln w="19050" cap="flat" cmpd="sng" algn="ctr">
-          <a:solidFill>
-            <a:schemeClr val="phClr"/>
-          </a:solidFill>
-          <a:prstDash val="solid"/>
-          <a:miter lim="800000"/>
-        </a:ln>
-        <a:ln w="25400" cap="flat" cmpd="sng" algn="ctr">
-          <a:solidFill>
-            <a:schemeClr val="phClr"/>
-          </a:solidFill>
-          <a:prstDash val="solid"/>
-          <a:miter lim="800000"/>
-        </a:ln>
-      </a:lnStyleLst>
-      <a:effectStyleLst>
-        <a:effectStyle>
-          <a:effectLst/>
-        </a:effectStyle>
-        <a:effectStyle>
-          <a:effectLst/>
-        </a:effectStyle>
-        <a:effectStyle>
-          <a:effectLst>
-            <a:outerShdw blurRad="57150" dist="19050" dir="5400000" algn="ctr" rotWithShape="0">
-              <a:srgbClr val="000000">
-                <a:alpha val="63000"/>
-              </a:srgbClr>
-            </a:outerShdw>
-          </a:effectLst>
-        </a:effectStyle>
-      </a:effectStyleLst>
-      <a:bgFillStyleLst>
-        <a:solidFill>
-          <a:schemeClr val="phClr"/>
-        </a:solidFill>
-        <a:solidFill>
-          <a:schemeClr val="phClr">
-            <a:tint val="95000"/>
-            <a:satMod val="170000"/>
-          </a:schemeClr>
-        </a:solidFill>
-        <a:gradFill rotWithShape="1">
-          <a:gsLst>
-            <a:gs pos="0">
-              <a:schemeClr val="phClr">
-                <a:tint val="93000"/>
-                <a:satMod val="150000"/>
-                <a:shade val="98000"/>
-                <a:lumMod val="102000"/>
-              </a:schemeClr>
-            </a:gs>
-            <a:gs pos="50000">
-              <a:schemeClr val="phClr">
-                <a:tint val="98000"/>
-                <a:satMod val="130000"/>
-                <a:shade val="90000"/>
-                <a:lumMod val="103000"/>
-              </a:schemeClr>
-            </a:gs>
-            <a:gs pos="100000">
-              <a:schemeClr val="phClr">
-                <a:shade val="63000"/>
-                <a:satMod val="120000"/>
-              </a:schemeClr>
-            </a:gs>
-          </a:gsLst>
-          <a:lin ang="5400000" scaled="0"/>
-        </a:gradFill>
-      </a:bgFillStyleLst>
-    </a:fmtScheme>
-  </a:themeElements>
-  <a:objectDefaults>
-    <a:lnDef>
-      <a:spPr/>
-      <a:bodyPr/>
-      <a:lstStyle/>
-      <a:style>
-        <a:lnRef idx="2">
-          <a:schemeClr val="accent1"/>
-        </a:lnRef>
-        <a:fillRef idx="0">
-          <a:schemeClr val="accent1"/>
-        </a:fillRef>
-        <a:effectRef idx="1">
-          <a:schemeClr val="accent1"/>
-        </a:effectRef>
-        <a:fontRef idx="minor">
-          <a:schemeClr val="tx1"/>
-        </a:fontRef>
-      </a:style>
-    </a:lnDef>
-  </a:objectDefaults>
-  <a:extraClrSchemeLst/>
-  <a:extLst>
-    <a:ext uri="{05A4C25C-085E-4340-85A3-A5531E510DB2}">
-      <thm15:themeFamily xmlns:thm15="http://schemas.microsoft.com/office/thememl/2012/main" name="Office Theme" id="{2E142A2C-CD16-42D6-873A-C26D2A0506FA}" vid="{1BDDFF52-6CD6-40A5-AB3C-68EB2F1E4D0A}"/>
-    </a:ext>
-  </a:extLst>
-</a:theme>
 </file>